--- a/output/BACKTRACK_KEIC_2026.pptx
+++ b/output/BACKTRACK_KEIC_2026.pptx
@@ -6713,7 +6713,139 @@
       </p:grpSp>
       <p:sp>
         <p:nvSpPr>
-          <p:cNvPr name="TextBox 5" id="5"/>
+          <p:cNvPr name="Freeform 5" id="5"/>
+          <p:cNvSpPr/>
+          <p:nvPr/>
+        </p:nvSpPr>
+        <p:spPr>
+          <a:xfrm>
+            <a:off x="1714500" y="4476750"/>
+            <a:ext cx="8763000" cy="914864"/>
+          </a:xfrm>
+          <a:custGeom>
+            <a:avLst/>
+            <a:gdLst/>
+            <a:ahLst/>
+            <a:cxnLst/>
+            <a:rect r="r" b="b" t="t" l="l"/>
+            <a:pathLst>
+              <a:path h="914864" w="8763000">
+                <a:moveTo>
+                  <a:pt x="0" y="0"/>
+                </a:moveTo>
+                <a:quadBezTo>
+                  <a:pt x="4381500" y="1829728"/>
+                  <a:pt x="8763000" y="0"/>
+                </a:quadBezTo>
+              </a:path>
+            </a:pathLst>
+          </a:custGeom>
+          <a:ln cap="rnd" w="66675">
+            <a:solidFill>
+              <a:srgbClr val="C96331"/>
+            </a:solidFill>
+            <a:prstDash val="solid"/>
+            <a:headEnd type="oval" len="lg" w="lg"/>
+            <a:tailEnd type="arrow" len="sm" w="med"/>
+          </a:ln>
+        </p:spPr>
+      </p:sp>
+      <p:grpSp>
+        <p:nvGrpSpPr>
+          <p:cNvPr name="Group 6" id="6"/>
+          <p:cNvGrpSpPr/>
+          <p:nvPr/>
+        </p:nvGrpSpPr>
+        <p:grpSpPr>
+          <a:xfrm rot="0">
+            <a:off x="5962650" y="5248275"/>
+            <a:ext cx="266700" cy="266700"/>
+            <a:chOff x="0" y="0"/>
+            <a:chExt cx="105363" cy="105363"/>
+          </a:xfrm>
+        </p:grpSpPr>
+        <p:sp>
+          <p:nvSpPr>
+            <p:cNvPr name="Freeform 7" id="7"/>
+            <p:cNvSpPr/>
+            <p:nvPr/>
+          </p:nvSpPr>
+          <p:spPr>
+            <a:xfrm flipH="false" flipV="false" rot="0">
+              <a:off x="0" y="0"/>
+              <a:ext cx="105363" cy="105363"/>
+            </a:xfrm>
+            <a:custGeom>
+              <a:avLst/>
+              <a:gdLst/>
+              <a:ahLst/>
+              <a:cxnLst/>
+              <a:rect r="r" b="b" t="t" l="l"/>
+              <a:pathLst>
+                <a:path h="105363" w="105363">
+                  <a:moveTo>
+                    <a:pt x="52681" y="0"/>
+                  </a:moveTo>
+                  <a:cubicBezTo>
+                    <a:pt x="23586" y="0"/>
+                    <a:pt x="0" y="23586"/>
+                    <a:pt x="0" y="52681"/>
+                  </a:cubicBezTo>
+                  <a:cubicBezTo>
+                    <a:pt x="0" y="81777"/>
+                    <a:pt x="23586" y="105363"/>
+                    <a:pt x="52681" y="105363"/>
+                  </a:cubicBezTo>
+                  <a:cubicBezTo>
+                    <a:pt x="81777" y="105363"/>
+                    <a:pt x="105363" y="81777"/>
+                    <a:pt x="105363" y="52681"/>
+                  </a:cubicBezTo>
+                  <a:cubicBezTo>
+                    <a:pt x="105363" y="23586"/>
+                    <a:pt x="81777" y="0"/>
+                    <a:pt x="52681" y="0"/>
+                  </a:cubicBezTo>
+                  <a:close/>
+                </a:path>
+              </a:pathLst>
+            </a:custGeom>
+            <a:solidFill>
+              <a:srgbClr val="C96331"/>
+            </a:solidFill>
+          </p:spPr>
+        </p:sp>
+        <p:sp>
+          <p:nvSpPr>
+            <p:cNvPr name="TextBox 8" id="8"/>
+            <p:cNvSpPr txBox="true"/>
+            <p:nvPr/>
+          </p:nvSpPr>
+          <p:spPr>
+            <a:xfrm>
+              <a:off x="9878" y="9878"/>
+              <a:ext cx="85607" cy="85607"/>
+            </a:xfrm>
+            <a:prstGeom prst="rect">
+              <a:avLst/>
+            </a:prstGeom>
+          </p:spPr>
+          <p:txBody>
+            <a:bodyPr anchor="ctr" rtlCol="false" tIns="50800" lIns="50800" bIns="50800" rIns="50800"/>
+            <a:lstStyle/>
+            <a:p>
+              <a:pPr algn="ctr">
+                <a:lnSpc>
+                  <a:spcPts val="1372"/>
+                </a:lnSpc>
+              </a:pPr>
+            </a:p>
+          </p:txBody>
+        </p:sp>
+      </p:grpSp>
+      <p:sp>
+        <p:nvSpPr>
+          <p:cNvPr name="TextBox 9" id="9"/>
           <p:cNvSpPr txBox="true"/>
           <p:nvPr/>
         </p:nvSpPr>
@@ -6754,7 +6886,7 @@
       </p:sp>
       <p:sp>
         <p:nvSpPr>
-          <p:cNvPr name="TextBox 6" id="6"/>
+          <p:cNvPr name="TextBox 10" id="10"/>
           <p:cNvSpPr txBox="true"/>
           <p:nvPr/>
         </p:nvSpPr>
@@ -6795,14 +6927,14 @@
       </p:sp>
       <p:sp>
         <p:nvSpPr>
-          <p:cNvPr name="TextBox 7" id="7"/>
+          <p:cNvPr name="TextBox 11" id="11"/>
           <p:cNvSpPr txBox="true"/>
           <p:nvPr/>
         </p:nvSpPr>
         <p:spPr>
           <a:xfrm rot="0">
-            <a:off x="609600" y="1924050"/>
-            <a:ext cx="10972800" cy="824484"/>
+            <a:off x="609600" y="1057275"/>
+            <a:ext cx="10972800" cy="674624"/>
           </a:xfrm>
           <a:prstGeom prst="rect">
             <a:avLst/>
@@ -6816,11 +6948,11 @@
           <a:p>
             <a:pPr algn="l">
               <a:lnSpc>
-                <a:spcPts val="6588"/>
+                <a:spcPts val="5368"/>
               </a:lnSpc>
             </a:pPr>
             <a:r>
-              <a:rPr lang="en-US" b="true" sz="5400">
+              <a:rPr lang="en-US" b="true" sz="4400">
                 <a:solidFill>
                   <a:srgbClr val="151521"/>
                 </a:solidFill>
@@ -6829,21 +6961,21 @@
                 <a:cs typeface="DM Sans Bold"/>
                 <a:sym typeface="DM Sans Bold"/>
               </a:rPr>
-              <a:t>Stuck on one step.</a:t>
-            </a:r>
-          </a:p>
-        </p:txBody>
-      </p:sp>
-      <p:sp>
-        <p:nvSpPr>
-          <p:cNvPr name="TextBox 8" id="8"/>
+              <a:t>Find the missing skill.</a:t>
+            </a:r>
+          </a:p>
+        </p:txBody>
+      </p:sp>
+      <p:sp>
+        <p:nvSpPr>
+          <p:cNvPr name="TextBox 12" id="12"/>
           <p:cNvSpPr txBox="true"/>
           <p:nvPr/>
         </p:nvSpPr>
         <p:spPr>
           <a:xfrm rot="0">
-            <a:off x="609600" y="2867025"/>
-            <a:ext cx="10972800" cy="824484"/>
+            <a:off x="609600" y="1743075"/>
+            <a:ext cx="10972800" cy="674624"/>
           </a:xfrm>
           <a:prstGeom prst="rect">
             <a:avLst/>
@@ -6857,11 +6989,11 @@
           <a:p>
             <a:pPr algn="l">
               <a:lnSpc>
-                <a:spcPts val="6588"/>
+                <a:spcPts val="5368"/>
               </a:lnSpc>
             </a:pPr>
             <a:r>
-              <a:rPr lang="en-US" b="true" sz="5400">
+              <a:rPr lang="en-US" b="true" sz="4400">
                 <a:solidFill>
                   <a:srgbClr val="5753FA"/>
                 </a:solidFill>
@@ -6870,21 +7002,21 @@
                 <a:cs typeface="DM Sans Bold"/>
                 <a:sym typeface="DM Sans Bold"/>
               </a:rPr>
-              <a:t>Lost in whole lessons.</a:t>
-            </a:r>
-          </a:p>
-        </p:txBody>
-      </p:sp>
-      <p:sp>
-        <p:nvSpPr>
-          <p:cNvPr name="TextBox 9" id="9"/>
+              <a:t>Get back to today’s lesson.</a:t>
+            </a:r>
+          </a:p>
+        </p:txBody>
+      </p:sp>
+      <p:sp>
+        <p:nvSpPr>
+          <p:cNvPr name="TextBox 13" id="13"/>
           <p:cNvSpPr txBox="true"/>
           <p:nvPr/>
         </p:nvSpPr>
         <p:spPr>
           <a:xfrm rot="0">
-            <a:off x="609600" y="4391025"/>
-            <a:ext cx="10972800" cy="393573"/>
+            <a:off x="609600" y="2733675"/>
+            <a:ext cx="10972800" cy="651891"/>
           </a:xfrm>
           <a:prstGeom prst="rect">
             <a:avLst/>
@@ -6898,11 +7030,11 @@
           <a:p>
             <a:pPr algn="l">
               <a:lnSpc>
-                <a:spcPts val="3111"/>
+                <a:spcPts val="2562"/>
               </a:lnSpc>
             </a:pPr>
             <a:r>
-              <a:rPr lang="en-US" sz="2550">
+              <a:rPr lang="en-US" sz="2100">
                 <a:solidFill>
                   <a:srgbClr val="536073"/>
                 </a:solidFill>
@@ -6911,21 +7043,40 @@
                 <a:cs typeface="DM Sans"/>
                 <a:sym typeface="DM Sans"/>
               </a:rPr>
-              <a:t>Find the step. Get a focused Khan repair. Return to your task.</a:t>
-            </a:r>
-          </a:p>
-        </p:txBody>
-      </p:sp>
-      <p:sp>
-        <p:nvSpPr>
-          <p:cNvPr name="TextBox 10" id="10"/>
+              <a:t>THE PROBLEM</a:t>
+            </a:r>
+          </a:p>
+          <a:p>
+            <a:pPr algn="l">
+              <a:lnSpc>
+                <a:spcPts val="2562"/>
+              </a:lnSpc>
+            </a:pPr>
+            <a:r>
+              <a:rPr lang="en-US" sz="2100">
+                <a:solidFill>
+                  <a:srgbClr val="536073"/>
+                </a:solidFill>
+                <a:latin typeface="DM Sans"/>
+                <a:ea typeface="DM Sans"/>
+                <a:cs typeface="DM Sans"/>
+                <a:sym typeface="DM Sans"/>
+              </a:rPr>
+              <a:t>A student gets stuck, but doesn’t know which earlier skill to review.</a:t>
+            </a:r>
+          </a:p>
+        </p:txBody>
+      </p:sp>
+      <p:sp>
+        <p:nvSpPr>
+          <p:cNvPr name="TextBox 14" id="14"/>
           <p:cNvSpPr txBox="true"/>
           <p:nvPr/>
         </p:nvSpPr>
         <p:spPr>
           <a:xfrm rot="0">
-            <a:off x="609600" y="6105525"/>
-            <a:ext cx="9525000" cy="262318"/>
+            <a:off x="609600" y="6448425"/>
+            <a:ext cx="9525000" cy="215519"/>
           </a:xfrm>
           <a:prstGeom prst="rect">
             <a:avLst/>
@@ -6939,11 +7090,11 @@
           <a:p>
             <a:pPr algn="l">
               <a:lnSpc>
-                <a:spcPts val="2104"/>
+                <a:spcPts val="1708"/>
               </a:lnSpc>
             </a:pPr>
             <a:r>
-              <a:rPr lang="en-US" sz="1725">
+              <a:rPr lang="en-US" sz="1400">
                 <a:solidFill>
                   <a:srgbClr val="536073"/>
                 </a:solidFill>
@@ -6953,6 +7104,186 @@
                 <a:sym typeface="DM Sans"/>
               </a:rPr>
               <a:t>University of the Philippines Manila</a:t>
+            </a:r>
+          </a:p>
+        </p:txBody>
+      </p:sp>
+      <p:sp>
+        <p:nvSpPr>
+          <p:cNvPr name="TextBox 15" id="15"/>
+          <p:cNvSpPr txBox="true"/>
+          <p:nvPr/>
+        </p:nvSpPr>
+        <p:spPr>
+          <a:xfrm rot="0">
+            <a:off x="285750" y="3695700"/>
+            <a:ext cx="2857500" cy="614045"/>
+          </a:xfrm>
+          <a:prstGeom prst="rect">
+            <a:avLst/>
+          </a:prstGeom>
+        </p:spPr>
+        <p:txBody>
+          <a:bodyPr anchor="t" rtlCol="false" tIns="0" lIns="0" bIns="0" rIns="0">
+            <a:spAutoFit/>
+          </a:bodyPr>
+          <a:lstStyle/>
+          <a:p>
+            <a:pPr algn="ctr">
+              <a:lnSpc>
+                <a:spcPts val="2440"/>
+              </a:lnSpc>
+            </a:pPr>
+            <a:r>
+              <a:rPr lang="en-US" sz="2000" b="true">
+                <a:solidFill>
+                  <a:srgbClr val="536073"/>
+                </a:solidFill>
+                <a:latin typeface="DM Sans Bold"/>
+                <a:ea typeface="DM Sans Bold"/>
+                <a:cs typeface="DM Sans Bold"/>
+                <a:sym typeface="DM Sans Bold"/>
+              </a:rPr>
+              <a:t>Check today’s</a:t>
+            </a:r>
+          </a:p>
+          <a:p>
+            <a:pPr algn="ctr">
+              <a:lnSpc>
+                <a:spcPts val="2440"/>
+              </a:lnSpc>
+            </a:pPr>
+            <a:r>
+              <a:rPr lang="en-US" b="true" sz="2000">
+                <a:solidFill>
+                  <a:srgbClr val="536073"/>
+                </a:solidFill>
+                <a:latin typeface="DM Sans Bold"/>
+                <a:ea typeface="DM Sans Bold"/>
+                <a:cs typeface="DM Sans Bold"/>
+                <a:sym typeface="DM Sans Bold"/>
+              </a:rPr>
+              <a:t>task</a:t>
+            </a:r>
+          </a:p>
+        </p:txBody>
+      </p:sp>
+      <p:sp>
+        <p:nvSpPr>
+          <p:cNvPr name="TextBox 16" id="16"/>
+          <p:cNvSpPr txBox="true"/>
+          <p:nvPr/>
+        </p:nvSpPr>
+        <p:spPr>
+          <a:xfrm rot="0">
+            <a:off x="4000500" y="5562600"/>
+            <a:ext cx="4191000" cy="614045"/>
+          </a:xfrm>
+          <a:prstGeom prst="rect">
+            <a:avLst/>
+          </a:prstGeom>
+        </p:spPr>
+        <p:txBody>
+          <a:bodyPr anchor="t" rtlCol="false" tIns="0" lIns="0" bIns="0" rIns="0">
+            <a:spAutoFit/>
+          </a:bodyPr>
+          <a:lstStyle/>
+          <a:p>
+            <a:pPr algn="ctr">
+              <a:lnSpc>
+                <a:spcPts val="2440"/>
+              </a:lnSpc>
+            </a:pPr>
+            <a:r>
+              <a:rPr lang="en-US" sz="2000" b="true">
+                <a:solidFill>
+                  <a:srgbClr val="536073"/>
+                </a:solidFill>
+                <a:latin typeface="DM Sans Bold"/>
+                <a:ea typeface="DM Sans Bold"/>
+                <a:cs typeface="DM Sans Bold"/>
+                <a:sym typeface="DM Sans Bold"/>
+              </a:rPr>
+              <a:t>Practice the missing skill</a:t>
+            </a:r>
+          </a:p>
+          <a:p>
+            <a:pPr algn="ctr">
+              <a:lnSpc>
+                <a:spcPts val="2440"/>
+              </a:lnSpc>
+            </a:pPr>
+            <a:r>
+              <a:rPr lang="en-US" b="true" sz="2000">
+                <a:solidFill>
+                  <a:srgbClr val="536073"/>
+                </a:solidFill>
+                <a:latin typeface="DM Sans Bold"/>
+                <a:ea typeface="DM Sans Bold"/>
+                <a:cs typeface="DM Sans Bold"/>
+                <a:sym typeface="DM Sans Bold"/>
+              </a:rPr>
+              <a:t>with Khan Academy</a:t>
+            </a:r>
+          </a:p>
+        </p:txBody>
+      </p:sp>
+      <p:sp>
+        <p:nvSpPr>
+          <p:cNvPr name="TextBox 17" id="17"/>
+          <p:cNvSpPr txBox="true"/>
+          <p:nvPr/>
+        </p:nvSpPr>
+        <p:spPr>
+          <a:xfrm rot="0">
+            <a:off x="8858250" y="3695700"/>
+            <a:ext cx="3238500" cy="614045"/>
+          </a:xfrm>
+          <a:prstGeom prst="rect">
+            <a:avLst/>
+          </a:prstGeom>
+        </p:spPr>
+        <p:txBody>
+          <a:bodyPr anchor="t" rtlCol="false" tIns="0" lIns="0" bIns="0" rIns="0">
+            <a:spAutoFit/>
+          </a:bodyPr>
+          <a:lstStyle/>
+          <a:p>
+            <a:pPr algn="ctr">
+              <a:lnSpc>
+                <a:spcPts val="2440"/>
+              </a:lnSpc>
+            </a:pPr>
+            <a:r>
+              <a:rPr lang="en-US" b="true" sz="2000">
+                <a:solidFill>
+                  <a:srgbClr val="087E70"/>
+                </a:solidFill>
+                <a:latin typeface="DM Sans Bold"/>
+                <a:ea typeface="DM Sans Bold"/>
+                <a:cs typeface="DM Sans Bold"/>
+                <a:sym typeface="DM Sans Bold"/>
+              </a:rPr>
+              <a:t>Return to today’s lesson</a:t>
+            </a:r>
+          </a:p>
+          <a:p>
+            <a:pPr algn="ctr">
+              <a:lnSpc>
+                <a:spcPts val="2440"/>
+              </a:lnSpc>
+            </a:pPr>
+            <a:r>
+              <a:rPr lang="en-US" b="true" sz="2000">
+                <a:solidFill>
+                  <a:srgbClr val="087E70"/>
+                </a:solidFill>
+                <a:latin typeface="DM Sans Bold"/>
+                <a:ea typeface="DM Sans Bold"/>
+                <a:cs typeface="DM Sans Bold"/>
+                <a:sym typeface="DM Sans Bold"/>
+              </a:rPr>
+              <a:t>with a fresh check</a:t>
             </a:r>
           </a:p>
         </p:txBody>
@@ -8013,7 +8344,7 @@
                 <a:cs typeface="DM Sans Bold"/>
                 <a:sym typeface="DM Sans Bold"/>
               </a:rPr>
-              <a:t>The route is the reward</a:t>
+              <a:t>Skip the review you don’t need.</a:t>
             </a:r>
           </a:p>
         </p:txBody>
@@ -13084,7 +13415,7 @@
         </p:nvSpPr>
         <p:spPr>
           <a:xfrm rot="0">
-            <a:off x="609600" y="1943100"/>
+            <a:off x="609600" y="1276350"/>
             <a:ext cx="10972800" cy="1898904"/>
           </a:xfrm>
           <a:prstGeom prst="rect">
@@ -13239,6 +13570,45 @@
             </a:r>
           </a:p>
         </p:txBody>
+      </p:sp>
+      <p:sp>
+        <p:nvSpPr>
+          <p:cNvPr name="Freeform 11" id="11"/>
+          <p:cNvSpPr/>
+          <p:nvPr/>
+        </p:nvSpPr>
+        <p:spPr>
+          <a:xfrm>
+            <a:off x="1714500" y="3714750"/>
+            <a:ext cx="8763000" cy="914864"/>
+          </a:xfrm>
+          <a:custGeom>
+            <a:avLst/>
+            <a:gdLst/>
+            <a:ahLst/>
+            <a:cxnLst/>
+            <a:rect r="r" b="b" t="t" l="l"/>
+            <a:pathLst>
+              <a:path h="914864" w="8763000">
+                <a:moveTo>
+                  <a:pt x="0" y="0"/>
+                </a:moveTo>
+                <a:quadBezTo>
+                  <a:pt x="4381500" y="1829728"/>
+                  <a:pt x="8763000" y="0"/>
+                </a:quadBezTo>
+              </a:path>
+            </a:pathLst>
+          </a:custGeom>
+          <a:ln cap="rnd" w="66675">
+            <a:solidFill>
+              <a:srgbClr val="C96331"/>
+            </a:solidFill>
+            <a:prstDash val="solid"/>
+            <a:headEnd type="oval" len="lg" w="lg"/>
+            <a:tailEnd type="arrow" len="sm" w="med"/>
+          </a:ln>
+        </p:spPr>
       </p:sp>
     </p:spTree>
   </p:cSld>
@@ -14667,7 +15037,7 @@
                 <a:cs typeface="DM Sans Bold"/>
                 <a:sym typeface="DM Sans Bold"/>
               </a:rPr>
-              <a:t>A short repair. A clear way back.</a:t>
+              <a:t>How BACKTRACK gets a learner unstuck</a:t>
             </a:r>
           </a:p>
         </p:txBody>
@@ -15117,6 +15487,25 @@
               </a:lnSpc>
             </a:pPr>
             <a:r>
+              <a:rPr lang="en-US" sz="2175" b="true">
+                <a:solidFill>
+                  <a:srgbClr val="151521"/>
+                </a:solidFill>
+                <a:latin typeface="DM Sans Bold"/>
+                <a:ea typeface="DM Sans Bold"/>
+                <a:cs typeface="DM Sans Bold"/>
+                <a:sym typeface="DM Sans Bold"/>
+              </a:rPr>
+              <a:t>Check earlier</a:t>
+            </a:r>
+          </a:p>
+          <a:p>
+            <a:pPr algn="ctr">
+              <a:lnSpc>
+                <a:spcPts val="2653"/>
+              </a:lnSpc>
+            </a:pPr>
+            <a:r>
               <a:rPr lang="en-US" b="true" sz="2175">
                 <a:solidFill>
                   <a:srgbClr val="151521"/>
@@ -15126,7 +15515,7 @@
                 <a:cs typeface="DM Sans Bold"/>
                 <a:sym typeface="DM Sans Bold"/>
               </a:rPr>
-              <a:t>Find a useful earlier step</a:t>
+              <a:t>skills</a:t>
             </a:r>
           </a:p>
         </p:txBody>
@@ -15410,7 +15799,7 @@
         <p:spPr>
           <a:xfrm rot="0">
             <a:off x="6400800" y="3629025"/>
-            <a:ext cx="2286000" cy="670751"/>
+            <a:ext cx="2286000" cy="1004125"/>
           </a:xfrm>
           <a:prstGeom prst="rect">
             <a:avLst/>
@@ -15421,6 +15810,25 @@
             <a:spAutoFit/>
           </a:bodyPr>
           <a:lstStyle/>
+          <a:p>
+            <a:pPr algn="ctr">
+              <a:lnSpc>
+                <a:spcPts val="2653"/>
+              </a:lnSpc>
+            </a:pPr>
+            <a:r>
+              <a:rPr lang="en-US" sz="2175" b="true">
+                <a:solidFill>
+                  <a:srgbClr val="151521"/>
+                </a:solidFill>
+                <a:latin typeface="DM Sans Bold"/>
+                <a:ea typeface="DM Sans Bold"/>
+                <a:cs typeface="DM Sans Bold"/>
+                <a:sym typeface="DM Sans Bold"/>
+              </a:rPr>
+              <a:t>Practice the step</a:t>
+            </a:r>
+          </a:p>
           <a:p>
             <a:pPr algn="ctr">
               <a:lnSpc>
@@ -15437,7 +15845,7 @@
                 <a:cs typeface="DM Sans Bold"/>
                 <a:sym typeface="DM Sans Bold"/>
               </a:rPr>
-              <a:t>Learn + practise with Khan</a:t>
+              <a:t>with Khan</a:t>
             </a:r>
           </a:p>
         </p:txBody>
@@ -15739,6 +16147,25 @@
               </a:lnSpc>
             </a:pPr>
             <a:r>
+              <a:rPr lang="en-US" sz="2175" b="true">
+                <a:solidFill>
+                  <a:srgbClr val="151521"/>
+                </a:solidFill>
+                <a:latin typeface="DM Sans Bold"/>
+                <a:ea typeface="DM Sans Bold"/>
+                <a:cs typeface="DM Sans Bold"/>
+                <a:sym typeface="DM Sans Bold"/>
+              </a:rPr>
+              <a:t>Try it again with</a:t>
+            </a:r>
+          </a:p>
+          <a:p>
+            <a:pPr algn="ctr">
+              <a:lnSpc>
+                <a:spcPts val="2653"/>
+              </a:lnSpc>
+            </a:pPr>
+            <a:r>
               <a:rPr lang="en-US" b="true" sz="2175">
                 <a:solidFill>
                   <a:srgbClr val="151521"/>
@@ -15748,7 +16175,7 @@
                 <a:cs typeface="DM Sans Bold"/>
                 <a:sym typeface="DM Sans Bold"/>
               </a:rPr>
-              <a:t>Try a fresh current task</a:t>
+              <a:t>fresh numbers</a:t>
             </a:r>
           </a:p>
         </p:txBody>
@@ -15789,7 +16216,7 @@
                 <a:cs typeface="DM Sans"/>
                 <a:sym typeface="DM Sans"/>
               </a:rPr>
-              <a:t>Your answer shapes the route. The repair fits the missing step.</a:t>
+              <a:t>Answers choose the next step. Fresh problems check the return.</a:t>
             </a:r>
           </a:p>
         </p:txBody>

--- a/output/BACKTRACK_KEIC_2026.pptx
+++ b/output/BACKTRACK_KEIC_2026.pptx
@@ -6718,9 +6718,9 @@
           <p:nvPr/>
         </p:nvSpPr>
         <p:spPr>
-          <a:xfrm>
-            <a:off x="1714500" y="4476750"/>
-            <a:ext cx="8763000" cy="914864"/>
+          <a:xfrm flipH="false" flipV="false" rot="0">
+            <a:off x="1524000" y="4095750"/>
+            <a:ext cx="9715500" cy="1428750"/>
           </a:xfrm>
           <a:custGeom>
             <a:avLst/>
@@ -6729,25 +6729,38 @@
             <a:cxnLst/>
             <a:rect r="r" b="b" t="t" l="l"/>
             <a:pathLst>
-              <a:path h="914864" w="8763000">
+              <a:path h="1428750" w="9715500">
                 <a:moveTo>
                   <a:pt x="0" y="0"/>
                 </a:moveTo>
-                <a:quadBezTo>
-                  <a:pt x="4381500" y="1829728"/>
-                  <a:pt x="8763000" y="0"/>
-                </a:quadBezTo>
+                <a:lnTo>
+                  <a:pt x="9715500" y="0"/>
+                </a:lnTo>
+                <a:lnTo>
+                  <a:pt x="9715500" y="1428750"/>
+                </a:lnTo>
+                <a:lnTo>
+                  <a:pt x="0" y="1428750"/>
+                </a:lnTo>
+                <a:lnTo>
+                  <a:pt x="0" y="0"/>
+                </a:lnTo>
+                <a:close/>
               </a:path>
             </a:pathLst>
           </a:custGeom>
-          <a:ln cap="rnd" w="66675">
-            <a:solidFill>
-              <a:srgbClr val="C96331"/>
-            </a:solidFill>
-            <a:prstDash val="solid"/>
-            <a:headEnd type="oval" len="lg" w="lg"/>
-            <a:tailEnd type="arrow" len="sm" w="med"/>
-          </a:ln>
+          <a:blipFill>
+            <a:blip r:embed="rId4">
+              <a:extLst>
+                <a:ext uri="{96DAC541-7B7A-43D3-8B79-37D633B846F1}">
+                  <asvg:svgBlip xmlns:asvg="http://schemas.microsoft.com/office/drawing/2016/SVG/main" r:embed="rId5"/>
+                </a:ext>
+              </a:extLst>
+            </a:blip>
+            <a:stretch>
+              <a:fillRect l="0" t="0" r="0" b="0"/>
+            </a:stretch>
+          </a:blipFill>
         </p:spPr>
       </p:sp>
       <p:grpSp>
@@ -6758,7 +6771,7 @@
         </p:nvGrpSpPr>
         <p:grpSpPr>
           <a:xfrm rot="0">
-            <a:off x="5962650" y="5248275"/>
+            <a:off x="5581650" y="5295900"/>
             <a:ext cx="266700" cy="266700"/>
             <a:chOff x="0" y="0"/>
             <a:chExt cx="105363" cy="105363"/>
@@ -7116,7 +7129,7 @@
         </p:nvSpPr>
         <p:spPr>
           <a:xfrm rot="0">
-            <a:off x="285750" y="3695700"/>
+            <a:off x="285750" y="3790950"/>
             <a:ext cx="2857500" cy="614045"/>
           </a:xfrm>
           <a:prstGeom prst="rect">
@@ -7176,7 +7189,7 @@
         </p:nvSpPr>
         <p:spPr>
           <a:xfrm rot="0">
-            <a:off x="4000500" y="5562600"/>
+            <a:off x="3619500" y="5610225"/>
             <a:ext cx="4191000" cy="614045"/>
           </a:xfrm>
           <a:prstGeom prst="rect">
@@ -7236,7 +7249,7 @@
         </p:nvSpPr>
         <p:spPr>
           <a:xfrm rot="0">
-            <a:off x="8858250" y="3695700"/>
+            <a:off x="8286750" y="3467100"/>
             <a:ext cx="3238500" cy="614045"/>
           </a:xfrm>
           <a:prstGeom prst="rect">
@@ -7288,6 +7301,192 @@
           </a:p>
         </p:txBody>
       </p:sp>
+      <p:grpSp>
+        <p:nvGrpSpPr>
+          <p:cNvPr name="Group 18" id="18"/>
+          <p:cNvGrpSpPr/>
+          <p:nvPr/>
+        </p:nvGrpSpPr>
+        <p:grpSpPr>
+          <a:xfrm rot="0">
+            <a:off x="1581150" y="4438650"/>
+            <a:ext cx="266700" cy="266700"/>
+            <a:chOff x="0" y="0"/>
+            <a:chExt cx="105363" cy="105363"/>
+          </a:xfrm>
+        </p:grpSpPr>
+        <p:sp>
+          <p:nvSpPr>
+            <p:cNvPr name="Freeform 19" id="19"/>
+            <p:cNvSpPr/>
+            <p:nvPr/>
+          </p:nvSpPr>
+          <p:spPr>
+            <a:xfrm flipH="false" flipV="false" rot="0">
+              <a:off x="0" y="0"/>
+              <a:ext cx="105363" cy="105363"/>
+            </a:xfrm>
+            <a:custGeom>
+              <a:avLst/>
+              <a:gdLst/>
+              <a:ahLst/>
+              <a:cxnLst/>
+              <a:rect r="r" b="b" t="t" l="l"/>
+              <a:pathLst>
+                <a:path h="105363" w="105363">
+                  <a:moveTo>
+                    <a:pt x="52681" y="0"/>
+                  </a:moveTo>
+                  <a:cubicBezTo>
+                    <a:pt x="23586" y="0"/>
+                    <a:pt x="0" y="23586"/>
+                    <a:pt x="0" y="52681"/>
+                  </a:cubicBezTo>
+                  <a:cubicBezTo>
+                    <a:pt x="0" y="81777"/>
+                    <a:pt x="23586" y="105363"/>
+                    <a:pt x="52681" y="105363"/>
+                  </a:cubicBezTo>
+                  <a:cubicBezTo>
+                    <a:pt x="81777" y="105363"/>
+                    <a:pt x="105363" y="81777"/>
+                    <a:pt x="105363" y="52681"/>
+                  </a:cubicBezTo>
+                  <a:cubicBezTo>
+                    <a:pt x="105363" y="23586"/>
+                    <a:pt x="81777" y="0"/>
+                    <a:pt x="52681" y="0"/>
+                  </a:cubicBezTo>
+                  <a:close/>
+                </a:path>
+              </a:pathLst>
+            </a:custGeom>
+            <a:solidFill>
+              <a:srgbClr val="C96331"/>
+            </a:solidFill>
+          </p:spPr>
+        </p:sp>
+        <p:sp>
+          <p:nvSpPr>
+            <p:cNvPr name="TextBox 20" id="20"/>
+            <p:cNvSpPr txBox="true"/>
+            <p:nvPr/>
+          </p:nvSpPr>
+          <p:spPr>
+            <a:xfrm>
+              <a:off x="9878" y="9878"/>
+              <a:ext cx="85607" cy="85607"/>
+            </a:xfrm>
+            <a:prstGeom prst="rect">
+              <a:avLst/>
+            </a:prstGeom>
+          </p:spPr>
+          <p:txBody>
+            <a:bodyPr anchor="ctr" rtlCol="false" tIns="50800" lIns="50800" bIns="50800" rIns="50800"/>
+            <a:lstStyle/>
+            <a:p>
+              <a:pPr algn="ctr">
+                <a:lnSpc>
+                  <a:spcPts val="1372"/>
+                </a:lnSpc>
+              </a:pPr>
+            </a:p>
+          </p:txBody>
+        </p:sp>
+      </p:grpSp>
+      <p:grpSp>
+        <p:nvGrpSpPr>
+          <p:cNvPr name="Group 21" id="21"/>
+          <p:cNvGrpSpPr/>
+          <p:nvPr/>
+        </p:nvGrpSpPr>
+        <p:grpSpPr>
+          <a:xfrm rot="0">
+            <a:off x="9772650" y="4152900"/>
+            <a:ext cx="266700" cy="266700"/>
+            <a:chOff x="0" y="0"/>
+            <a:chExt cx="105363" cy="105363"/>
+          </a:xfrm>
+        </p:grpSpPr>
+        <p:sp>
+          <p:nvSpPr>
+            <p:cNvPr name="Freeform 22" id="22"/>
+            <p:cNvSpPr/>
+            <p:nvPr/>
+          </p:nvSpPr>
+          <p:spPr>
+            <a:xfrm flipH="false" flipV="false" rot="0">
+              <a:off x="0" y="0"/>
+              <a:ext cx="105363" cy="105363"/>
+            </a:xfrm>
+            <a:custGeom>
+              <a:avLst/>
+              <a:gdLst/>
+              <a:ahLst/>
+              <a:cxnLst/>
+              <a:rect r="r" b="b" t="t" l="l"/>
+              <a:pathLst>
+                <a:path h="105363" w="105363">
+                  <a:moveTo>
+                    <a:pt x="52681" y="0"/>
+                  </a:moveTo>
+                  <a:cubicBezTo>
+                    <a:pt x="23586" y="0"/>
+                    <a:pt x="0" y="23586"/>
+                    <a:pt x="0" y="52681"/>
+                  </a:cubicBezTo>
+                  <a:cubicBezTo>
+                    <a:pt x="0" y="81777"/>
+                    <a:pt x="23586" y="105363"/>
+                    <a:pt x="52681" y="105363"/>
+                  </a:cubicBezTo>
+                  <a:cubicBezTo>
+                    <a:pt x="81777" y="105363"/>
+                    <a:pt x="105363" y="81777"/>
+                    <a:pt x="105363" y="52681"/>
+                  </a:cubicBezTo>
+                  <a:cubicBezTo>
+                    <a:pt x="105363" y="23586"/>
+                    <a:pt x="81777" y="0"/>
+                    <a:pt x="52681" y="0"/>
+                  </a:cubicBezTo>
+                  <a:close/>
+                </a:path>
+              </a:pathLst>
+            </a:custGeom>
+            <a:solidFill>
+              <a:srgbClr val="087E70"/>
+            </a:solidFill>
+          </p:spPr>
+        </p:sp>
+        <p:sp>
+          <p:nvSpPr>
+            <p:cNvPr name="TextBox 23" id="23"/>
+            <p:cNvSpPr txBox="true"/>
+            <p:nvPr/>
+          </p:nvSpPr>
+          <p:spPr>
+            <a:xfrm>
+              <a:off x="9878" y="9878"/>
+              <a:ext cx="85607" cy="85607"/>
+            </a:xfrm>
+            <a:prstGeom prst="rect">
+              <a:avLst/>
+            </a:prstGeom>
+          </p:spPr>
+          <p:txBody>
+            <a:bodyPr anchor="ctr" rtlCol="false" tIns="50800" lIns="50800" bIns="50800" rIns="50800"/>
+            <a:lstStyle/>
+            <a:p>
+              <a:pPr algn="ctr">
+                <a:lnSpc>
+                  <a:spcPts val="1372"/>
+                </a:lnSpc>
+              </a:pPr>
+            </a:p>
+          </p:txBody>
+        </p:sp>
+      </p:grpSp>
     </p:spTree>
   </p:cSld>
   <p:clrMapOvr>
@@ -13327,7 +13526,59 @@
       </p:grpSp>
       <p:sp>
         <p:nvSpPr>
-          <p:cNvPr name="TextBox 5" id="5"/>
+          <p:cNvPr name="Freeform 5" id="5"/>
+          <p:cNvSpPr/>
+          <p:nvPr/>
+        </p:nvSpPr>
+        <p:spPr>
+          <a:xfrm flipH="false" flipV="false" rot="0">
+            <a:off x="1619250" y="3238500"/>
+            <a:ext cx="9525000" cy="1400735"/>
+          </a:xfrm>
+          <a:custGeom>
+            <a:avLst/>
+            <a:gdLst/>
+            <a:ahLst/>
+            <a:cxnLst/>
+            <a:rect r="r" b="b" t="t" l="l"/>
+            <a:pathLst>
+              <a:path h="1400735" w="9525000">
+                <a:moveTo>
+                  <a:pt x="0" y="0"/>
+                </a:moveTo>
+                <a:lnTo>
+                  <a:pt x="9525000" y="0"/>
+                </a:lnTo>
+                <a:lnTo>
+                  <a:pt x="9525000" y="1400735"/>
+                </a:lnTo>
+                <a:lnTo>
+                  <a:pt x="0" y="1400735"/>
+                </a:lnTo>
+                <a:lnTo>
+                  <a:pt x="0" y="0"/>
+                </a:lnTo>
+                <a:close/>
+              </a:path>
+            </a:pathLst>
+          </a:custGeom>
+          <a:blipFill>
+            <a:blip r:embed="rId4">
+              <a:extLst>
+                <a:ext uri="{96DAC541-7B7A-43D3-8B79-37D633B846F1}">
+                  <asvg:svgBlip xmlns:asvg="http://schemas.microsoft.com/office/drawing/2016/SVG/main" r:embed="rId5"/>
+                </a:ext>
+              </a:extLst>
+            </a:blip>
+            <a:stretch>
+              <a:fillRect l="0" t="0" r="0" b="0"/>
+            </a:stretch>
+          </a:blipFill>
+        </p:spPr>
+      </p:sp>
+      <p:sp>
+        <p:nvSpPr>
+          <p:cNvPr name="TextBox 6" id="6"/>
           <p:cNvSpPr txBox="true"/>
           <p:nvPr/>
         </p:nvSpPr>
@@ -13368,7 +13619,7 @@
       </p:sp>
       <p:sp>
         <p:nvSpPr>
-          <p:cNvPr name="TextBox 6" id="6"/>
+          <p:cNvPr name="TextBox 7" id="7"/>
           <p:cNvSpPr txBox="true"/>
           <p:nvPr/>
         </p:nvSpPr>
@@ -13409,7 +13660,7 @@
       </p:sp>
       <p:sp>
         <p:nvSpPr>
-          <p:cNvPr name="TextBox 7" id="7"/>
+          <p:cNvPr name="TextBox 8" id="8"/>
           <p:cNvSpPr txBox="true"/>
           <p:nvPr/>
         </p:nvSpPr>
@@ -13427,6 +13678,25 @@
             <a:spAutoFit/>
           </a:bodyPr>
           <a:lstStyle/>
+          <a:p>
+            <a:pPr algn="l">
+              <a:lnSpc>
+                <a:spcPts val="7503"/>
+              </a:lnSpc>
+            </a:pPr>
+            <a:r>
+              <a:rPr lang="en-US" sz="6150" b="true">
+                <a:solidFill>
+                  <a:srgbClr val="5753FA"/>
+                </a:solidFill>
+                <a:latin typeface="DM Sans Bold"/>
+                <a:ea typeface="DM Sans Bold"/>
+                <a:cs typeface="DM Sans Bold"/>
+                <a:sym typeface="DM Sans Bold"/>
+              </a:rPr>
+              <a:t>A route back to</a:t>
+            </a:r>
+          </a:p>
           <a:p>
             <a:pPr algn="l">
               <a:lnSpc>
@@ -13443,14 +13713,14 @@
                 <a:cs typeface="DM Sans Bold"/>
                 <a:sym typeface="DM Sans Bold"/>
               </a:rPr>
-              <a:t>A route back to today’s lesson.</a:t>
-            </a:r>
-          </a:p>
-        </p:txBody>
-      </p:sp>
-      <p:sp>
-        <p:nvSpPr>
-          <p:cNvPr name="TextBox 8" id="8"/>
+              <a:t>today’s lesson.</a:t>
+            </a:r>
+          </a:p>
+        </p:txBody>
+      </p:sp>
+      <p:sp>
+        <p:nvSpPr>
+          <p:cNvPr name="TextBox 9" id="9"/>
           <p:cNvSpPr txBox="true"/>
           <p:nvPr/>
         </p:nvSpPr>
@@ -13491,7 +13761,7 @@
       </p:sp>
       <p:sp>
         <p:nvSpPr>
-          <p:cNvPr name="TextBox 9" id="9"/>
+          <p:cNvPr name="TextBox 10" id="10"/>
           <p:cNvSpPr txBox="true"/>
           <p:nvPr/>
         </p:nvSpPr>
@@ -13532,7 +13802,7 @@
       </p:sp>
       <p:sp>
         <p:nvSpPr>
-          <p:cNvPr name="TextBox 10" id="10"/>
+          <p:cNvPr name="TextBox 11" id="11"/>
           <p:cNvSpPr txBox="true"/>
           <p:nvPr/>
         </p:nvSpPr>
@@ -13570,45 +13840,6 @@
             </a:r>
           </a:p>
         </p:txBody>
-      </p:sp>
-      <p:sp>
-        <p:nvSpPr>
-          <p:cNvPr name="Freeform 11" id="11"/>
-          <p:cNvSpPr/>
-          <p:nvPr/>
-        </p:nvSpPr>
-        <p:spPr>
-          <a:xfrm>
-            <a:off x="1714500" y="3714750"/>
-            <a:ext cx="8763000" cy="914864"/>
-          </a:xfrm>
-          <a:custGeom>
-            <a:avLst/>
-            <a:gdLst/>
-            <a:ahLst/>
-            <a:cxnLst/>
-            <a:rect r="r" b="b" t="t" l="l"/>
-            <a:pathLst>
-              <a:path h="914864" w="8763000">
-                <a:moveTo>
-                  <a:pt x="0" y="0"/>
-                </a:moveTo>
-                <a:quadBezTo>
-                  <a:pt x="4381500" y="1829728"/>
-                  <a:pt x="8763000" y="0"/>
-                </a:quadBezTo>
-              </a:path>
-            </a:pathLst>
-          </a:custGeom>
-          <a:ln cap="rnd" w="66675">
-            <a:solidFill>
-              <a:srgbClr val="C96331"/>
-            </a:solidFill>
-            <a:prstDash val="solid"/>
-            <a:headEnd type="oval" len="lg" w="lg"/>
-            <a:tailEnd type="arrow" len="sm" w="med"/>
-          </a:ln>
-        </p:spPr>
       </p:sp>
     </p:spTree>
   </p:cSld>
@@ -15158,7 +15389,7 @@
         <p:spPr>
           <a:xfrm rot="0">
             <a:off x="609600" y="3629025"/>
-            <a:ext cx="2286000" cy="337375"/>
+            <a:ext cx="2286000" cy="670751"/>
           </a:xfrm>
           <a:prstGeom prst="rect">
             <a:avLst/>
@@ -15169,6 +15400,25 @@
             <a:spAutoFit/>
           </a:bodyPr>
           <a:lstStyle/>
+          <a:p>
+            <a:pPr algn="ctr">
+              <a:lnSpc>
+                <a:spcPts val="2653"/>
+              </a:lnSpc>
+            </a:pPr>
+            <a:r>
+              <a:rPr lang="en-US" sz="2175" b="true">
+                <a:solidFill>
+                  <a:srgbClr val="151521"/>
+                </a:solidFill>
+                <a:latin typeface="DM Sans Bold"/>
+                <a:ea typeface="DM Sans Bold"/>
+                <a:cs typeface="DM Sans Bold"/>
+                <a:sym typeface="DM Sans Bold"/>
+              </a:rPr>
+              <a:t>Try today’s</a:t>
+            </a:r>
+          </a:p>
           <a:p>
             <a:pPr algn="ctr">
               <a:lnSpc>
@@ -15185,7 +15435,7 @@
                 <a:cs typeface="DM Sans Bold"/>
                 <a:sym typeface="DM Sans Bold"/>
               </a:rPr>
-              <a:t>Try today’s task</a:t>
+              <a:t>task</a:t>
             </a:r>
           </a:p>
         </p:txBody>
@@ -15799,7 +16049,7 @@
         <p:spPr>
           <a:xfrm rot="0">
             <a:off x="6400800" y="3629025"/>
-            <a:ext cx="2286000" cy="1004125"/>
+            <a:ext cx="2286000" cy="670751"/>
           </a:xfrm>
           <a:prstGeom prst="rect">
             <a:avLst/>
@@ -15826,7 +16076,7 @@
                 <a:cs typeface="DM Sans Bold"/>
                 <a:sym typeface="DM Sans Bold"/>
               </a:rPr>
-              <a:t>Practice the step</a:t>
+              <a:t>Practice with</a:t>
             </a:r>
           </a:p>
           <a:p>
@@ -15845,7 +16095,7 @@
                 <a:cs typeface="DM Sans Bold"/>
                 <a:sym typeface="DM Sans Bold"/>
               </a:rPr>
-              <a:t>with Khan</a:t>
+              <a:t>Khan Academy</a:t>
             </a:r>
           </a:p>
         </p:txBody>
@@ -16352,7 +16602,458 @@
       </p:grpSp>
       <p:sp>
         <p:nvSpPr>
-          <p:cNvPr name="TextBox 5" id="5"/>
+          <p:cNvPr name="Freeform 5" id="5"/>
+          <p:cNvSpPr/>
+          <p:nvPr/>
+        </p:nvSpPr>
+        <p:spPr>
+          <a:xfrm flipH="false" flipV="false" rot="0">
+            <a:off x="609600" y="4762500"/>
+            <a:ext cx="10972800" cy="895350"/>
+          </a:xfrm>
+          <a:custGeom>
+            <a:avLst/>
+            <a:gdLst/>
+            <a:ahLst/>
+            <a:cxnLst/>
+            <a:rect r="r" b="b" t="t" l="l"/>
+            <a:pathLst>
+              <a:path h="895350" w="10972800">
+                <a:moveTo>
+                  <a:pt x="0" y="0"/>
+                </a:moveTo>
+                <a:lnTo>
+                  <a:pt x="10972800" y="0"/>
+                </a:lnTo>
+                <a:lnTo>
+                  <a:pt x="10972800" y="895350"/>
+                </a:lnTo>
+                <a:lnTo>
+                  <a:pt x="0" y="895350"/>
+                </a:lnTo>
+                <a:lnTo>
+                  <a:pt x="0" y="0"/>
+                </a:lnTo>
+                <a:close/>
+              </a:path>
+            </a:pathLst>
+          </a:custGeom>
+          <a:blipFill>
+            <a:blip r:embed="rId4">
+              <a:extLst>
+                <a:ext uri="{96DAC541-7B7A-43D3-8B79-37D633B846F1}">
+                  <asvg:svgBlip xmlns:asvg="http://schemas.microsoft.com/office/drawing/2016/SVG/main" r:embed="rId5"/>
+                </a:ext>
+              </a:extLst>
+            </a:blip>
+            <a:stretch>
+              <a:fillRect l="0" t="0" r="0" b="0"/>
+            </a:stretch>
+          </a:blipFill>
+        </p:spPr>
+      </p:sp>
+      <p:sp>
+        <p:nvSpPr>
+          <p:cNvPr name="AutoShape 6" id="6"/>
+          <p:cNvSpPr/>
+          <p:nvPr/>
+        </p:nvSpPr>
+        <p:spPr>
+          <a:xfrm>
+            <a:off x="609600" y="1381125"/>
+            <a:ext cx="10972800" cy="0"/>
+          </a:xfrm>
+          <a:prstGeom prst="line">
+            <a:avLst/>
+          </a:prstGeom>
+          <a:ln cap="flat" w="19050">
+            <a:solidFill>
+              <a:srgbClr val="CCD7E4"/>
+            </a:solidFill>
+            <a:prstDash val="solid"/>
+            <a:headEnd type="none" len="sm" w="sm"/>
+            <a:tailEnd type="none" len="sm" w="sm"/>
+          </a:ln>
+        </p:spPr>
+      </p:sp>
+      <p:grpSp>
+        <p:nvGrpSpPr>
+          <p:cNvPr name="Group 7" id="7"/>
+          <p:cNvGrpSpPr/>
+          <p:nvPr/>
+        </p:nvGrpSpPr>
+        <p:grpSpPr>
+          <a:xfrm rot="0">
+            <a:off x="609600" y="2571750"/>
+            <a:ext cx="5029200" cy="2190750"/>
+            <a:chOff x="0" y="0"/>
+            <a:chExt cx="1986844" cy="865481"/>
+          </a:xfrm>
+        </p:grpSpPr>
+        <p:sp>
+          <p:nvSpPr>
+            <p:cNvPr name="Freeform 8" id="8"/>
+            <p:cNvSpPr/>
+            <p:nvPr/>
+          </p:nvSpPr>
+          <p:spPr>
+            <a:xfrm flipH="false" flipV="false" rot="0">
+              <a:off x="0" y="0"/>
+              <a:ext cx="1986844" cy="865481"/>
+            </a:xfrm>
+            <a:custGeom>
+              <a:avLst/>
+              <a:gdLst/>
+              <a:ahLst/>
+              <a:cxnLst/>
+              <a:rect r="r" b="b" t="t" l="l"/>
+              <a:pathLst>
+                <a:path h="865481" w="1986844">
+                  <a:moveTo>
+                    <a:pt x="18473" y="0"/>
+                  </a:moveTo>
+                  <a:lnTo>
+                    <a:pt x="1968372" y="0"/>
+                  </a:lnTo>
+                  <a:cubicBezTo>
+                    <a:pt x="1973271" y="0"/>
+                    <a:pt x="1977970" y="1946"/>
+                    <a:pt x="1981434" y="5411"/>
+                  </a:cubicBezTo>
+                  <a:cubicBezTo>
+                    <a:pt x="1984898" y="8875"/>
+                    <a:pt x="1986844" y="13573"/>
+                    <a:pt x="1986844" y="18473"/>
+                  </a:cubicBezTo>
+                  <a:lnTo>
+                    <a:pt x="1986844" y="847009"/>
+                  </a:lnTo>
+                  <a:cubicBezTo>
+                    <a:pt x="1986844" y="851908"/>
+                    <a:pt x="1984898" y="856607"/>
+                    <a:pt x="1981434" y="860071"/>
+                  </a:cubicBezTo>
+                  <a:cubicBezTo>
+                    <a:pt x="1977970" y="863535"/>
+                    <a:pt x="1973271" y="865481"/>
+                    <a:pt x="1968372" y="865481"/>
+                  </a:cubicBezTo>
+                  <a:lnTo>
+                    <a:pt x="18473" y="865481"/>
+                  </a:lnTo>
+                  <a:cubicBezTo>
+                    <a:pt x="13573" y="865481"/>
+                    <a:pt x="8875" y="863535"/>
+                    <a:pt x="5411" y="860071"/>
+                  </a:cubicBezTo>
+                  <a:cubicBezTo>
+                    <a:pt x="1946" y="856607"/>
+                    <a:pt x="0" y="851908"/>
+                    <a:pt x="0" y="847009"/>
+                  </a:cubicBezTo>
+                  <a:lnTo>
+                    <a:pt x="0" y="18473"/>
+                  </a:lnTo>
+                  <a:cubicBezTo>
+                    <a:pt x="0" y="13573"/>
+                    <a:pt x="1946" y="8875"/>
+                    <a:pt x="5411" y="5411"/>
+                  </a:cubicBezTo>
+                  <a:cubicBezTo>
+                    <a:pt x="8875" y="1946"/>
+                    <a:pt x="13573" y="0"/>
+                    <a:pt x="18473" y="0"/>
+                  </a:cubicBezTo>
+                  <a:close/>
+                </a:path>
+              </a:pathLst>
+            </a:custGeom>
+            <a:solidFill>
+              <a:srgbClr val="D9F2EA"/>
+            </a:solidFill>
+          </p:spPr>
+        </p:sp>
+        <p:sp>
+          <p:nvSpPr>
+            <p:cNvPr name="TextBox 9" id="9"/>
+            <p:cNvSpPr txBox="true"/>
+            <p:nvPr/>
+          </p:nvSpPr>
+          <p:spPr>
+            <a:xfrm>
+              <a:off x="0" y="0"/>
+              <a:ext cx="1986844" cy="865481"/>
+            </a:xfrm>
+            <a:prstGeom prst="rect">
+              <a:avLst/>
+            </a:prstGeom>
+          </p:spPr>
+          <p:txBody>
+            <a:bodyPr anchor="ctr" rtlCol="false" tIns="50800" lIns="50800" bIns="50800" rIns="50800"/>
+            <a:lstStyle/>
+            <a:p>
+              <a:pPr algn="ctr">
+                <a:lnSpc>
+                  <a:spcPts val="1372"/>
+                </a:lnSpc>
+              </a:pPr>
+            </a:p>
+          </p:txBody>
+        </p:sp>
+      </p:grpSp>
+      <p:grpSp>
+        <p:nvGrpSpPr>
+          <p:cNvPr name="Group 10" id="10"/>
+          <p:cNvGrpSpPr/>
+          <p:nvPr/>
+        </p:nvGrpSpPr>
+        <p:grpSpPr>
+          <a:xfrm rot="0">
+            <a:off x="6553200" y="2571750"/>
+            <a:ext cx="5029200" cy="2190750"/>
+            <a:chOff x="0" y="0"/>
+            <a:chExt cx="1986844" cy="865481"/>
+          </a:xfrm>
+        </p:grpSpPr>
+        <p:sp>
+          <p:nvSpPr>
+            <p:cNvPr name="Freeform 11" id="11"/>
+            <p:cNvSpPr/>
+            <p:nvPr/>
+          </p:nvSpPr>
+          <p:spPr>
+            <a:xfrm flipH="false" flipV="false" rot="0">
+              <a:off x="0" y="0"/>
+              <a:ext cx="1986844" cy="865481"/>
+            </a:xfrm>
+            <a:custGeom>
+              <a:avLst/>
+              <a:gdLst/>
+              <a:ahLst/>
+              <a:cxnLst/>
+              <a:rect r="r" b="b" t="t" l="l"/>
+              <a:pathLst>
+                <a:path h="865481" w="1986844">
+                  <a:moveTo>
+                    <a:pt x="18473" y="0"/>
+                  </a:moveTo>
+                  <a:lnTo>
+                    <a:pt x="1968372" y="0"/>
+                  </a:lnTo>
+                  <a:cubicBezTo>
+                    <a:pt x="1973271" y="0"/>
+                    <a:pt x="1977970" y="1946"/>
+                    <a:pt x="1981434" y="5411"/>
+                  </a:cubicBezTo>
+                  <a:cubicBezTo>
+                    <a:pt x="1984898" y="8875"/>
+                    <a:pt x="1986844" y="13573"/>
+                    <a:pt x="1986844" y="18473"/>
+                  </a:cubicBezTo>
+                  <a:lnTo>
+                    <a:pt x="1986844" y="847009"/>
+                  </a:lnTo>
+                  <a:cubicBezTo>
+                    <a:pt x="1986844" y="851908"/>
+                    <a:pt x="1984898" y="856607"/>
+                    <a:pt x="1981434" y="860071"/>
+                  </a:cubicBezTo>
+                  <a:cubicBezTo>
+                    <a:pt x="1977970" y="863535"/>
+                    <a:pt x="1973271" y="865481"/>
+                    <a:pt x="1968372" y="865481"/>
+                  </a:cubicBezTo>
+                  <a:lnTo>
+                    <a:pt x="18473" y="865481"/>
+                  </a:lnTo>
+                  <a:cubicBezTo>
+                    <a:pt x="13573" y="865481"/>
+                    <a:pt x="8875" y="863535"/>
+                    <a:pt x="5411" y="860071"/>
+                  </a:cubicBezTo>
+                  <a:cubicBezTo>
+                    <a:pt x="1946" y="856607"/>
+                    <a:pt x="0" y="851908"/>
+                    <a:pt x="0" y="847009"/>
+                  </a:cubicBezTo>
+                  <a:lnTo>
+                    <a:pt x="0" y="18473"/>
+                  </a:lnTo>
+                  <a:cubicBezTo>
+                    <a:pt x="0" y="13573"/>
+                    <a:pt x="1946" y="8875"/>
+                    <a:pt x="5411" y="5411"/>
+                  </a:cubicBezTo>
+                  <a:cubicBezTo>
+                    <a:pt x="8875" y="1946"/>
+                    <a:pt x="13573" y="0"/>
+                    <a:pt x="18473" y="0"/>
+                  </a:cubicBezTo>
+                  <a:close/>
+                </a:path>
+              </a:pathLst>
+            </a:custGeom>
+            <a:solidFill>
+              <a:srgbClr val="F8EADF"/>
+            </a:solidFill>
+          </p:spPr>
+        </p:sp>
+        <p:sp>
+          <p:nvSpPr>
+            <p:cNvPr name="TextBox 12" id="12"/>
+            <p:cNvSpPr txBox="true"/>
+            <p:nvPr/>
+          </p:nvSpPr>
+          <p:spPr>
+            <a:xfrm>
+              <a:off x="0" y="0"/>
+              <a:ext cx="1986844" cy="865481"/>
+            </a:xfrm>
+            <a:prstGeom prst="rect">
+              <a:avLst/>
+            </a:prstGeom>
+          </p:spPr>
+          <p:txBody>
+            <a:bodyPr anchor="ctr" rtlCol="false" tIns="50800" lIns="50800" bIns="50800" rIns="50800"/>
+            <a:lstStyle/>
+            <a:p>
+              <a:pPr algn="ctr">
+                <a:lnSpc>
+                  <a:spcPts val="1372"/>
+                </a:lnSpc>
+              </a:pPr>
+            </a:p>
+          </p:txBody>
+        </p:sp>
+      </p:grpSp>
+      <p:grpSp>
+        <p:nvGrpSpPr>
+          <p:cNvPr name="Group 13" id="13"/>
+          <p:cNvGrpSpPr/>
+          <p:nvPr/>
+        </p:nvGrpSpPr>
+        <p:grpSpPr>
+          <a:xfrm rot="0">
+            <a:off x="3429000" y="5619750"/>
+            <a:ext cx="5334000" cy="809625"/>
+            <a:chOff x="0" y="0"/>
+            <a:chExt cx="2107259" cy="319852"/>
+          </a:xfrm>
+        </p:grpSpPr>
+        <p:sp>
+          <p:nvSpPr>
+            <p:cNvPr name="Freeform 14" id="14"/>
+            <p:cNvSpPr/>
+            <p:nvPr/>
+          </p:nvSpPr>
+          <p:spPr>
+            <a:xfrm flipH="false" flipV="false" rot="0">
+              <a:off x="0" y="0"/>
+              <a:ext cx="2107259" cy="319852"/>
+            </a:xfrm>
+            <a:custGeom>
+              <a:avLst/>
+              <a:gdLst/>
+              <a:ahLst/>
+              <a:cxnLst/>
+              <a:rect r="r" b="b" t="t" l="l"/>
+              <a:pathLst>
+                <a:path h="319852" w="2107259">
+                  <a:moveTo>
+                    <a:pt x="17417" y="0"/>
+                  </a:moveTo>
+                  <a:lnTo>
+                    <a:pt x="2089842" y="0"/>
+                  </a:lnTo>
+                  <a:cubicBezTo>
+                    <a:pt x="2094461" y="0"/>
+                    <a:pt x="2098891" y="1835"/>
+                    <a:pt x="2102158" y="5101"/>
+                  </a:cubicBezTo>
+                  <a:cubicBezTo>
+                    <a:pt x="2105424" y="8368"/>
+                    <a:pt x="2107259" y="12798"/>
+                    <a:pt x="2107259" y="17417"/>
+                  </a:cubicBezTo>
+                  <a:lnTo>
+                    <a:pt x="2107259" y="302435"/>
+                  </a:lnTo>
+                  <a:cubicBezTo>
+                    <a:pt x="2107259" y="307054"/>
+                    <a:pt x="2105424" y="311484"/>
+                    <a:pt x="2102158" y="314750"/>
+                  </a:cubicBezTo>
+                  <a:cubicBezTo>
+                    <a:pt x="2098891" y="318017"/>
+                    <a:pt x="2094461" y="319852"/>
+                    <a:pt x="2089842" y="319852"/>
+                  </a:cubicBezTo>
+                  <a:lnTo>
+                    <a:pt x="17417" y="319852"/>
+                  </a:lnTo>
+                  <a:cubicBezTo>
+                    <a:pt x="12798" y="319852"/>
+                    <a:pt x="8368" y="318017"/>
+                    <a:pt x="5101" y="314750"/>
+                  </a:cubicBezTo>
+                  <a:cubicBezTo>
+                    <a:pt x="1835" y="311484"/>
+                    <a:pt x="0" y="307054"/>
+                    <a:pt x="0" y="302435"/>
+                  </a:cubicBezTo>
+                  <a:lnTo>
+                    <a:pt x="0" y="17417"/>
+                  </a:lnTo>
+                  <a:cubicBezTo>
+                    <a:pt x="0" y="12798"/>
+                    <a:pt x="1835" y="8368"/>
+                    <a:pt x="5101" y="5101"/>
+                  </a:cubicBezTo>
+                  <a:cubicBezTo>
+                    <a:pt x="8368" y="1835"/>
+                    <a:pt x="12798" y="0"/>
+                    <a:pt x="17417" y="0"/>
+                  </a:cubicBezTo>
+                  <a:close/>
+                </a:path>
+              </a:pathLst>
+            </a:custGeom>
+            <a:solidFill>
+              <a:srgbClr val="F0EFFF"/>
+            </a:solidFill>
+          </p:spPr>
+        </p:sp>
+        <p:sp>
+          <p:nvSpPr>
+            <p:cNvPr name="TextBox 15" id="15"/>
+            <p:cNvSpPr txBox="true"/>
+            <p:nvPr/>
+          </p:nvSpPr>
+          <p:spPr>
+            <a:xfrm>
+              <a:off x="0" y="0"/>
+              <a:ext cx="2107259" cy="319852"/>
+            </a:xfrm>
+            <a:prstGeom prst="rect">
+              <a:avLst/>
+            </a:prstGeom>
+          </p:spPr>
+          <p:txBody>
+            <a:bodyPr anchor="ctr" rtlCol="false" tIns="50800" lIns="50800" bIns="50800" rIns="50800"/>
+            <a:lstStyle/>
+            <a:p>
+              <a:pPr algn="ctr">
+                <a:lnSpc>
+                  <a:spcPts val="1372"/>
+                </a:lnSpc>
+              </a:pPr>
+            </a:p>
+          </p:txBody>
+        </p:sp>
+      </p:grpSp>
+      <p:sp>
+        <p:nvSpPr>
+          <p:cNvPr name="TextBox 16" id="16"/>
           <p:cNvSpPr txBox="true"/>
           <p:nvPr/>
         </p:nvSpPr>
@@ -16393,7 +17094,7 @@
       </p:sp>
       <p:sp>
         <p:nvSpPr>
-          <p:cNvPr name="TextBox 6" id="6"/>
+          <p:cNvPr name="TextBox 17" id="17"/>
           <p:cNvSpPr txBox="true"/>
           <p:nvPr/>
         </p:nvSpPr>
@@ -16434,14 +17135,14 @@
       </p:sp>
       <p:sp>
         <p:nvSpPr>
-          <p:cNvPr name="TextBox 7" id="7"/>
+          <p:cNvPr name="TextBox 18" id="18"/>
           <p:cNvSpPr txBox="true"/>
           <p:nvPr/>
         </p:nvSpPr>
         <p:spPr>
           <a:xfrm rot="0">
-            <a:off x="609600" y="2505075"/>
-            <a:ext cx="3190875" cy="393573"/>
+            <a:off x="609600" y="1609725"/>
+            <a:ext cx="10972800" cy="459105"/>
           </a:xfrm>
           <a:prstGeom prst="rect">
             <a:avLst/>
@@ -16453,218 +17154,36 @@
           </a:bodyPr>
           <a:lstStyle/>
           <a:p>
-            <a:pPr algn="l">
+            <a:pPr algn="ctr">
               <a:lnSpc>
-                <a:spcPts val="3111"/>
+                <a:spcPts val="3660"/>
               </a:lnSpc>
             </a:pPr>
             <a:r>
-              <a:rPr lang="en-US" b="true" sz="2550">
+              <a:rPr lang="en-US" b="true" sz="3000">
                 <a:solidFill>
-                  <a:srgbClr val="087E70"/>
+                  <a:srgbClr val="151521"/>
                 </a:solidFill>
                 <a:latin typeface="DM Sans Bold"/>
                 <a:ea typeface="DM Sans Bold"/>
                 <a:cs typeface="DM Sans Bold"/>
                 <a:sym typeface="DM Sans Bold"/>
               </a:rPr>
-              <a:t>Tried x = 3, 4</a:t>
-            </a:r>
-          </a:p>
-        </p:txBody>
-      </p:sp>
-      <p:sp>
-        <p:nvSpPr>
-          <p:cNvPr name="AutoShape 8" id="8"/>
-          <p:cNvSpPr/>
-          <p:nvPr/>
-        </p:nvSpPr>
-        <p:spPr>
-          <a:xfrm rot="0">
-            <a:off x="3762375" y="2724150"/>
-            <a:ext cx="1428750" cy="38100"/>
-          </a:xfrm>
-          <a:prstGeom prst="rect">
-            <a:avLst/>
-          </a:prstGeom>
-          <a:solidFill>
-            <a:srgbClr val="087E70"/>
-          </a:solidFill>
-        </p:spPr>
-      </p:sp>
-      <p:grpSp>
-        <p:nvGrpSpPr>
-          <p:cNvPr name="Group 9" id="9"/>
-          <p:cNvGrpSpPr/>
-          <p:nvPr/>
-        </p:nvGrpSpPr>
-        <p:grpSpPr>
-          <a:xfrm rot="1840140">
-            <a:off x="5133308" y="2688526"/>
-            <a:ext cx="171450" cy="28575"/>
-            <a:chOff x="0" y="0"/>
-            <a:chExt cx="228600" cy="38100"/>
-          </a:xfrm>
-        </p:grpSpPr>
-        <p:sp>
-          <p:nvSpPr>
-            <p:cNvPr name="Freeform 10" id="10"/>
-            <p:cNvSpPr/>
-            <p:nvPr/>
-          </p:nvSpPr>
-          <p:spPr>
-            <a:xfrm flipH="false" flipV="false" rot="0">
-              <a:off x="0" y="0"/>
-              <a:ext cx="228600" cy="38100"/>
-            </a:xfrm>
-            <a:custGeom>
-              <a:avLst/>
-              <a:gdLst/>
-              <a:ahLst/>
-              <a:cxnLst/>
-              <a:rect r="r" b="b" t="t" l="l"/>
-              <a:pathLst>
-                <a:path h="38100" w="228600">
-                  <a:moveTo>
-                    <a:pt x="19050" y="0"/>
-                  </a:moveTo>
-                  <a:lnTo>
-                    <a:pt x="209550" y="0"/>
-                  </a:lnTo>
-                  <a:cubicBezTo>
-                    <a:pt x="220091" y="0"/>
-                    <a:pt x="228600" y="8509"/>
-                    <a:pt x="228600" y="19050"/>
-                  </a:cubicBezTo>
-                  <a:cubicBezTo>
-                    <a:pt x="228600" y="29591"/>
-                    <a:pt x="220091" y="38100"/>
-                    <a:pt x="209550" y="38100"/>
-                  </a:cubicBezTo>
-                  <a:lnTo>
-                    <a:pt x="19050" y="38100"/>
-                  </a:lnTo>
-                  <a:cubicBezTo>
-                    <a:pt x="8509" y="38100"/>
-                    <a:pt x="0" y="29591"/>
-                    <a:pt x="0" y="19050"/>
-                  </a:cubicBezTo>
-                  <a:cubicBezTo>
-                    <a:pt x="0" y="8509"/>
-                    <a:pt x="8509" y="0"/>
-                    <a:pt x="19050" y="0"/>
-                  </a:cubicBezTo>
-                  <a:close/>
-                </a:path>
-              </a:pathLst>
-            </a:custGeom>
-            <a:solidFill>
-              <a:srgbClr val="087E70"/>
-            </a:solidFill>
-          </p:spPr>
-        </p:sp>
-      </p:grpSp>
-      <p:grpSp>
-        <p:nvGrpSpPr>
-          <p:cNvPr name="Group 11" id="11"/>
-          <p:cNvGrpSpPr/>
-          <p:nvPr/>
-        </p:nvGrpSpPr>
-        <p:grpSpPr>
-          <a:xfrm rot="8959860">
-            <a:off x="5125212" y="2774252"/>
-            <a:ext cx="171450" cy="28575"/>
-            <a:chOff x="0" y="0"/>
-            <a:chExt cx="228600" cy="38100"/>
-          </a:xfrm>
-        </p:grpSpPr>
-        <p:sp>
-          <p:nvSpPr>
-            <p:cNvPr name="Freeform 12" id="12"/>
-            <p:cNvSpPr/>
-            <p:nvPr/>
-          </p:nvSpPr>
-          <p:spPr>
-            <a:xfrm flipH="false" flipV="false" rot="0">
-              <a:off x="0" y="0"/>
-              <a:ext cx="228600" cy="38100"/>
-            </a:xfrm>
-            <a:custGeom>
-              <a:avLst/>
-              <a:gdLst/>
-              <a:ahLst/>
-              <a:cxnLst/>
-              <a:rect r="r" b="b" t="t" l="l"/>
-              <a:pathLst>
-                <a:path h="38100" w="228600">
-                  <a:moveTo>
-                    <a:pt x="19050" y="0"/>
-                  </a:moveTo>
-                  <a:lnTo>
-                    <a:pt x="209550" y="0"/>
-                  </a:lnTo>
-                  <a:cubicBezTo>
-                    <a:pt x="220091" y="0"/>
-                    <a:pt x="228600" y="8509"/>
-                    <a:pt x="228600" y="19050"/>
-                  </a:cubicBezTo>
-                  <a:cubicBezTo>
-                    <a:pt x="228600" y="29591"/>
-                    <a:pt x="220091" y="38100"/>
-                    <a:pt x="209550" y="38100"/>
-                  </a:cubicBezTo>
-                  <a:lnTo>
-                    <a:pt x="19050" y="38100"/>
-                  </a:lnTo>
-                  <a:cubicBezTo>
-                    <a:pt x="8509" y="38100"/>
-                    <a:pt x="0" y="29591"/>
-                    <a:pt x="0" y="19050"/>
-                  </a:cubicBezTo>
-                  <a:cubicBezTo>
-                    <a:pt x="0" y="8509"/>
-                    <a:pt x="8509" y="0"/>
-                    <a:pt x="19050" y="0"/>
-                  </a:cubicBezTo>
-                  <a:close/>
-                </a:path>
-              </a:pathLst>
-            </a:custGeom>
-            <a:solidFill>
-              <a:srgbClr val="087E70"/>
-            </a:solidFill>
-          </p:spPr>
-        </p:sp>
-      </p:grpSp>
-      <p:sp>
-        <p:nvSpPr>
-          <p:cNvPr name="AutoShape 13" id="13"/>
-          <p:cNvSpPr/>
-          <p:nvPr/>
-        </p:nvSpPr>
-        <p:spPr>
-          <a:xfrm rot="0">
-            <a:off x="5610225" y="2286000"/>
-            <a:ext cx="5972175" cy="942975"/>
-          </a:xfrm>
-          <a:prstGeom prst="rect">
-            <a:avLst/>
-          </a:prstGeom>
-          <a:solidFill>
-            <a:srgbClr val="D9F2EA"/>
-          </a:solidFill>
-        </p:spPr>
-      </p:sp>
-      <p:sp>
-        <p:nvSpPr>
-          <p:cNvPr name="TextBox 14" id="14"/>
+              <a:t>For x² + 7x + 12 = 0</a:t>
+            </a:r>
+          </a:p>
+        </p:txBody>
+      </p:sp>
+      <p:sp>
+        <p:nvSpPr>
+          <p:cNvPr name="TextBox 19" id="19"/>
           <p:cNvSpPr txBox="true"/>
           <p:nvPr/>
         </p:nvSpPr>
         <p:spPr>
           <a:xfrm rot="0">
-            <a:off x="5810250" y="2495550"/>
-            <a:ext cx="5572125" cy="430911"/>
+            <a:off x="838200" y="2857500"/>
+            <a:ext cx="4572000" cy="506222"/>
           </a:xfrm>
           <a:prstGeom prst="rect">
             <a:avLst/>
@@ -16678,34 +17197,37 @@
           <a:p>
             <a:pPr algn="ctr">
               <a:lnSpc>
-                <a:spcPts val="3476"/>
+                <a:spcPts val="3904"/>
               </a:lnSpc>
+              <a:spcBef>
+                <a:spcPct val="0"/>
+              </a:spcBef>
             </a:pPr>
             <a:r>
-              <a:rPr lang="en-US" b="true" sz="2850">
+              <a:rPr lang="en-US" b="true" sz="3200">
                 <a:solidFill>
-                  <a:srgbClr val="087E70"/>
+                  <a:srgbClr val="151521"/>
                 </a:solidFill>
                 <a:latin typeface="DM Sans Bold"/>
                 <a:ea typeface="DM Sans Bold"/>
                 <a:cs typeface="DM Sans Bold"/>
                 <a:sym typeface="DM Sans Bold"/>
               </a:rPr>
-              <a:t>Check signs → fresh goal</a:t>
-            </a:r>
-          </a:p>
-        </p:txBody>
-      </p:sp>
-      <p:sp>
-        <p:nvSpPr>
-          <p:cNvPr name="TextBox 15" id="15"/>
+              <a:t>x = 3, 4</a:t>
+            </a:r>
+          </a:p>
+        </p:txBody>
+      </p:sp>
+      <p:sp>
+        <p:nvSpPr>
+          <p:cNvPr name="TextBox 20" id="20"/>
           <p:cNvSpPr txBox="true"/>
           <p:nvPr/>
         </p:nvSpPr>
         <p:spPr>
           <a:xfrm rot="0">
-            <a:off x="609600" y="4162425"/>
-            <a:ext cx="2857500" cy="393573"/>
+            <a:off x="838200" y="3762375"/>
+            <a:ext cx="4572000" cy="547878"/>
           </a:xfrm>
           <a:prstGeom prst="rect">
             <a:avLst/>
@@ -16717,441 +17239,58 @@
           </a:bodyPr>
           <a:lstStyle/>
           <a:p>
-            <a:pPr algn="l">
+            <a:pPr algn="ctr">
               <a:lnSpc>
-                <a:spcPts val="3111"/>
+                <a:spcPts val="2196"/>
               </a:lnSpc>
             </a:pPr>
             <a:r>
-              <a:rPr lang="en-US" b="true" sz="2550">
+              <a:rPr lang="en-US" b="true" sz="1800">
                 <a:solidFill>
-                  <a:srgbClr val="C96331"/>
+                  <a:srgbClr val="536073"/>
                 </a:solidFill>
                 <a:latin typeface="DM Sans Bold"/>
                 <a:ea typeface="DM Sans Bold"/>
                 <a:cs typeface="DM Sans Bold"/>
                 <a:sym typeface="DM Sans Bold"/>
               </a:rPr>
-              <a:t>Tried x = 2, 6</a:t>
-            </a:r>
-          </a:p>
-        </p:txBody>
-      </p:sp>
-      <p:sp>
-        <p:nvSpPr>
-          <p:cNvPr name="AutoShape 16" id="16"/>
-          <p:cNvSpPr/>
-          <p:nvPr/>
-        </p:nvSpPr>
-        <p:spPr>
-          <a:xfrm rot="0">
-            <a:off x="3495675" y="4410075"/>
-            <a:ext cx="1019175" cy="38100"/>
-          </a:xfrm>
-          <a:prstGeom prst="rect">
-            <a:avLst/>
-          </a:prstGeom>
-          <a:solidFill>
-            <a:srgbClr val="C96331"/>
-          </a:solidFill>
-        </p:spPr>
-      </p:sp>
-      <p:grpSp>
-        <p:nvGrpSpPr>
-          <p:cNvPr name="Group 17" id="17"/>
-          <p:cNvGrpSpPr/>
-          <p:nvPr/>
-        </p:nvGrpSpPr>
-        <p:grpSpPr>
-          <a:xfrm rot="1840140">
-            <a:off x="4457033" y="4374452"/>
-            <a:ext cx="171450" cy="28575"/>
-            <a:chOff x="0" y="0"/>
-            <a:chExt cx="228600" cy="38100"/>
-          </a:xfrm>
-        </p:grpSpPr>
-        <p:sp>
-          <p:nvSpPr>
-            <p:cNvPr name="Freeform 18" id="18"/>
-            <p:cNvSpPr/>
-            <p:nvPr/>
-          </p:nvSpPr>
-          <p:spPr>
-            <a:xfrm flipH="false" flipV="false" rot="0">
-              <a:off x="0" y="0"/>
-              <a:ext cx="228600" cy="38100"/>
-            </a:xfrm>
-            <a:custGeom>
-              <a:avLst/>
-              <a:gdLst/>
-              <a:ahLst/>
-              <a:cxnLst/>
-              <a:rect r="r" b="b" t="t" l="l"/>
-              <a:pathLst>
-                <a:path h="38100" w="228600">
-                  <a:moveTo>
-                    <a:pt x="19050" y="0"/>
-                  </a:moveTo>
-                  <a:lnTo>
-                    <a:pt x="209550" y="0"/>
-                  </a:lnTo>
-                  <a:cubicBezTo>
-                    <a:pt x="220091" y="0"/>
-                    <a:pt x="228600" y="8509"/>
-                    <a:pt x="228600" y="19050"/>
-                  </a:cubicBezTo>
-                  <a:cubicBezTo>
-                    <a:pt x="228600" y="29591"/>
-                    <a:pt x="220091" y="38100"/>
-                    <a:pt x="209550" y="38100"/>
-                  </a:cubicBezTo>
-                  <a:lnTo>
-                    <a:pt x="19050" y="38100"/>
-                  </a:lnTo>
-                  <a:cubicBezTo>
-                    <a:pt x="8509" y="38100"/>
-                    <a:pt x="0" y="29591"/>
-                    <a:pt x="0" y="19050"/>
-                  </a:cubicBezTo>
-                  <a:cubicBezTo>
-                    <a:pt x="0" y="8509"/>
-                    <a:pt x="8509" y="0"/>
-                    <a:pt x="19050" y="0"/>
-                  </a:cubicBezTo>
-                  <a:close/>
-                </a:path>
-              </a:pathLst>
-            </a:custGeom>
-            <a:solidFill>
-              <a:srgbClr val="C96331"/>
-            </a:solidFill>
-          </p:spPr>
-        </p:sp>
-      </p:grpSp>
-      <p:grpSp>
-        <p:nvGrpSpPr>
-          <p:cNvPr name="Group 19" id="19"/>
-          <p:cNvGrpSpPr/>
-          <p:nvPr/>
-        </p:nvGrpSpPr>
-        <p:grpSpPr>
-          <a:xfrm rot="8959860">
-            <a:off x="4448937" y="4460176"/>
-            <a:ext cx="171450" cy="28575"/>
-            <a:chOff x="0" y="0"/>
-            <a:chExt cx="228600" cy="38100"/>
-          </a:xfrm>
-        </p:grpSpPr>
-        <p:sp>
-          <p:nvSpPr>
-            <p:cNvPr name="Freeform 20" id="20"/>
-            <p:cNvSpPr/>
-            <p:nvPr/>
-          </p:nvSpPr>
-          <p:spPr>
-            <a:xfrm flipH="false" flipV="false" rot="0">
-              <a:off x="0" y="0"/>
-              <a:ext cx="228600" cy="38100"/>
-            </a:xfrm>
-            <a:custGeom>
-              <a:avLst/>
-              <a:gdLst/>
-              <a:ahLst/>
-              <a:cxnLst/>
-              <a:rect r="r" b="b" t="t" l="l"/>
-              <a:pathLst>
-                <a:path h="38100" w="228600">
-                  <a:moveTo>
-                    <a:pt x="19050" y="0"/>
-                  </a:moveTo>
-                  <a:lnTo>
-                    <a:pt x="209550" y="0"/>
-                  </a:lnTo>
-                  <a:cubicBezTo>
-                    <a:pt x="220091" y="0"/>
-                    <a:pt x="228600" y="8509"/>
-                    <a:pt x="228600" y="19050"/>
-                  </a:cubicBezTo>
-                  <a:cubicBezTo>
-                    <a:pt x="228600" y="29591"/>
-                    <a:pt x="220091" y="38100"/>
-                    <a:pt x="209550" y="38100"/>
-                  </a:cubicBezTo>
-                  <a:lnTo>
-                    <a:pt x="19050" y="38100"/>
-                  </a:lnTo>
-                  <a:cubicBezTo>
-                    <a:pt x="8509" y="38100"/>
-                    <a:pt x="0" y="29591"/>
-                    <a:pt x="0" y="19050"/>
-                  </a:cubicBezTo>
-                  <a:cubicBezTo>
-                    <a:pt x="0" y="8509"/>
-                    <a:pt x="8509" y="0"/>
-                    <a:pt x="19050" y="0"/>
-                  </a:cubicBezTo>
-                  <a:close/>
-                </a:path>
-              </a:pathLst>
-            </a:custGeom>
-            <a:solidFill>
-              <a:srgbClr val="C96331"/>
-            </a:solidFill>
-          </p:spPr>
-        </p:sp>
-      </p:grpSp>
-      <p:sp>
-        <p:nvSpPr>
-          <p:cNvPr name="AutoShape 21" id="21"/>
-          <p:cNvSpPr/>
-          <p:nvPr/>
-        </p:nvSpPr>
-        <p:spPr>
-          <a:xfrm rot="0">
-            <a:off x="4857750" y="3952875"/>
-            <a:ext cx="2914650" cy="971550"/>
-          </a:xfrm>
-          <a:prstGeom prst="rect">
-            <a:avLst/>
-          </a:prstGeom>
-          <a:solidFill>
-            <a:srgbClr val="F8EADF"/>
-          </a:solidFill>
-        </p:spPr>
-      </p:sp>
-      <p:sp>
-        <p:nvSpPr>
-          <p:cNvPr name="TextBox 22" id="22"/>
-          <p:cNvSpPr txBox="true"/>
-          <p:nvPr/>
-        </p:nvSpPr>
-        <p:spPr>
-          <a:xfrm rot="0">
-            <a:off x="5010150" y="4229100"/>
-            <a:ext cx="2609850" cy="346520"/>
-          </a:xfrm>
-          <a:prstGeom prst="rect">
-            <a:avLst/>
-          </a:prstGeom>
-        </p:spPr>
-        <p:txBody>
-          <a:bodyPr anchor="t" rtlCol="false" tIns="0" lIns="0" bIns="0" rIns="0">
-            <a:spAutoFit/>
-          </a:bodyPr>
-          <a:lstStyle/>
+              <a:t>Right pair, wrong signs.</a:t>
+            </a:r>
+          </a:p>
           <a:p>
             <a:pPr algn="ctr">
               <a:lnSpc>
-                <a:spcPts val="2836"/>
+                <a:spcPts val="2196"/>
               </a:lnSpc>
+              <a:spcBef>
+                <a:spcPct val="0"/>
+              </a:spcBef>
             </a:pPr>
             <a:r>
-              <a:rPr lang="en-US" b="true" sz="2325">
+              <a:rPr lang="en-US" b="true" sz="1800">
                 <a:solidFill>
-                  <a:srgbClr val="C96331"/>
+                  <a:srgbClr val="536073"/>
                 </a:solidFill>
                 <a:latin typeface="DM Sans Bold"/>
                 <a:ea typeface="DM Sans Bold"/>
                 <a:cs typeface="DM Sans Bold"/>
                 <a:sym typeface="DM Sans Bold"/>
               </a:rPr>
-              <a:t>Check factors</a:t>
-            </a:r>
-          </a:p>
-        </p:txBody>
-      </p:sp>
-      <p:sp>
-        <p:nvSpPr>
-          <p:cNvPr name="AutoShape 23" id="23"/>
-          <p:cNvSpPr/>
-          <p:nvPr/>
-        </p:nvSpPr>
-        <p:spPr>
-          <a:xfrm rot="0">
-            <a:off x="8029575" y="4410075"/>
-            <a:ext cx="771525" cy="38100"/>
-          </a:xfrm>
-          <a:prstGeom prst="rect">
-            <a:avLst/>
-          </a:prstGeom>
-          <a:solidFill>
-            <a:srgbClr val="C96331"/>
-          </a:solidFill>
-        </p:spPr>
-      </p:sp>
-      <p:grpSp>
-        <p:nvGrpSpPr>
-          <p:cNvPr name="Group 24" id="24"/>
-          <p:cNvGrpSpPr/>
-          <p:nvPr/>
-        </p:nvGrpSpPr>
-        <p:grpSpPr>
-          <a:xfrm rot="1840140">
-            <a:off x="8743283" y="4374452"/>
-            <a:ext cx="171450" cy="28575"/>
-            <a:chOff x="0" y="0"/>
-            <a:chExt cx="228600" cy="38100"/>
-          </a:xfrm>
-        </p:grpSpPr>
-        <p:sp>
-          <p:nvSpPr>
-            <p:cNvPr name="Freeform 25" id="25"/>
-            <p:cNvSpPr/>
-            <p:nvPr/>
-          </p:nvSpPr>
-          <p:spPr>
-            <a:xfrm flipH="false" flipV="false" rot="0">
-              <a:off x="0" y="0"/>
-              <a:ext cx="228600" cy="38100"/>
-            </a:xfrm>
-            <a:custGeom>
-              <a:avLst/>
-              <a:gdLst/>
-              <a:ahLst/>
-              <a:cxnLst/>
-              <a:rect r="r" b="b" t="t" l="l"/>
-              <a:pathLst>
-                <a:path h="38100" w="228600">
-                  <a:moveTo>
-                    <a:pt x="19050" y="0"/>
-                  </a:moveTo>
-                  <a:lnTo>
-                    <a:pt x="209550" y="0"/>
-                  </a:lnTo>
-                  <a:cubicBezTo>
-                    <a:pt x="220091" y="0"/>
-                    <a:pt x="228600" y="8509"/>
-                    <a:pt x="228600" y="19050"/>
-                  </a:cubicBezTo>
-                  <a:cubicBezTo>
-                    <a:pt x="228600" y="29591"/>
-                    <a:pt x="220091" y="38100"/>
-                    <a:pt x="209550" y="38100"/>
-                  </a:cubicBezTo>
-                  <a:lnTo>
-                    <a:pt x="19050" y="38100"/>
-                  </a:lnTo>
-                  <a:cubicBezTo>
-                    <a:pt x="8509" y="38100"/>
-                    <a:pt x="0" y="29591"/>
-                    <a:pt x="0" y="19050"/>
-                  </a:cubicBezTo>
-                  <a:cubicBezTo>
-                    <a:pt x="0" y="8509"/>
-                    <a:pt x="8509" y="0"/>
-                    <a:pt x="19050" y="0"/>
-                  </a:cubicBezTo>
-                  <a:close/>
-                </a:path>
-              </a:pathLst>
-            </a:custGeom>
-            <a:solidFill>
-              <a:srgbClr val="C96331"/>
-            </a:solidFill>
-          </p:spPr>
-        </p:sp>
-      </p:grpSp>
-      <p:grpSp>
-        <p:nvGrpSpPr>
-          <p:cNvPr name="Group 26" id="26"/>
-          <p:cNvGrpSpPr/>
-          <p:nvPr/>
-        </p:nvGrpSpPr>
-        <p:grpSpPr>
-          <a:xfrm rot="8959860">
-            <a:off x="8735187" y="4460176"/>
-            <a:ext cx="171450" cy="28575"/>
-            <a:chOff x="0" y="0"/>
-            <a:chExt cx="228600" cy="38100"/>
-          </a:xfrm>
-        </p:grpSpPr>
-        <p:sp>
-          <p:nvSpPr>
-            <p:cNvPr name="Freeform 27" id="27"/>
-            <p:cNvSpPr/>
-            <p:nvPr/>
-          </p:nvSpPr>
-          <p:spPr>
-            <a:xfrm flipH="false" flipV="false" rot="0">
-              <a:off x="0" y="0"/>
-              <a:ext cx="228600" cy="38100"/>
-            </a:xfrm>
-            <a:custGeom>
-              <a:avLst/>
-              <a:gdLst/>
-              <a:ahLst/>
-              <a:cxnLst/>
-              <a:rect r="r" b="b" t="t" l="l"/>
-              <a:pathLst>
-                <a:path h="38100" w="228600">
-                  <a:moveTo>
-                    <a:pt x="19050" y="0"/>
-                  </a:moveTo>
-                  <a:lnTo>
-                    <a:pt x="209550" y="0"/>
-                  </a:lnTo>
-                  <a:cubicBezTo>
-                    <a:pt x="220091" y="0"/>
-                    <a:pt x="228600" y="8509"/>
-                    <a:pt x="228600" y="19050"/>
-                  </a:cubicBezTo>
-                  <a:cubicBezTo>
-                    <a:pt x="228600" y="29591"/>
-                    <a:pt x="220091" y="38100"/>
-                    <a:pt x="209550" y="38100"/>
-                  </a:cubicBezTo>
-                  <a:lnTo>
-                    <a:pt x="19050" y="38100"/>
-                  </a:lnTo>
-                  <a:cubicBezTo>
-                    <a:pt x="8509" y="38100"/>
-                    <a:pt x="0" y="29591"/>
-                    <a:pt x="0" y="19050"/>
-                  </a:cubicBezTo>
-                  <a:cubicBezTo>
-                    <a:pt x="0" y="8509"/>
-                    <a:pt x="8509" y="0"/>
-                    <a:pt x="19050" y="0"/>
-                  </a:cubicBezTo>
-                  <a:close/>
-                </a:path>
-              </a:pathLst>
-            </a:custGeom>
-            <a:solidFill>
-              <a:srgbClr val="C96331"/>
-            </a:solidFill>
-          </p:spPr>
-        </p:sp>
-      </p:grpSp>
-      <p:sp>
-        <p:nvSpPr>
-          <p:cNvPr name="AutoShape 28" id="28"/>
-          <p:cNvSpPr/>
-          <p:nvPr/>
-        </p:nvSpPr>
-        <p:spPr>
-          <a:xfrm rot="0">
-            <a:off x="9144000" y="3952875"/>
-            <a:ext cx="2438400" cy="971550"/>
-          </a:xfrm>
-          <a:prstGeom prst="rect">
-            <a:avLst/>
-          </a:prstGeom>
-          <a:solidFill>
-            <a:srgbClr val="F0EFFF"/>
-          </a:solidFill>
-        </p:spPr>
-      </p:sp>
-      <p:sp>
-        <p:nvSpPr>
-          <p:cNvPr name="TextBox 29" id="29"/>
+              <a:t>Check signs and solutions.</a:t>
+            </a:r>
+          </a:p>
+        </p:txBody>
+      </p:sp>
+      <p:sp>
+        <p:nvSpPr>
+          <p:cNvPr name="TextBox 21" id="21"/>
           <p:cNvSpPr txBox="true"/>
           <p:nvPr/>
         </p:nvSpPr>
         <p:spPr>
           <a:xfrm rot="0">
-            <a:off x="9220200" y="4219575"/>
-            <a:ext cx="2286000" cy="346710"/>
+            <a:off x="6781800" y="2857500"/>
+            <a:ext cx="4572000" cy="506222"/>
           </a:xfrm>
           <a:prstGeom prst="rect">
             <a:avLst/>
@@ -17165,11 +17304,121 @@
           <a:p>
             <a:pPr algn="ctr">
               <a:lnSpc>
-                <a:spcPts val="2745"/>
+                <a:spcPts val="3904"/>
+              </a:lnSpc>
+              <a:spcBef>
+                <a:spcPct val="0"/>
+              </a:spcBef>
+            </a:pPr>
+            <a:r>
+              <a:rPr lang="en-US" b="true" sz="3200">
+                <a:solidFill>
+                  <a:srgbClr val="151521"/>
+                </a:solidFill>
+                <a:latin typeface="DM Sans Bold"/>
+                <a:ea typeface="DM Sans Bold"/>
+                <a:cs typeface="DM Sans Bold"/>
+                <a:sym typeface="DM Sans Bold"/>
+              </a:rPr>
+              <a:t>x = 2, 6</a:t>
+            </a:r>
+          </a:p>
+        </p:txBody>
+      </p:sp>
+      <p:sp>
+        <p:nvSpPr>
+          <p:cNvPr name="TextBox 22" id="22"/>
+          <p:cNvSpPr txBox="true"/>
+          <p:nvPr/>
+        </p:nvSpPr>
+        <p:spPr>
+          <a:xfrm rot="0">
+            <a:off x="6781800" y="3762375"/>
+            <a:ext cx="4572000" cy="547878"/>
+          </a:xfrm>
+          <a:prstGeom prst="rect">
+            <a:avLst/>
+          </a:prstGeom>
+        </p:spPr>
+        <p:txBody>
+          <a:bodyPr anchor="t" rtlCol="false" tIns="0" lIns="0" bIns="0" rIns="0">
+            <a:spAutoFit/>
+          </a:bodyPr>
+          <a:lstStyle/>
+          <a:p>
+            <a:pPr algn="ctr">
+              <a:lnSpc>
+                <a:spcPts val="2196"/>
               </a:lnSpc>
             </a:pPr>
             <a:r>
-              <a:rPr lang="en-US" b="true" sz="2250">
+              <a:rPr lang="en-US" b="true" sz="1800">
+                <a:solidFill>
+                  <a:srgbClr val="536073"/>
+                </a:solidFill>
+                <a:latin typeface="DM Sans Bold"/>
+                <a:ea typeface="DM Sans Bold"/>
+                <a:cs typeface="DM Sans Bold"/>
+                <a:sym typeface="DM Sans Bold"/>
+              </a:rPr>
+              <a:t>Wrong factor pair.</a:t>
+            </a:r>
+          </a:p>
+          <a:p>
+            <a:pPr algn="ctr">
+              <a:lnSpc>
+                <a:spcPts val="2196"/>
+              </a:lnSpc>
+              <a:spcBef>
+                <a:spcPct val="0"/>
+              </a:spcBef>
+            </a:pPr>
+            <a:r>
+              <a:rPr lang="en-US" b="true" sz="1800">
+                <a:solidFill>
+                  <a:srgbClr val="536073"/>
+                </a:solidFill>
+                <a:latin typeface="DM Sans Bold"/>
+                <a:ea typeface="DM Sans Bold"/>
+                <a:cs typeface="DM Sans Bold"/>
+                <a:sym typeface="DM Sans Bold"/>
+              </a:rPr>
+              <a:t>Check product and sum.</a:t>
+            </a:r>
+          </a:p>
+        </p:txBody>
+      </p:sp>
+      <p:sp>
+        <p:nvSpPr>
+          <p:cNvPr name="TextBox 23" id="23"/>
+          <p:cNvSpPr txBox="true"/>
+          <p:nvPr/>
+        </p:nvSpPr>
+        <p:spPr>
+          <a:xfrm rot="0">
+            <a:off x="3619500" y="5800725"/>
+            <a:ext cx="4953000" cy="374904"/>
+          </a:xfrm>
+          <a:prstGeom prst="rect">
+            <a:avLst/>
+          </a:prstGeom>
+        </p:spPr>
+        <p:txBody>
+          <a:bodyPr anchor="t" rtlCol="false" tIns="0" lIns="0" bIns="0" rIns="0">
+            <a:spAutoFit/>
+          </a:bodyPr>
+          <a:lstStyle/>
+          <a:p>
+            <a:pPr algn="ctr">
+              <a:lnSpc>
+                <a:spcPts val="2928"/>
+              </a:lnSpc>
+              <a:spcBef>
+                <a:spcPct val="0"/>
+              </a:spcBef>
+            </a:pPr>
+            <a:r>
+              <a:rPr lang="en-US" b="true" sz="2400">
                 <a:solidFill>
                   <a:srgbClr val="5753FA"/>
                 </a:solidFill>
@@ -17178,75 +17427,10 @@
                 <a:cs typeface="DM Sans Bold"/>
                 <a:sym typeface="DM Sans Bold"/>
               </a:rPr>
-              <a:t>Fresh goal</a:t>
-            </a:r>
-          </a:p>
-        </p:txBody>
-      </p:sp>
-      <p:sp>
-        <p:nvSpPr>
-          <p:cNvPr name="TextBox 30" id="30"/>
-          <p:cNvSpPr txBox="true"/>
-          <p:nvPr/>
-        </p:nvSpPr>
-        <p:spPr>
-          <a:xfrm rot="0">
-            <a:off x="609600" y="5791200"/>
-            <a:ext cx="10972800" cy="393382"/>
-          </a:xfrm>
-          <a:prstGeom prst="rect">
-            <a:avLst/>
-          </a:prstGeom>
-        </p:spPr>
-        <p:txBody>
-          <a:bodyPr anchor="t" rtlCol="false" tIns="0" lIns="0" bIns="0" rIns="0">
-            <a:spAutoFit/>
-          </a:bodyPr>
-          <a:lstStyle/>
-          <a:p>
-            <a:pPr algn="ctr">
-              <a:lnSpc>
-                <a:spcPts val="3202"/>
-              </a:lnSpc>
-            </a:pPr>
-            <a:r>
-              <a:rPr lang="en-US" b="true" sz="2625">
-                <a:solidFill>
-                  <a:srgbClr val="151521"/>
-                </a:solidFill>
-                <a:latin typeface="DM Sans Bold"/>
-                <a:ea typeface="DM Sans Bold"/>
-                <a:cs typeface="DM Sans Bold"/>
-                <a:sym typeface="DM Sans Bold"/>
-              </a:rPr>
-              <a:t>The mistake points to the starting check.</a:t>
-            </a:r>
-          </a:p>
-        </p:txBody>
-      </p:sp>
-      <p:sp>
-        <p:nvSpPr>
-          <p:cNvPr name="AutoShape 31" id="31"/>
-          <p:cNvSpPr/>
-          <p:nvPr/>
-        </p:nvSpPr>
-        <p:spPr>
-          <a:xfrm>
-            <a:off x="609600" y="1381125"/>
-            <a:ext cx="10972800" cy="0"/>
-          </a:xfrm>
-          <a:prstGeom prst="line">
-            <a:avLst/>
-          </a:prstGeom>
-          <a:ln cap="flat" w="19050">
-            <a:solidFill>
-              <a:srgbClr val="CCD7E4"/>
-            </a:solidFill>
-            <a:prstDash val="solid"/>
-            <a:headEnd type="none" len="sm" w="sm"/>
-            <a:tailEnd type="none" len="sm" w="sm"/>
-          </a:ln>
-        </p:spPr>
+              <a:t>Return with fresh numbers</a:t>
+            </a:r>
+          </a:p>
+        </p:txBody>
       </p:sp>
     </p:spTree>
   </p:cSld>
@@ -19286,7 +19470,7 @@
                 <a:sym typeface="DM Sans"/>
                 <a:hlinkClick r:id="rId8" tooltip="https://backtrack-learning.vercel.app/demo"/>
               </a:rPr>
-              <a:t>backtrack-learning.vercel.app</a:t>
+              <a:t>backtrack-learning.vercel.app/demo</a:t>
             </a:r>
           </a:p>
         </p:txBody>

--- a/output/BACKTRACK_KEIC_2026.pptx
+++ b/output/BACKTRACK_KEIC_2026.pptx
@@ -6711,9 +6711,174 @@
           </p:spPr>
         </p:sp>
       </p:grpSp>
-      <p:sp>
-        <p:nvSpPr>
-          <p:cNvPr name="Freeform 5" id="5"/>
+      <p:grpSp>
+        <p:nvGrpSpPr>
+          <p:cNvPr name="Group 5" id="5"/>
+          <p:cNvGrpSpPr/>
+          <p:nvPr/>
+        </p:nvGrpSpPr>
+        <p:grpSpPr>
+          <a:xfrm rot="0">
+            <a:off x="0" y="0"/>
+            <a:ext cx="12192000" cy="6858000"/>
+            <a:chOff x="0" y="0"/>
+            <a:chExt cx="16256000" cy="9144000"/>
+          </a:xfrm>
+        </p:grpSpPr>
+        <p:sp>
+          <p:nvSpPr>
+            <p:cNvPr name="Freeform 6" id="6"/>
+            <p:cNvSpPr/>
+            <p:nvPr/>
+          </p:nvSpPr>
+          <p:spPr>
+            <a:xfrm flipH="false" flipV="false" rot="0">
+              <a:off x="0" y="0"/>
+              <a:ext cx="16256000" cy="9144000"/>
+            </a:xfrm>
+            <a:custGeom>
+              <a:avLst/>
+              <a:gdLst/>
+              <a:ahLst/>
+              <a:cxnLst/>
+              <a:rect r="r" b="b" t="t" l="l"/>
+              <a:pathLst>
+                <a:path h="9144000" w="16256000">
+                  <a:moveTo>
+                    <a:pt x="0" y="0"/>
+                  </a:moveTo>
+                  <a:lnTo>
+                    <a:pt x="16256000" y="0"/>
+                  </a:lnTo>
+                  <a:lnTo>
+                    <a:pt x="16256000" y="9144000"/>
+                  </a:lnTo>
+                  <a:lnTo>
+                    <a:pt x="0" y="9144000"/>
+                  </a:lnTo>
+                  <a:lnTo>
+                    <a:pt x="0" y="0"/>
+                  </a:lnTo>
+                  <a:close/>
+                </a:path>
+              </a:pathLst>
+            </a:custGeom>
+            <a:blipFill>
+              <a:blip r:embed="rId4">
+                <a:extLst>
+                  <a:ext uri="{96DAC541-7B7A-43D3-8B79-37D633B846F1}">
+                    <asvg:svgBlip xmlns:asvg="http://schemas.microsoft.com/office/drawing/2016/SVG/main" r:embed="rId5"/>
+                  </a:ext>
+                </a:extLst>
+              </a:blip>
+              <a:stretch>
+                <a:fillRect l="0" t="0" r="0" b="0"/>
+              </a:stretch>
+            </a:blipFill>
+          </p:spPr>
+        </p:sp>
+        <p:sp>
+          <p:nvSpPr>
+            <p:cNvPr name="Freeform 7" id="7"/>
+            <p:cNvSpPr/>
+            <p:nvPr/>
+          </p:nvSpPr>
+          <p:spPr>
+            <a:xfrm flipH="false" flipV="false" rot="0">
+              <a:off x="11887200" y="0"/>
+              <a:ext cx="3556000" cy="803656"/>
+            </a:xfrm>
+            <a:custGeom>
+              <a:avLst/>
+              <a:gdLst/>
+              <a:ahLst/>
+              <a:cxnLst/>
+              <a:rect r="r" b="b" t="t" l="l"/>
+              <a:pathLst>
+                <a:path h="803656" w="3556000">
+                  <a:moveTo>
+                    <a:pt x="0" y="0"/>
+                  </a:moveTo>
+                  <a:lnTo>
+                    <a:pt x="3556000" y="0"/>
+                  </a:lnTo>
+                  <a:lnTo>
+                    <a:pt x="3556000" y="803656"/>
+                  </a:lnTo>
+                  <a:lnTo>
+                    <a:pt x="0" y="803656"/>
+                  </a:lnTo>
+                  <a:lnTo>
+                    <a:pt x="0" y="0"/>
+                  </a:lnTo>
+                  <a:close/>
+                </a:path>
+              </a:pathLst>
+            </a:custGeom>
+            <a:blipFill>
+              <a:blip r:embed="rId6"/>
+              <a:stretch>
+                <a:fillRect l="0" t="0" r="0" b="0"/>
+              </a:stretch>
+            </a:blipFill>
+          </p:spPr>
+        </p:sp>
+        <p:sp>
+          <p:nvSpPr>
+            <p:cNvPr name="Freeform 8" id="8"/>
+            <p:cNvSpPr/>
+            <p:nvPr/>
+          </p:nvSpPr>
+          <p:spPr>
+            <a:xfrm flipH="false" flipV="false" rot="0">
+              <a:off x="812800" y="127000"/>
+              <a:ext cx="2413000" cy="504536"/>
+            </a:xfrm>
+            <a:custGeom>
+              <a:avLst/>
+              <a:gdLst/>
+              <a:ahLst/>
+              <a:cxnLst/>
+              <a:rect r="r" b="b" t="t" l="l"/>
+              <a:pathLst>
+                <a:path h="504536" w="2413000">
+                  <a:moveTo>
+                    <a:pt x="0" y="0"/>
+                  </a:moveTo>
+                  <a:lnTo>
+                    <a:pt x="2413000" y="0"/>
+                  </a:lnTo>
+                  <a:lnTo>
+                    <a:pt x="2413000" y="504536"/>
+                  </a:lnTo>
+                  <a:lnTo>
+                    <a:pt x="0" y="504536"/>
+                  </a:lnTo>
+                  <a:lnTo>
+                    <a:pt x="0" y="0"/>
+                  </a:lnTo>
+                  <a:close/>
+                </a:path>
+              </a:pathLst>
+            </a:custGeom>
+            <a:blipFill>
+              <a:blip r:embed="rId7">
+                <a:extLst>
+                  <a:ext uri="{96DAC541-7B7A-43D3-8B79-37D633B846F1}">
+                    <asvg:svgBlip xmlns:asvg="http://schemas.microsoft.com/office/drawing/2016/SVG/main" r:embed="rId8"/>
+                  </a:ext>
+                </a:extLst>
+              </a:blip>
+              <a:stretch>
+                <a:fillRect l="0" t="0" r="0" b="0"/>
+              </a:stretch>
+            </a:blipFill>
+          </p:spPr>
+        </p:sp>
+      </p:grpSp>
+      <p:sp>
+        <p:nvSpPr>
+          <p:cNvPr name="Freeform 9" id="9"/>
           <p:cNvSpPr/>
           <p:nvPr/>
         </p:nvSpPr>
@@ -6750,10 +6915,10 @@
             </a:pathLst>
           </a:custGeom>
           <a:blipFill>
-            <a:blip r:embed="rId4">
+            <a:blip r:embed="rId9">
               <a:extLst>
                 <a:ext uri="{96DAC541-7B7A-43D3-8B79-37D633B846F1}">
-                  <asvg:svgBlip xmlns:asvg="http://schemas.microsoft.com/office/drawing/2016/SVG/main" r:embed="rId5"/>
+                  <asvg:svgBlip xmlns:asvg="http://schemas.microsoft.com/office/drawing/2016/SVG/main" r:embed="rId10"/>
                 </a:ext>
               </a:extLst>
             </a:blip>
@@ -6765,7 +6930,7 @@
       </p:sp>
       <p:grpSp>
         <p:nvGrpSpPr>
-          <p:cNvPr name="Group 6" id="6"/>
+          <p:cNvPr name="Group 10" id="10"/>
           <p:cNvGrpSpPr/>
           <p:nvPr/>
         </p:nvGrpSpPr>
@@ -6779,7 +6944,7 @@
         </p:grpSpPr>
         <p:sp>
           <p:nvSpPr>
-            <p:cNvPr name="Freeform 7" id="7"/>
+            <p:cNvPr name="Freeform 11" id="11"/>
             <p:cNvSpPr/>
             <p:nvPr/>
           </p:nvSpPr>
@@ -6830,7 +6995,7 @@
         </p:sp>
         <p:sp>
           <p:nvSpPr>
-            <p:cNvPr name="TextBox 8" id="8"/>
+            <p:cNvPr name="TextBox 12" id="12"/>
             <p:cNvSpPr txBox="true"/>
             <p:nvPr/>
           </p:nvSpPr>
@@ -6856,454 +7021,9 @@
           </p:txBody>
         </p:sp>
       </p:grpSp>
-      <p:sp>
-        <p:nvSpPr>
-          <p:cNvPr name="TextBox 9" id="9"/>
-          <p:cNvSpPr txBox="true"/>
-          <p:nvPr/>
-        </p:nvSpPr>
-        <p:spPr>
-          <a:xfrm rot="0">
-            <a:off x="11239500" y="6353175"/>
-            <a:ext cx="428625" cy="168592"/>
-          </a:xfrm>
-          <a:prstGeom prst="rect">
-            <a:avLst/>
-          </a:prstGeom>
-        </p:spPr>
-        <p:txBody>
-          <a:bodyPr anchor="t" rtlCol="false" tIns="0" lIns="0" bIns="0" rIns="0">
-            <a:spAutoFit/>
-          </a:bodyPr>
-          <a:lstStyle/>
-          <a:p>
-            <a:pPr algn="l">
-              <a:lnSpc>
-                <a:spcPts val="1372"/>
-              </a:lnSpc>
-            </a:pPr>
-            <a:r>
-              <a:rPr lang="en-US" sz="1125">
-                <a:solidFill>
-                  <a:srgbClr val="536073"/>
-                </a:solidFill>
-                <a:latin typeface="DM Sans"/>
-                <a:ea typeface="DM Sans"/>
-                <a:cs typeface="DM Sans"/>
-                <a:sym typeface="DM Sans"/>
-              </a:rPr>
-              <a:t>01</a:t>
-            </a:r>
-          </a:p>
-        </p:txBody>
-      </p:sp>
-      <p:sp>
-        <p:nvSpPr>
-          <p:cNvPr name="TextBox 10" id="10"/>
-          <p:cNvSpPr txBox="true"/>
-          <p:nvPr/>
-        </p:nvSpPr>
-        <p:spPr>
-          <a:xfrm rot="0">
-            <a:off x="609600" y="533400"/>
-            <a:ext cx="5715000" cy="393382"/>
-          </a:xfrm>
-          <a:prstGeom prst="rect">
-            <a:avLst/>
-          </a:prstGeom>
-        </p:spPr>
-        <p:txBody>
-          <a:bodyPr anchor="t" rtlCol="false" tIns="0" lIns="0" bIns="0" rIns="0">
-            <a:spAutoFit/>
-          </a:bodyPr>
-          <a:lstStyle/>
-          <a:p>
-            <a:pPr algn="l">
-              <a:lnSpc>
-                <a:spcPts val="3202"/>
-              </a:lnSpc>
-            </a:pPr>
-            <a:r>
-              <a:rPr lang="en-US" b="true" sz="2625">
-                <a:solidFill>
-                  <a:srgbClr val="087E70"/>
-                </a:solidFill>
-                <a:latin typeface="DM Sans Bold"/>
-                <a:ea typeface="DM Sans Bold"/>
-                <a:cs typeface="DM Sans Bold"/>
-                <a:sym typeface="DM Sans Bold"/>
-              </a:rPr>
-              <a:t>backtrack.</a:t>
-            </a:r>
-          </a:p>
-        </p:txBody>
-      </p:sp>
-      <p:sp>
-        <p:nvSpPr>
-          <p:cNvPr name="TextBox 11" id="11"/>
-          <p:cNvSpPr txBox="true"/>
-          <p:nvPr/>
-        </p:nvSpPr>
-        <p:spPr>
-          <a:xfrm rot="0">
-            <a:off x="609600" y="1057275"/>
-            <a:ext cx="10972800" cy="674624"/>
-          </a:xfrm>
-          <a:prstGeom prst="rect">
-            <a:avLst/>
-          </a:prstGeom>
-        </p:spPr>
-        <p:txBody>
-          <a:bodyPr anchor="t" rtlCol="false" tIns="0" lIns="0" bIns="0" rIns="0">
-            <a:spAutoFit/>
-          </a:bodyPr>
-          <a:lstStyle/>
-          <a:p>
-            <a:pPr algn="l">
-              <a:lnSpc>
-                <a:spcPts val="5368"/>
-              </a:lnSpc>
-            </a:pPr>
-            <a:r>
-              <a:rPr lang="en-US" b="true" sz="4400">
-                <a:solidFill>
-                  <a:srgbClr val="151521"/>
-                </a:solidFill>
-                <a:latin typeface="DM Sans Bold"/>
-                <a:ea typeface="DM Sans Bold"/>
-                <a:cs typeface="DM Sans Bold"/>
-                <a:sym typeface="DM Sans Bold"/>
-              </a:rPr>
-              <a:t>Find the missing skill.</a:t>
-            </a:r>
-          </a:p>
-        </p:txBody>
-      </p:sp>
-      <p:sp>
-        <p:nvSpPr>
-          <p:cNvPr name="TextBox 12" id="12"/>
-          <p:cNvSpPr txBox="true"/>
-          <p:nvPr/>
-        </p:nvSpPr>
-        <p:spPr>
-          <a:xfrm rot="0">
-            <a:off x="609600" y="1743075"/>
-            <a:ext cx="10972800" cy="674624"/>
-          </a:xfrm>
-          <a:prstGeom prst="rect">
-            <a:avLst/>
-          </a:prstGeom>
-        </p:spPr>
-        <p:txBody>
-          <a:bodyPr anchor="t" rtlCol="false" tIns="0" lIns="0" bIns="0" rIns="0">
-            <a:spAutoFit/>
-          </a:bodyPr>
-          <a:lstStyle/>
-          <a:p>
-            <a:pPr algn="l">
-              <a:lnSpc>
-                <a:spcPts val="5368"/>
-              </a:lnSpc>
-            </a:pPr>
-            <a:r>
-              <a:rPr lang="en-US" b="true" sz="4400">
-                <a:solidFill>
-                  <a:srgbClr val="5753FA"/>
-                </a:solidFill>
-                <a:latin typeface="DM Sans Bold"/>
-                <a:ea typeface="DM Sans Bold"/>
-                <a:cs typeface="DM Sans Bold"/>
-                <a:sym typeface="DM Sans Bold"/>
-              </a:rPr>
-              <a:t>Get back to today’s lesson.</a:t>
-            </a:r>
-          </a:p>
-        </p:txBody>
-      </p:sp>
-      <p:sp>
-        <p:nvSpPr>
-          <p:cNvPr name="TextBox 13" id="13"/>
-          <p:cNvSpPr txBox="true"/>
-          <p:nvPr/>
-        </p:nvSpPr>
-        <p:spPr>
-          <a:xfrm rot="0">
-            <a:off x="609600" y="2733675"/>
-            <a:ext cx="10972800" cy="651891"/>
-          </a:xfrm>
-          <a:prstGeom prst="rect">
-            <a:avLst/>
-          </a:prstGeom>
-        </p:spPr>
-        <p:txBody>
-          <a:bodyPr anchor="t" rtlCol="false" tIns="0" lIns="0" bIns="0" rIns="0">
-            <a:spAutoFit/>
-          </a:bodyPr>
-          <a:lstStyle/>
-          <a:p>
-            <a:pPr algn="l">
-              <a:lnSpc>
-                <a:spcPts val="2562"/>
-              </a:lnSpc>
-            </a:pPr>
-            <a:r>
-              <a:rPr lang="en-US" sz="2100">
-                <a:solidFill>
-                  <a:srgbClr val="536073"/>
-                </a:solidFill>
-                <a:latin typeface="DM Sans"/>
-                <a:ea typeface="DM Sans"/>
-                <a:cs typeface="DM Sans"/>
-                <a:sym typeface="DM Sans"/>
-              </a:rPr>
-              <a:t>THE PROBLEM</a:t>
-            </a:r>
-          </a:p>
-          <a:p>
-            <a:pPr algn="l">
-              <a:lnSpc>
-                <a:spcPts val="2562"/>
-              </a:lnSpc>
-            </a:pPr>
-            <a:r>
-              <a:rPr lang="en-US" sz="2100">
-                <a:solidFill>
-                  <a:srgbClr val="536073"/>
-                </a:solidFill>
-                <a:latin typeface="DM Sans"/>
-                <a:ea typeface="DM Sans"/>
-                <a:cs typeface="DM Sans"/>
-                <a:sym typeface="DM Sans"/>
-              </a:rPr>
-              <a:t>A student gets stuck, but doesn’t know which earlier skill to review.</a:t>
-            </a:r>
-          </a:p>
-        </p:txBody>
-      </p:sp>
-      <p:sp>
-        <p:nvSpPr>
-          <p:cNvPr name="TextBox 14" id="14"/>
-          <p:cNvSpPr txBox="true"/>
-          <p:nvPr/>
-        </p:nvSpPr>
-        <p:spPr>
-          <a:xfrm rot="0">
-            <a:off x="609600" y="6448425"/>
-            <a:ext cx="9525000" cy="215519"/>
-          </a:xfrm>
-          <a:prstGeom prst="rect">
-            <a:avLst/>
-          </a:prstGeom>
-        </p:spPr>
-        <p:txBody>
-          <a:bodyPr anchor="t" rtlCol="false" tIns="0" lIns="0" bIns="0" rIns="0">
-            <a:spAutoFit/>
-          </a:bodyPr>
-          <a:lstStyle/>
-          <a:p>
-            <a:pPr algn="l">
-              <a:lnSpc>
-                <a:spcPts val="1708"/>
-              </a:lnSpc>
-            </a:pPr>
-            <a:r>
-              <a:rPr lang="en-US" sz="1400">
-                <a:solidFill>
-                  <a:srgbClr val="536073"/>
-                </a:solidFill>
-                <a:latin typeface="DM Sans"/>
-                <a:ea typeface="DM Sans"/>
-                <a:cs typeface="DM Sans"/>
-                <a:sym typeface="DM Sans"/>
-              </a:rPr>
-              <a:t>University of the Philippines Manila</a:t>
-            </a:r>
-          </a:p>
-        </p:txBody>
-      </p:sp>
-      <p:sp>
-        <p:nvSpPr>
-          <p:cNvPr name="TextBox 15" id="15"/>
-          <p:cNvSpPr txBox="true"/>
-          <p:nvPr/>
-        </p:nvSpPr>
-        <p:spPr>
-          <a:xfrm rot="0">
-            <a:off x="285750" y="3790950"/>
-            <a:ext cx="2857500" cy="614045"/>
-          </a:xfrm>
-          <a:prstGeom prst="rect">
-            <a:avLst/>
-          </a:prstGeom>
-        </p:spPr>
-        <p:txBody>
-          <a:bodyPr anchor="t" rtlCol="false" tIns="0" lIns="0" bIns="0" rIns="0">
-            <a:spAutoFit/>
-          </a:bodyPr>
-          <a:lstStyle/>
-          <a:p>
-            <a:pPr algn="ctr">
-              <a:lnSpc>
-                <a:spcPts val="2440"/>
-              </a:lnSpc>
-            </a:pPr>
-            <a:r>
-              <a:rPr lang="en-US" sz="2000" b="true">
-                <a:solidFill>
-                  <a:srgbClr val="536073"/>
-                </a:solidFill>
-                <a:latin typeface="DM Sans Bold"/>
-                <a:ea typeface="DM Sans Bold"/>
-                <a:cs typeface="DM Sans Bold"/>
-                <a:sym typeface="DM Sans Bold"/>
-              </a:rPr>
-              <a:t>Check today’s</a:t>
-            </a:r>
-          </a:p>
-          <a:p>
-            <a:pPr algn="ctr">
-              <a:lnSpc>
-                <a:spcPts val="2440"/>
-              </a:lnSpc>
-            </a:pPr>
-            <a:r>
-              <a:rPr lang="en-US" b="true" sz="2000">
-                <a:solidFill>
-                  <a:srgbClr val="536073"/>
-                </a:solidFill>
-                <a:latin typeface="DM Sans Bold"/>
-                <a:ea typeface="DM Sans Bold"/>
-                <a:cs typeface="DM Sans Bold"/>
-                <a:sym typeface="DM Sans Bold"/>
-              </a:rPr>
-              <a:t>task</a:t>
-            </a:r>
-          </a:p>
-        </p:txBody>
-      </p:sp>
-      <p:sp>
-        <p:nvSpPr>
-          <p:cNvPr name="TextBox 16" id="16"/>
-          <p:cNvSpPr txBox="true"/>
-          <p:nvPr/>
-        </p:nvSpPr>
-        <p:spPr>
-          <a:xfrm rot="0">
-            <a:off x="3619500" y="5610225"/>
-            <a:ext cx="4191000" cy="614045"/>
-          </a:xfrm>
-          <a:prstGeom prst="rect">
-            <a:avLst/>
-          </a:prstGeom>
-        </p:spPr>
-        <p:txBody>
-          <a:bodyPr anchor="t" rtlCol="false" tIns="0" lIns="0" bIns="0" rIns="0">
-            <a:spAutoFit/>
-          </a:bodyPr>
-          <a:lstStyle/>
-          <a:p>
-            <a:pPr algn="ctr">
-              <a:lnSpc>
-                <a:spcPts val="2440"/>
-              </a:lnSpc>
-            </a:pPr>
-            <a:r>
-              <a:rPr lang="en-US" sz="2000" b="true">
-                <a:solidFill>
-                  <a:srgbClr val="536073"/>
-                </a:solidFill>
-                <a:latin typeface="DM Sans Bold"/>
-                <a:ea typeface="DM Sans Bold"/>
-                <a:cs typeface="DM Sans Bold"/>
-                <a:sym typeface="DM Sans Bold"/>
-              </a:rPr>
-              <a:t>Practice the missing skill</a:t>
-            </a:r>
-          </a:p>
-          <a:p>
-            <a:pPr algn="ctr">
-              <a:lnSpc>
-                <a:spcPts val="2440"/>
-              </a:lnSpc>
-            </a:pPr>
-            <a:r>
-              <a:rPr lang="en-US" b="true" sz="2000">
-                <a:solidFill>
-                  <a:srgbClr val="536073"/>
-                </a:solidFill>
-                <a:latin typeface="DM Sans Bold"/>
-                <a:ea typeface="DM Sans Bold"/>
-                <a:cs typeface="DM Sans Bold"/>
-                <a:sym typeface="DM Sans Bold"/>
-              </a:rPr>
-              <a:t>with Khan Academy</a:t>
-            </a:r>
-          </a:p>
-        </p:txBody>
-      </p:sp>
-      <p:sp>
-        <p:nvSpPr>
-          <p:cNvPr name="TextBox 17" id="17"/>
-          <p:cNvSpPr txBox="true"/>
-          <p:nvPr/>
-        </p:nvSpPr>
-        <p:spPr>
-          <a:xfrm rot="0">
-            <a:off x="8286750" y="3467100"/>
-            <a:ext cx="3238500" cy="614045"/>
-          </a:xfrm>
-          <a:prstGeom prst="rect">
-            <a:avLst/>
-          </a:prstGeom>
-        </p:spPr>
-        <p:txBody>
-          <a:bodyPr anchor="t" rtlCol="false" tIns="0" lIns="0" bIns="0" rIns="0">
-            <a:spAutoFit/>
-          </a:bodyPr>
-          <a:lstStyle/>
-          <a:p>
-            <a:pPr algn="ctr">
-              <a:lnSpc>
-                <a:spcPts val="2440"/>
-              </a:lnSpc>
-            </a:pPr>
-            <a:r>
-              <a:rPr lang="en-US" b="true" sz="2000">
-                <a:solidFill>
-                  <a:srgbClr val="087E70"/>
-                </a:solidFill>
-                <a:latin typeface="DM Sans Bold"/>
-                <a:ea typeface="DM Sans Bold"/>
-                <a:cs typeface="DM Sans Bold"/>
-                <a:sym typeface="DM Sans Bold"/>
-              </a:rPr>
-              <a:t>Return to today’s lesson</a:t>
-            </a:r>
-          </a:p>
-          <a:p>
-            <a:pPr algn="ctr">
-              <a:lnSpc>
-                <a:spcPts val="2440"/>
-              </a:lnSpc>
-            </a:pPr>
-            <a:r>
-              <a:rPr lang="en-US" b="true" sz="2000">
-                <a:solidFill>
-                  <a:srgbClr val="087E70"/>
-                </a:solidFill>
-                <a:latin typeface="DM Sans Bold"/>
-                <a:ea typeface="DM Sans Bold"/>
-                <a:cs typeface="DM Sans Bold"/>
-                <a:sym typeface="DM Sans Bold"/>
-              </a:rPr>
-              <a:t>with a fresh check</a:t>
-            </a:r>
-          </a:p>
-        </p:txBody>
-      </p:sp>
       <p:grpSp>
         <p:nvGrpSpPr>
-          <p:cNvPr name="Group 18" id="18"/>
+          <p:cNvPr name="Group 13" id="13"/>
           <p:cNvGrpSpPr/>
           <p:nvPr/>
         </p:nvGrpSpPr>
@@ -7317,7 +7037,7 @@
         </p:grpSpPr>
         <p:sp>
           <p:nvSpPr>
-            <p:cNvPr name="Freeform 19" id="19"/>
+            <p:cNvPr name="Freeform 14" id="14"/>
             <p:cNvSpPr/>
             <p:nvPr/>
           </p:nvSpPr>
@@ -7368,7 +7088,7 @@
         </p:sp>
         <p:sp>
           <p:nvSpPr>
-            <p:cNvPr name="TextBox 20" id="20"/>
+            <p:cNvPr name="TextBox 15" id="15"/>
             <p:cNvSpPr txBox="true"/>
             <p:nvPr/>
           </p:nvSpPr>
@@ -7394,99 +7114,462 @@
           </p:txBody>
         </p:sp>
       </p:grpSp>
-      <p:grpSp>
-        <p:nvGrpSpPr>
-          <p:cNvPr name="Group 21" id="21"/>
-          <p:cNvGrpSpPr/>
-          <p:nvPr/>
-        </p:nvGrpSpPr>
-        <p:grpSpPr>
-          <a:xfrm rot="0">
-            <a:off x="9772650" y="4152900"/>
-            <a:ext cx="266700" cy="266700"/>
-            <a:chOff x="0" y="0"/>
-            <a:chExt cx="105363" cy="105363"/>
-          </a:xfrm>
-        </p:grpSpPr>
-        <p:sp>
-          <p:nvSpPr>
-            <p:cNvPr name="Freeform 22" id="22"/>
-            <p:cNvSpPr/>
-            <p:nvPr/>
-          </p:nvSpPr>
-          <p:spPr>
-            <a:xfrm flipH="false" flipV="false" rot="0">
-              <a:off x="0" y="0"/>
-              <a:ext cx="105363" cy="105363"/>
-            </a:xfrm>
-            <a:custGeom>
-              <a:avLst/>
-              <a:gdLst/>
-              <a:ahLst/>
-              <a:cxnLst/>
-              <a:rect r="r" b="b" t="t" l="l"/>
-              <a:pathLst>
-                <a:path h="105363" w="105363">
-                  <a:moveTo>
-                    <a:pt x="52681" y="0"/>
-                  </a:moveTo>
-                  <a:cubicBezTo>
-                    <a:pt x="23586" y="0"/>
-                    <a:pt x="0" y="23586"/>
-                    <a:pt x="0" y="52681"/>
-                  </a:cubicBezTo>
-                  <a:cubicBezTo>
-                    <a:pt x="0" y="81777"/>
-                    <a:pt x="23586" y="105363"/>
-                    <a:pt x="52681" y="105363"/>
-                  </a:cubicBezTo>
-                  <a:cubicBezTo>
-                    <a:pt x="81777" y="105363"/>
-                    <a:pt x="105363" y="81777"/>
-                    <a:pt x="105363" y="52681"/>
-                  </a:cubicBezTo>
-                  <a:cubicBezTo>
-                    <a:pt x="105363" y="23586"/>
-                    <a:pt x="81777" y="0"/>
-                    <a:pt x="52681" y="0"/>
-                  </a:cubicBezTo>
-                  <a:close/>
-                </a:path>
-              </a:pathLst>
-            </a:custGeom>
-            <a:solidFill>
-              <a:srgbClr val="087E70"/>
-            </a:solidFill>
-          </p:spPr>
-        </p:sp>
-        <p:sp>
-          <p:nvSpPr>
-            <p:cNvPr name="TextBox 23" id="23"/>
-            <p:cNvSpPr txBox="true"/>
-            <p:nvPr/>
-          </p:nvSpPr>
-          <p:spPr>
-            <a:xfrm>
-              <a:off x="9878" y="9878"/>
-              <a:ext cx="85607" cy="85607"/>
-            </a:xfrm>
-            <a:prstGeom prst="rect">
-              <a:avLst/>
-            </a:prstGeom>
-          </p:spPr>
-          <p:txBody>
-            <a:bodyPr anchor="ctr" rtlCol="false" tIns="50800" lIns="50800" bIns="50800" rIns="50800"/>
-            <a:lstStyle/>
-            <a:p>
-              <a:pPr algn="ctr">
-                <a:lnSpc>
-                  <a:spcPts val="1372"/>
-                </a:lnSpc>
-              </a:pPr>
-            </a:p>
-          </p:txBody>
-        </p:sp>
-      </p:grpSp>
+      <p:sp>
+        <p:nvSpPr>
+          <p:cNvPr name="Freeform 16" id="16"/>
+          <p:cNvSpPr/>
+          <p:nvPr/>
+        </p:nvSpPr>
+        <p:spPr>
+          <a:xfrm flipH="false" flipV="false" rot="0">
+            <a:off x="9734550" y="3829050"/>
+            <a:ext cx="342900" cy="457755"/>
+          </a:xfrm>
+          <a:custGeom>
+            <a:avLst/>
+            <a:gdLst/>
+            <a:ahLst/>
+            <a:cxnLst/>
+            <a:rect r="r" b="b" t="t" l="l"/>
+            <a:pathLst>
+              <a:path h="457755" w="342900">
+                <a:moveTo>
+                  <a:pt x="0" y="0"/>
+                </a:moveTo>
+                <a:lnTo>
+                  <a:pt x="342900" y="0"/>
+                </a:lnTo>
+                <a:lnTo>
+                  <a:pt x="342900" y="457755"/>
+                </a:lnTo>
+                <a:lnTo>
+                  <a:pt x="0" y="457755"/>
+                </a:lnTo>
+                <a:lnTo>
+                  <a:pt x="0" y="0"/>
+                </a:lnTo>
+                <a:close/>
+              </a:path>
+            </a:pathLst>
+          </a:custGeom>
+          <a:blipFill>
+            <a:blip r:embed="rId11">
+              <a:extLst>
+                <a:ext uri="{96DAC541-7B7A-43D3-8B79-37D633B846F1}">
+                  <asvg:svgBlip xmlns:asvg="http://schemas.microsoft.com/office/drawing/2016/SVG/main" r:embed="rId12"/>
+                </a:ext>
+              </a:extLst>
+            </a:blip>
+            <a:stretch>
+              <a:fillRect l="0" t="0" r="0" b="0"/>
+            </a:stretch>
+          </a:blipFill>
+        </p:spPr>
+      </p:sp>
+      <p:sp>
+        <p:nvSpPr>
+          <p:cNvPr name="TextBox 17" id="17"/>
+          <p:cNvSpPr txBox="true"/>
+          <p:nvPr/>
+        </p:nvSpPr>
+        <p:spPr>
+          <a:xfrm rot="0">
+            <a:off x="11239500" y="6353175"/>
+            <a:ext cx="428625" cy="168592"/>
+          </a:xfrm>
+          <a:prstGeom prst="rect">
+            <a:avLst/>
+          </a:prstGeom>
+        </p:spPr>
+        <p:txBody>
+          <a:bodyPr anchor="t" rtlCol="false" tIns="0" lIns="0" bIns="0" rIns="0">
+            <a:spAutoFit/>
+          </a:bodyPr>
+          <a:lstStyle/>
+          <a:p>
+            <a:pPr algn="l">
+              <a:lnSpc>
+                <a:spcPts val="1372"/>
+              </a:lnSpc>
+            </a:pPr>
+            <a:r>
+              <a:rPr lang="en-US" sz="1125">
+                <a:solidFill>
+                  <a:srgbClr val="536073"/>
+                </a:solidFill>
+                <a:latin typeface="DM Sans"/>
+                <a:ea typeface="DM Sans"/>
+                <a:cs typeface="DM Sans"/>
+                <a:sym typeface="DM Sans"/>
+              </a:rPr>
+              <a:t>01</a:t>
+            </a:r>
+          </a:p>
+        </p:txBody>
+      </p:sp>
+      <p:sp>
+        <p:nvSpPr>
+          <p:cNvPr name="TextBox 18" id="18"/>
+          <p:cNvSpPr txBox="true"/>
+          <p:nvPr/>
+        </p:nvSpPr>
+        <p:spPr>
+          <a:xfrm rot="0">
+            <a:off x="609600" y="1057275"/>
+            <a:ext cx="10972800" cy="674624"/>
+          </a:xfrm>
+          <a:prstGeom prst="rect">
+            <a:avLst/>
+          </a:prstGeom>
+        </p:spPr>
+        <p:txBody>
+          <a:bodyPr anchor="t" rtlCol="false" tIns="0" lIns="0" bIns="0" rIns="0">
+            <a:spAutoFit/>
+          </a:bodyPr>
+          <a:lstStyle/>
+          <a:p>
+            <a:pPr algn="l">
+              <a:lnSpc>
+                <a:spcPts val="5368"/>
+              </a:lnSpc>
+            </a:pPr>
+            <a:r>
+              <a:rPr lang="en-US" b="true" sz="4400">
+                <a:solidFill>
+                  <a:srgbClr val="151521"/>
+                </a:solidFill>
+                <a:latin typeface="DM Sans Bold"/>
+                <a:ea typeface="DM Sans Bold"/>
+                <a:cs typeface="DM Sans Bold"/>
+                <a:sym typeface="DM Sans Bold"/>
+              </a:rPr>
+              <a:t>Find the missing skill.</a:t>
+            </a:r>
+          </a:p>
+        </p:txBody>
+      </p:sp>
+      <p:sp>
+        <p:nvSpPr>
+          <p:cNvPr name="TextBox 19" id="19"/>
+          <p:cNvSpPr txBox="true"/>
+          <p:nvPr/>
+        </p:nvSpPr>
+        <p:spPr>
+          <a:xfrm rot="0">
+            <a:off x="609600" y="1743075"/>
+            <a:ext cx="10972800" cy="674624"/>
+          </a:xfrm>
+          <a:prstGeom prst="rect">
+            <a:avLst/>
+          </a:prstGeom>
+        </p:spPr>
+        <p:txBody>
+          <a:bodyPr anchor="t" rtlCol="false" tIns="0" lIns="0" bIns="0" rIns="0">
+            <a:spAutoFit/>
+          </a:bodyPr>
+          <a:lstStyle/>
+          <a:p>
+            <a:pPr algn="l">
+              <a:lnSpc>
+                <a:spcPts val="5368"/>
+              </a:lnSpc>
+            </a:pPr>
+            <a:r>
+              <a:rPr lang="en-US" b="true" sz="4400">
+                <a:solidFill>
+                  <a:srgbClr val="5753FA"/>
+                </a:solidFill>
+                <a:latin typeface="DM Sans Bold"/>
+                <a:ea typeface="DM Sans Bold"/>
+                <a:cs typeface="DM Sans Bold"/>
+                <a:sym typeface="DM Sans Bold"/>
+              </a:rPr>
+              <a:t>Get back to today’s lesson.</a:t>
+            </a:r>
+          </a:p>
+        </p:txBody>
+      </p:sp>
+      <p:sp>
+        <p:nvSpPr>
+          <p:cNvPr name="TextBox 20" id="20"/>
+          <p:cNvSpPr txBox="true"/>
+          <p:nvPr/>
+        </p:nvSpPr>
+        <p:spPr>
+          <a:xfrm rot="0">
+            <a:off x="609600" y="2733675"/>
+            <a:ext cx="10972800" cy="651891"/>
+          </a:xfrm>
+          <a:prstGeom prst="rect">
+            <a:avLst/>
+          </a:prstGeom>
+        </p:spPr>
+        <p:txBody>
+          <a:bodyPr anchor="t" rtlCol="false" tIns="0" lIns="0" bIns="0" rIns="0">
+            <a:spAutoFit/>
+          </a:bodyPr>
+          <a:lstStyle/>
+          <a:p>
+            <a:pPr algn="l">
+              <a:lnSpc>
+                <a:spcPts val="2562"/>
+              </a:lnSpc>
+            </a:pPr>
+            <a:r>
+              <a:rPr lang="en-US" sz="2100">
+                <a:solidFill>
+                  <a:srgbClr val="536073"/>
+                </a:solidFill>
+                <a:latin typeface="DM Sans"/>
+                <a:ea typeface="DM Sans"/>
+                <a:cs typeface="DM Sans"/>
+                <a:sym typeface="DM Sans"/>
+              </a:rPr>
+              <a:t>THE PROBLEM</a:t>
+            </a:r>
+          </a:p>
+          <a:p>
+            <a:pPr algn="l">
+              <a:lnSpc>
+                <a:spcPts val="2562"/>
+              </a:lnSpc>
+            </a:pPr>
+            <a:r>
+              <a:rPr lang="en-US" sz="2100">
+                <a:solidFill>
+                  <a:srgbClr val="536073"/>
+                </a:solidFill>
+                <a:latin typeface="DM Sans"/>
+                <a:ea typeface="DM Sans"/>
+                <a:cs typeface="DM Sans"/>
+                <a:sym typeface="DM Sans"/>
+              </a:rPr>
+              <a:t>A student gets stuck, but doesn’t know which earlier skill to review.</a:t>
+            </a:r>
+          </a:p>
+        </p:txBody>
+      </p:sp>
+      <p:sp>
+        <p:nvSpPr>
+          <p:cNvPr name="TextBox 21" id="21"/>
+          <p:cNvSpPr txBox="true"/>
+          <p:nvPr/>
+        </p:nvSpPr>
+        <p:spPr>
+          <a:xfrm rot="0">
+            <a:off x="609600" y="6448425"/>
+            <a:ext cx="9525000" cy="215519"/>
+          </a:xfrm>
+          <a:prstGeom prst="rect">
+            <a:avLst/>
+          </a:prstGeom>
+        </p:spPr>
+        <p:txBody>
+          <a:bodyPr anchor="t" rtlCol="false" tIns="0" lIns="0" bIns="0" rIns="0">
+            <a:spAutoFit/>
+          </a:bodyPr>
+          <a:lstStyle/>
+          <a:p>
+            <a:pPr algn="l">
+              <a:lnSpc>
+                <a:spcPts val="1708"/>
+              </a:lnSpc>
+            </a:pPr>
+            <a:r>
+              <a:rPr lang="en-US" sz="1400">
+                <a:solidFill>
+                  <a:srgbClr val="536073"/>
+                </a:solidFill>
+                <a:latin typeface="DM Sans"/>
+                <a:ea typeface="DM Sans"/>
+                <a:cs typeface="DM Sans"/>
+                <a:sym typeface="DM Sans"/>
+              </a:rPr>
+              <a:t>University of the Philippines Manila</a:t>
+            </a:r>
+          </a:p>
+        </p:txBody>
+      </p:sp>
+      <p:sp>
+        <p:nvSpPr>
+          <p:cNvPr name="TextBox 22" id="22"/>
+          <p:cNvSpPr txBox="true"/>
+          <p:nvPr/>
+        </p:nvSpPr>
+        <p:spPr>
+          <a:xfrm rot="0">
+            <a:off x="285750" y="3790950"/>
+            <a:ext cx="2857500" cy="614045"/>
+          </a:xfrm>
+          <a:prstGeom prst="rect">
+            <a:avLst/>
+          </a:prstGeom>
+        </p:spPr>
+        <p:txBody>
+          <a:bodyPr anchor="t" rtlCol="false" tIns="0" lIns="0" bIns="0" rIns="0">
+            <a:spAutoFit/>
+          </a:bodyPr>
+          <a:lstStyle/>
+          <a:p>
+            <a:pPr algn="ctr">
+              <a:lnSpc>
+                <a:spcPts val="2440"/>
+              </a:lnSpc>
+            </a:pPr>
+            <a:r>
+              <a:rPr lang="en-US" sz="2000" b="true">
+                <a:solidFill>
+                  <a:srgbClr val="536073"/>
+                </a:solidFill>
+                <a:latin typeface="DM Sans Bold"/>
+                <a:ea typeface="DM Sans Bold"/>
+                <a:cs typeface="DM Sans Bold"/>
+                <a:sym typeface="DM Sans Bold"/>
+              </a:rPr>
+              <a:t>Check today’s</a:t>
+            </a:r>
+          </a:p>
+          <a:p>
+            <a:pPr algn="ctr">
+              <a:lnSpc>
+                <a:spcPts val="2440"/>
+              </a:lnSpc>
+            </a:pPr>
+            <a:r>
+              <a:rPr lang="en-US" b="true" sz="2000">
+                <a:solidFill>
+                  <a:srgbClr val="536073"/>
+                </a:solidFill>
+                <a:latin typeface="DM Sans Bold"/>
+                <a:ea typeface="DM Sans Bold"/>
+                <a:cs typeface="DM Sans Bold"/>
+                <a:sym typeface="DM Sans Bold"/>
+              </a:rPr>
+              <a:t>task</a:t>
+            </a:r>
+          </a:p>
+        </p:txBody>
+      </p:sp>
+      <p:sp>
+        <p:nvSpPr>
+          <p:cNvPr name="TextBox 23" id="23"/>
+          <p:cNvSpPr txBox="true"/>
+          <p:nvPr/>
+        </p:nvSpPr>
+        <p:spPr>
+          <a:xfrm rot="0">
+            <a:off x="3619500" y="5610225"/>
+            <a:ext cx="4191000" cy="614045"/>
+          </a:xfrm>
+          <a:prstGeom prst="rect">
+            <a:avLst/>
+          </a:prstGeom>
+        </p:spPr>
+        <p:txBody>
+          <a:bodyPr anchor="t" rtlCol="false" tIns="0" lIns="0" bIns="0" rIns="0">
+            <a:spAutoFit/>
+          </a:bodyPr>
+          <a:lstStyle/>
+          <a:p>
+            <a:pPr algn="ctr">
+              <a:lnSpc>
+                <a:spcPts val="2440"/>
+              </a:lnSpc>
+            </a:pPr>
+            <a:r>
+              <a:rPr lang="en-US" sz="2000" b="true">
+                <a:solidFill>
+                  <a:srgbClr val="536073"/>
+                </a:solidFill>
+                <a:latin typeface="DM Sans Bold"/>
+                <a:ea typeface="DM Sans Bold"/>
+                <a:cs typeface="DM Sans Bold"/>
+                <a:sym typeface="DM Sans Bold"/>
+              </a:rPr>
+              <a:t>Practice the missing skill</a:t>
+            </a:r>
+          </a:p>
+          <a:p>
+            <a:pPr algn="ctr">
+              <a:lnSpc>
+                <a:spcPts val="2440"/>
+              </a:lnSpc>
+            </a:pPr>
+            <a:r>
+              <a:rPr lang="en-US" b="true" sz="2000">
+                <a:solidFill>
+                  <a:srgbClr val="536073"/>
+                </a:solidFill>
+                <a:latin typeface="DM Sans Bold"/>
+                <a:ea typeface="DM Sans Bold"/>
+                <a:cs typeface="DM Sans Bold"/>
+                <a:sym typeface="DM Sans Bold"/>
+              </a:rPr>
+              <a:t>with Khan Academy</a:t>
+            </a:r>
+          </a:p>
+        </p:txBody>
+      </p:sp>
+      <p:sp>
+        <p:nvSpPr>
+          <p:cNvPr name="TextBox 24" id="24"/>
+          <p:cNvSpPr txBox="true"/>
+          <p:nvPr/>
+        </p:nvSpPr>
+        <p:spPr>
+          <a:xfrm rot="0">
+            <a:off x="8286750" y="4629150"/>
+            <a:ext cx="3238500" cy="614045"/>
+          </a:xfrm>
+          <a:prstGeom prst="rect">
+            <a:avLst/>
+          </a:prstGeom>
+        </p:spPr>
+        <p:txBody>
+          <a:bodyPr anchor="t" rtlCol="false" tIns="0" lIns="0" bIns="0" rIns="0">
+            <a:spAutoFit/>
+          </a:bodyPr>
+          <a:lstStyle/>
+          <a:p>
+            <a:pPr algn="ctr">
+              <a:lnSpc>
+                <a:spcPts val="2440"/>
+              </a:lnSpc>
+            </a:pPr>
+            <a:r>
+              <a:rPr lang="en-US" b="true" sz="2000">
+                <a:solidFill>
+                  <a:srgbClr val="087E70"/>
+                </a:solidFill>
+                <a:latin typeface="DM Sans Bold"/>
+                <a:ea typeface="DM Sans Bold"/>
+                <a:cs typeface="DM Sans Bold"/>
+                <a:sym typeface="DM Sans Bold"/>
+              </a:rPr>
+              <a:t>Return to today’s lesson</a:t>
+            </a:r>
+          </a:p>
+          <a:p>
+            <a:pPr algn="ctr">
+              <a:lnSpc>
+                <a:spcPts val="2440"/>
+              </a:lnSpc>
+            </a:pPr>
+            <a:r>
+              <a:rPr lang="en-US" b="true" sz="2000">
+                <a:solidFill>
+                  <a:srgbClr val="087E70"/>
+                </a:solidFill>
+                <a:latin typeface="DM Sans Bold"/>
+                <a:ea typeface="DM Sans Bold"/>
+                <a:cs typeface="DM Sans Bold"/>
+                <a:sym typeface="DM Sans Bold"/>
+              </a:rPr>
+              <a:t>with a fresh check</a:t>
+            </a:r>
+          </a:p>
+        </p:txBody>
+      </p:sp>
     </p:spTree>
   </p:cSld>
   <p:clrMapOvr>
@@ -7592,9 +7675,174 @@
           </p:spPr>
         </p:sp>
       </p:grpSp>
-      <p:sp>
-        <p:nvSpPr>
-          <p:cNvPr name="TextBox 5" id="5"/>
+      <p:grpSp>
+        <p:nvGrpSpPr>
+          <p:cNvPr name="Group 5" id="5"/>
+          <p:cNvGrpSpPr/>
+          <p:nvPr/>
+        </p:nvGrpSpPr>
+        <p:grpSpPr>
+          <a:xfrm rot="0">
+            <a:off x="0" y="0"/>
+            <a:ext cx="12192000" cy="6858000"/>
+            <a:chOff x="0" y="0"/>
+            <a:chExt cx="16256000" cy="9144000"/>
+          </a:xfrm>
+        </p:grpSpPr>
+        <p:sp>
+          <p:nvSpPr>
+            <p:cNvPr name="Freeform 6" id="6"/>
+            <p:cNvSpPr/>
+            <p:nvPr/>
+          </p:nvSpPr>
+          <p:spPr>
+            <a:xfrm flipH="false" flipV="false" rot="0">
+              <a:off x="0" y="0"/>
+              <a:ext cx="16256000" cy="9144000"/>
+            </a:xfrm>
+            <a:custGeom>
+              <a:avLst/>
+              <a:gdLst/>
+              <a:ahLst/>
+              <a:cxnLst/>
+              <a:rect r="r" b="b" t="t" l="l"/>
+              <a:pathLst>
+                <a:path h="9144000" w="16256000">
+                  <a:moveTo>
+                    <a:pt x="0" y="0"/>
+                  </a:moveTo>
+                  <a:lnTo>
+                    <a:pt x="16256000" y="0"/>
+                  </a:lnTo>
+                  <a:lnTo>
+                    <a:pt x="16256000" y="9144000"/>
+                  </a:lnTo>
+                  <a:lnTo>
+                    <a:pt x="0" y="9144000"/>
+                  </a:lnTo>
+                  <a:lnTo>
+                    <a:pt x="0" y="0"/>
+                  </a:lnTo>
+                  <a:close/>
+                </a:path>
+              </a:pathLst>
+            </a:custGeom>
+            <a:blipFill>
+              <a:blip r:embed="rId4">
+                <a:extLst>
+                  <a:ext uri="{96DAC541-7B7A-43D3-8B79-37D633B846F1}">
+                    <asvg:svgBlip xmlns:asvg="http://schemas.microsoft.com/office/drawing/2016/SVG/main" r:embed="rId5"/>
+                  </a:ext>
+                </a:extLst>
+              </a:blip>
+              <a:stretch>
+                <a:fillRect l="0" t="0" r="0" b="0"/>
+              </a:stretch>
+            </a:blipFill>
+          </p:spPr>
+        </p:sp>
+        <p:sp>
+          <p:nvSpPr>
+            <p:cNvPr name="Freeform 7" id="7"/>
+            <p:cNvSpPr/>
+            <p:nvPr/>
+          </p:nvSpPr>
+          <p:spPr>
+            <a:xfrm flipH="false" flipV="false" rot="0">
+              <a:off x="11887200" y="0"/>
+              <a:ext cx="3556000" cy="803656"/>
+            </a:xfrm>
+            <a:custGeom>
+              <a:avLst/>
+              <a:gdLst/>
+              <a:ahLst/>
+              <a:cxnLst/>
+              <a:rect r="r" b="b" t="t" l="l"/>
+              <a:pathLst>
+                <a:path h="803656" w="3556000">
+                  <a:moveTo>
+                    <a:pt x="0" y="0"/>
+                  </a:moveTo>
+                  <a:lnTo>
+                    <a:pt x="3556000" y="0"/>
+                  </a:lnTo>
+                  <a:lnTo>
+                    <a:pt x="3556000" y="803656"/>
+                  </a:lnTo>
+                  <a:lnTo>
+                    <a:pt x="0" y="803656"/>
+                  </a:lnTo>
+                  <a:lnTo>
+                    <a:pt x="0" y="0"/>
+                  </a:lnTo>
+                  <a:close/>
+                </a:path>
+              </a:pathLst>
+            </a:custGeom>
+            <a:blipFill>
+              <a:blip r:embed="rId6"/>
+              <a:stretch>
+                <a:fillRect l="0" t="0" r="0" b="0"/>
+              </a:stretch>
+            </a:blipFill>
+          </p:spPr>
+        </p:sp>
+        <p:sp>
+          <p:nvSpPr>
+            <p:cNvPr name="Freeform 8" id="8"/>
+            <p:cNvSpPr/>
+            <p:nvPr/>
+          </p:nvSpPr>
+          <p:spPr>
+            <a:xfrm flipH="false" flipV="false" rot="0">
+              <a:off x="812800" y="127000"/>
+              <a:ext cx="2413000" cy="504536"/>
+            </a:xfrm>
+            <a:custGeom>
+              <a:avLst/>
+              <a:gdLst/>
+              <a:ahLst/>
+              <a:cxnLst/>
+              <a:rect r="r" b="b" t="t" l="l"/>
+              <a:pathLst>
+                <a:path h="504536" w="2413000">
+                  <a:moveTo>
+                    <a:pt x="0" y="0"/>
+                  </a:moveTo>
+                  <a:lnTo>
+                    <a:pt x="2413000" y="0"/>
+                  </a:lnTo>
+                  <a:lnTo>
+                    <a:pt x="2413000" y="504536"/>
+                  </a:lnTo>
+                  <a:lnTo>
+                    <a:pt x="0" y="504536"/>
+                  </a:lnTo>
+                  <a:lnTo>
+                    <a:pt x="0" y="0"/>
+                  </a:lnTo>
+                  <a:close/>
+                </a:path>
+              </a:pathLst>
+            </a:custGeom>
+            <a:blipFill>
+              <a:blip r:embed="rId7">
+                <a:extLst>
+                  <a:ext uri="{96DAC541-7B7A-43D3-8B79-37D633B846F1}">
+                    <asvg:svgBlip xmlns:asvg="http://schemas.microsoft.com/office/drawing/2016/SVG/main" r:embed="rId8"/>
+                  </a:ext>
+                </a:extLst>
+              </a:blip>
+              <a:stretch>
+                <a:fillRect l="0" t="0" r="0" b="0"/>
+              </a:stretch>
+            </a:blipFill>
+          </p:spPr>
+        </p:sp>
+      </p:grpSp>
+      <p:sp>
+        <p:nvSpPr>
+          <p:cNvPr name="TextBox 9" id="9"/>
           <p:cNvSpPr txBox="true"/>
           <p:nvPr/>
         </p:nvSpPr>
@@ -7635,7 +7883,7 @@
       </p:sp>
       <p:sp>
         <p:nvSpPr>
-          <p:cNvPr name="TextBox 6" id="6"/>
+          <p:cNvPr name="TextBox 10" id="10"/>
           <p:cNvSpPr txBox="true"/>
           <p:nvPr/>
         </p:nvSpPr>
@@ -7676,7 +7924,7 @@
       </p:sp>
       <p:sp>
         <p:nvSpPr>
-          <p:cNvPr name="AutoShape 7" id="7"/>
+          <p:cNvPr name="AutoShape 11" id="11"/>
           <p:cNvSpPr/>
           <p:nvPr/>
         </p:nvSpPr>
@@ -7695,7 +7943,7 @@
       </p:sp>
       <p:sp>
         <p:nvSpPr>
-          <p:cNvPr name="AutoShape 8" id="8"/>
+          <p:cNvPr name="AutoShape 12" id="12"/>
           <p:cNvSpPr/>
           <p:nvPr/>
         </p:nvSpPr>
@@ -7714,7 +7962,7 @@
       </p:sp>
       <p:sp>
         <p:nvSpPr>
-          <p:cNvPr name="TextBox 9" id="9"/>
+          <p:cNvPr name="TextBox 13" id="13"/>
           <p:cNvSpPr txBox="true"/>
           <p:nvPr/>
         </p:nvSpPr>
@@ -7755,7 +8003,7 @@
       </p:sp>
       <p:sp>
         <p:nvSpPr>
-          <p:cNvPr name="TextBox 10" id="10"/>
+          <p:cNvPr name="TextBox 14" id="14"/>
           <p:cNvSpPr txBox="true"/>
           <p:nvPr/>
         </p:nvSpPr>
@@ -7796,7 +8044,7 @@
       </p:sp>
       <p:sp>
         <p:nvSpPr>
-          <p:cNvPr name="TextBox 11" id="11"/>
+          <p:cNvPr name="TextBox 15" id="15"/>
           <p:cNvSpPr txBox="true"/>
           <p:nvPr/>
         </p:nvSpPr>
@@ -7837,7 +8085,7 @@
       </p:sp>
       <p:sp>
         <p:nvSpPr>
-          <p:cNvPr name="TextBox 12" id="12"/>
+          <p:cNvPr name="TextBox 16" id="16"/>
           <p:cNvSpPr txBox="true"/>
           <p:nvPr/>
         </p:nvSpPr>
@@ -7878,7 +8126,7 @@
       </p:sp>
       <p:grpSp>
         <p:nvGrpSpPr>
-          <p:cNvPr name="Group 13" id="13"/>
+          <p:cNvPr name="Group 17" id="17"/>
           <p:cNvGrpSpPr/>
           <p:nvPr/>
         </p:nvGrpSpPr>
@@ -7892,7 +8140,7 @@
         </p:grpSpPr>
         <p:sp>
           <p:nvSpPr>
-            <p:cNvPr name="Freeform 14" id="14"/>
+            <p:cNvPr name="Freeform 18" id="18"/>
             <p:cNvSpPr/>
             <p:nvPr/>
           </p:nvSpPr>
@@ -7924,150 +8172,6 @@
                     <a:pt x="838200" y="39370"/>
                     <a:pt x="826770" y="50800"/>
                     <a:pt x="812800" y="50800"/>
-                  </a:cubicBezTo>
-                  <a:lnTo>
-                    <a:pt x="25400" y="50800"/>
-                  </a:lnTo>
-                  <a:cubicBezTo>
-                    <a:pt x="11430" y="50800"/>
-                    <a:pt x="0" y="39370"/>
-                    <a:pt x="0" y="25400"/>
-                  </a:cubicBezTo>
-                  <a:cubicBezTo>
-                    <a:pt x="0" y="11430"/>
-                    <a:pt x="11430" y="0"/>
-                    <a:pt x="25400" y="0"/>
-                  </a:cubicBezTo>
-                  <a:close/>
-                </a:path>
-              </a:pathLst>
-            </a:custGeom>
-            <a:solidFill>
-              <a:srgbClr val="087E70"/>
-            </a:solidFill>
-          </p:spPr>
-        </p:sp>
-      </p:grpSp>
-      <p:grpSp>
-        <p:nvGrpSpPr>
-          <p:cNvPr name="Group 15" id="15"/>
-          <p:cNvGrpSpPr/>
-          <p:nvPr/>
-        </p:nvGrpSpPr>
-        <p:grpSpPr>
-          <a:xfrm rot="0">
-            <a:off x="3190875" y="4505325"/>
-            <a:ext cx="2914650" cy="38100"/>
-            <a:chOff x="0" y="0"/>
-            <a:chExt cx="3886200" cy="50800"/>
-          </a:xfrm>
-        </p:grpSpPr>
-        <p:sp>
-          <p:nvSpPr>
-            <p:cNvPr name="Freeform 16" id="16"/>
-            <p:cNvSpPr/>
-            <p:nvPr/>
-          </p:nvSpPr>
-          <p:spPr>
-            <a:xfrm flipH="false" flipV="false" rot="0">
-              <a:off x="0" y="0"/>
-              <a:ext cx="3886200" cy="50800"/>
-            </a:xfrm>
-            <a:custGeom>
-              <a:avLst/>
-              <a:gdLst/>
-              <a:ahLst/>
-              <a:cxnLst/>
-              <a:rect r="r" b="b" t="t" l="l"/>
-              <a:pathLst>
-                <a:path h="50800" w="3886200">
-                  <a:moveTo>
-                    <a:pt x="25400" y="0"/>
-                  </a:moveTo>
-                  <a:lnTo>
-                    <a:pt x="3860800" y="0"/>
-                  </a:lnTo>
-                  <a:cubicBezTo>
-                    <a:pt x="3874770" y="0"/>
-                    <a:pt x="3886200" y="11430"/>
-                    <a:pt x="3886200" y="25400"/>
-                  </a:cubicBezTo>
-                  <a:cubicBezTo>
-                    <a:pt x="3886200" y="39370"/>
-                    <a:pt x="3874770" y="50800"/>
-                    <a:pt x="3860800" y="50800"/>
-                  </a:cubicBezTo>
-                  <a:lnTo>
-                    <a:pt x="25400" y="50800"/>
-                  </a:lnTo>
-                  <a:cubicBezTo>
-                    <a:pt x="11430" y="50800"/>
-                    <a:pt x="0" y="39370"/>
-                    <a:pt x="0" y="25400"/>
-                  </a:cubicBezTo>
-                  <a:cubicBezTo>
-                    <a:pt x="0" y="11430"/>
-                    <a:pt x="11430" y="0"/>
-                    <a:pt x="25400" y="0"/>
-                  </a:cubicBezTo>
-                  <a:close/>
-                </a:path>
-              </a:pathLst>
-            </a:custGeom>
-            <a:solidFill>
-              <a:srgbClr val="087E70"/>
-            </a:solidFill>
-          </p:spPr>
-        </p:sp>
-      </p:grpSp>
-      <p:grpSp>
-        <p:nvGrpSpPr>
-          <p:cNvPr name="Group 17" id="17"/>
-          <p:cNvGrpSpPr/>
-          <p:nvPr/>
-        </p:nvGrpSpPr>
-        <p:grpSpPr>
-          <a:xfrm rot="5400000">
-            <a:off x="5872162" y="4729162"/>
-            <a:ext cx="447675" cy="38100"/>
-            <a:chOff x="0" y="0"/>
-            <a:chExt cx="596900" cy="50800"/>
-          </a:xfrm>
-        </p:grpSpPr>
-        <p:sp>
-          <p:nvSpPr>
-            <p:cNvPr name="Freeform 18" id="18"/>
-            <p:cNvSpPr/>
-            <p:nvPr/>
-          </p:nvSpPr>
-          <p:spPr>
-            <a:xfrm flipH="false" flipV="false" rot="0">
-              <a:off x="0" y="0"/>
-              <a:ext cx="596900" cy="50800"/>
-            </a:xfrm>
-            <a:custGeom>
-              <a:avLst/>
-              <a:gdLst/>
-              <a:ahLst/>
-              <a:cxnLst/>
-              <a:rect r="r" b="b" t="t" l="l"/>
-              <a:pathLst>
-                <a:path h="50800" w="596900">
-                  <a:moveTo>
-                    <a:pt x="25400" y="0"/>
-                  </a:moveTo>
-                  <a:lnTo>
-                    <a:pt x="571500" y="0"/>
-                  </a:lnTo>
-                  <a:cubicBezTo>
-                    <a:pt x="585470" y="0"/>
-                    <a:pt x="596900" y="11430"/>
-                    <a:pt x="596900" y="25400"/>
-                  </a:cubicBezTo>
-                  <a:cubicBezTo>
-                    <a:pt x="596900" y="39370"/>
-                    <a:pt x="585470" y="50800"/>
-                    <a:pt x="571500" y="50800"/>
                   </a:cubicBezTo>
                   <a:lnTo>
                     <a:pt x="25400" y="50800"/>
@@ -8099,6 +8203,150 @@
           <p:nvPr/>
         </p:nvGrpSpPr>
         <p:grpSpPr>
+          <a:xfrm rot="0">
+            <a:off x="3190875" y="4505325"/>
+            <a:ext cx="2914650" cy="38100"/>
+            <a:chOff x="0" y="0"/>
+            <a:chExt cx="3886200" cy="50800"/>
+          </a:xfrm>
+        </p:grpSpPr>
+        <p:sp>
+          <p:nvSpPr>
+            <p:cNvPr name="Freeform 20" id="20"/>
+            <p:cNvSpPr/>
+            <p:nvPr/>
+          </p:nvSpPr>
+          <p:spPr>
+            <a:xfrm flipH="false" flipV="false" rot="0">
+              <a:off x="0" y="0"/>
+              <a:ext cx="3886200" cy="50800"/>
+            </a:xfrm>
+            <a:custGeom>
+              <a:avLst/>
+              <a:gdLst/>
+              <a:ahLst/>
+              <a:cxnLst/>
+              <a:rect r="r" b="b" t="t" l="l"/>
+              <a:pathLst>
+                <a:path h="50800" w="3886200">
+                  <a:moveTo>
+                    <a:pt x="25400" y="0"/>
+                  </a:moveTo>
+                  <a:lnTo>
+                    <a:pt x="3860800" y="0"/>
+                  </a:lnTo>
+                  <a:cubicBezTo>
+                    <a:pt x="3874770" y="0"/>
+                    <a:pt x="3886200" y="11430"/>
+                    <a:pt x="3886200" y="25400"/>
+                  </a:cubicBezTo>
+                  <a:cubicBezTo>
+                    <a:pt x="3886200" y="39370"/>
+                    <a:pt x="3874770" y="50800"/>
+                    <a:pt x="3860800" y="50800"/>
+                  </a:cubicBezTo>
+                  <a:lnTo>
+                    <a:pt x="25400" y="50800"/>
+                  </a:lnTo>
+                  <a:cubicBezTo>
+                    <a:pt x="11430" y="50800"/>
+                    <a:pt x="0" y="39370"/>
+                    <a:pt x="0" y="25400"/>
+                  </a:cubicBezTo>
+                  <a:cubicBezTo>
+                    <a:pt x="0" y="11430"/>
+                    <a:pt x="11430" y="0"/>
+                    <a:pt x="25400" y="0"/>
+                  </a:cubicBezTo>
+                  <a:close/>
+                </a:path>
+              </a:pathLst>
+            </a:custGeom>
+            <a:solidFill>
+              <a:srgbClr val="087E70"/>
+            </a:solidFill>
+          </p:spPr>
+        </p:sp>
+      </p:grpSp>
+      <p:grpSp>
+        <p:nvGrpSpPr>
+          <p:cNvPr name="Group 21" id="21"/>
+          <p:cNvGrpSpPr/>
+          <p:nvPr/>
+        </p:nvGrpSpPr>
+        <p:grpSpPr>
+          <a:xfrm rot="5400000">
+            <a:off x="5872162" y="4729162"/>
+            <a:ext cx="447675" cy="38100"/>
+            <a:chOff x="0" y="0"/>
+            <a:chExt cx="596900" cy="50800"/>
+          </a:xfrm>
+        </p:grpSpPr>
+        <p:sp>
+          <p:nvSpPr>
+            <p:cNvPr name="Freeform 22" id="22"/>
+            <p:cNvSpPr/>
+            <p:nvPr/>
+          </p:nvSpPr>
+          <p:spPr>
+            <a:xfrm flipH="false" flipV="false" rot="0">
+              <a:off x="0" y="0"/>
+              <a:ext cx="596900" cy="50800"/>
+            </a:xfrm>
+            <a:custGeom>
+              <a:avLst/>
+              <a:gdLst/>
+              <a:ahLst/>
+              <a:cxnLst/>
+              <a:rect r="r" b="b" t="t" l="l"/>
+              <a:pathLst>
+                <a:path h="50800" w="596900">
+                  <a:moveTo>
+                    <a:pt x="25400" y="0"/>
+                  </a:moveTo>
+                  <a:lnTo>
+                    <a:pt x="571500" y="0"/>
+                  </a:lnTo>
+                  <a:cubicBezTo>
+                    <a:pt x="585470" y="0"/>
+                    <a:pt x="596900" y="11430"/>
+                    <a:pt x="596900" y="25400"/>
+                  </a:cubicBezTo>
+                  <a:cubicBezTo>
+                    <a:pt x="596900" y="39370"/>
+                    <a:pt x="585470" y="50800"/>
+                    <a:pt x="571500" y="50800"/>
+                  </a:cubicBezTo>
+                  <a:lnTo>
+                    <a:pt x="25400" y="50800"/>
+                  </a:lnTo>
+                  <a:cubicBezTo>
+                    <a:pt x="11430" y="50800"/>
+                    <a:pt x="0" y="39370"/>
+                    <a:pt x="0" y="25400"/>
+                  </a:cubicBezTo>
+                  <a:cubicBezTo>
+                    <a:pt x="0" y="11430"/>
+                    <a:pt x="11430" y="0"/>
+                    <a:pt x="25400" y="0"/>
+                  </a:cubicBezTo>
+                  <a:close/>
+                </a:path>
+              </a:pathLst>
+            </a:custGeom>
+            <a:solidFill>
+              <a:srgbClr val="087E70"/>
+            </a:solidFill>
+          </p:spPr>
+        </p:sp>
+      </p:grpSp>
+      <p:grpSp>
+        <p:nvGrpSpPr>
+          <p:cNvPr name="Group 23" id="23"/>
+          <p:cNvGrpSpPr/>
+          <p:nvPr/>
+        </p:nvGrpSpPr>
+        <p:grpSpPr>
           <a:xfrm rot="5400000">
             <a:off x="8543925" y="4200525"/>
             <a:ext cx="628650" cy="38100"/>
@@ -8108,7 +8356,7 @@
         </p:grpSpPr>
         <p:sp>
           <p:nvSpPr>
-            <p:cNvPr name="Freeform 20" id="20"/>
+            <p:cNvPr name="Freeform 24" id="24"/>
             <p:cNvSpPr/>
             <p:nvPr/>
           </p:nvSpPr>
@@ -8166,7 +8414,7 @@
       </p:grpSp>
       <p:grpSp>
         <p:nvGrpSpPr>
-          <p:cNvPr name="Group 21" id="21"/>
+          <p:cNvPr name="Group 25" id="25"/>
           <p:cNvGrpSpPr/>
           <p:nvPr/>
         </p:nvGrpSpPr>
@@ -8180,7 +8428,7 @@
         </p:grpSpPr>
         <p:sp>
           <p:nvSpPr>
-            <p:cNvPr name="Freeform 22" id="22"/>
+            <p:cNvPr name="Freeform 26" id="26"/>
             <p:cNvSpPr/>
             <p:nvPr/>
           </p:nvSpPr>
@@ -8238,7 +8486,7 @@
       </p:grpSp>
       <p:sp>
         <p:nvSpPr>
-          <p:cNvPr name="AutoShape 23" id="23"/>
+          <p:cNvPr name="AutoShape 27" id="27"/>
           <p:cNvSpPr/>
           <p:nvPr/>
         </p:nvSpPr>
@@ -8257,7 +8505,7 @@
       </p:sp>
       <p:sp>
         <p:nvSpPr>
-          <p:cNvPr name="TextBox 24" id="24"/>
+          <p:cNvPr name="TextBox 28" id="28"/>
           <p:cNvSpPr txBox="true"/>
           <p:nvPr/>
         </p:nvSpPr>
@@ -8298,7 +8546,7 @@
       </p:sp>
       <p:sp>
         <p:nvSpPr>
-          <p:cNvPr name="TextBox 25" id="25"/>
+          <p:cNvPr name="TextBox 29" id="29"/>
           <p:cNvSpPr txBox="true"/>
           <p:nvPr/>
         </p:nvSpPr>
@@ -8339,7 +8587,7 @@
       </p:sp>
       <p:sp>
         <p:nvSpPr>
-          <p:cNvPr name="AutoShape 26" id="26"/>
+          <p:cNvPr name="AutoShape 30" id="30"/>
           <p:cNvSpPr/>
           <p:nvPr/>
         </p:nvSpPr>
@@ -8466,9 +8714,174 @@
           </p:spPr>
         </p:sp>
       </p:grpSp>
-      <p:sp>
-        <p:nvSpPr>
-          <p:cNvPr name="TextBox 5" id="5"/>
+      <p:grpSp>
+        <p:nvGrpSpPr>
+          <p:cNvPr name="Group 5" id="5"/>
+          <p:cNvGrpSpPr/>
+          <p:nvPr/>
+        </p:nvGrpSpPr>
+        <p:grpSpPr>
+          <a:xfrm rot="0">
+            <a:off x="0" y="0"/>
+            <a:ext cx="12192000" cy="6858000"/>
+            <a:chOff x="0" y="0"/>
+            <a:chExt cx="16256000" cy="9144000"/>
+          </a:xfrm>
+        </p:grpSpPr>
+        <p:sp>
+          <p:nvSpPr>
+            <p:cNvPr name="Freeform 6" id="6"/>
+            <p:cNvSpPr/>
+            <p:nvPr/>
+          </p:nvSpPr>
+          <p:spPr>
+            <a:xfrm flipH="false" flipV="false" rot="0">
+              <a:off x="0" y="0"/>
+              <a:ext cx="16256000" cy="9144000"/>
+            </a:xfrm>
+            <a:custGeom>
+              <a:avLst/>
+              <a:gdLst/>
+              <a:ahLst/>
+              <a:cxnLst/>
+              <a:rect r="r" b="b" t="t" l="l"/>
+              <a:pathLst>
+                <a:path h="9144000" w="16256000">
+                  <a:moveTo>
+                    <a:pt x="0" y="0"/>
+                  </a:moveTo>
+                  <a:lnTo>
+                    <a:pt x="16256000" y="0"/>
+                  </a:lnTo>
+                  <a:lnTo>
+                    <a:pt x="16256000" y="9144000"/>
+                  </a:lnTo>
+                  <a:lnTo>
+                    <a:pt x="0" y="9144000"/>
+                  </a:lnTo>
+                  <a:lnTo>
+                    <a:pt x="0" y="0"/>
+                  </a:lnTo>
+                  <a:close/>
+                </a:path>
+              </a:pathLst>
+            </a:custGeom>
+            <a:blipFill>
+              <a:blip r:embed="rId4">
+                <a:extLst>
+                  <a:ext uri="{96DAC541-7B7A-43D3-8B79-37D633B846F1}">
+                    <asvg:svgBlip xmlns:asvg="http://schemas.microsoft.com/office/drawing/2016/SVG/main" r:embed="rId5"/>
+                  </a:ext>
+                </a:extLst>
+              </a:blip>
+              <a:stretch>
+                <a:fillRect l="0" t="0" r="0" b="0"/>
+              </a:stretch>
+            </a:blipFill>
+          </p:spPr>
+        </p:sp>
+        <p:sp>
+          <p:nvSpPr>
+            <p:cNvPr name="Freeform 7" id="7"/>
+            <p:cNvSpPr/>
+            <p:nvPr/>
+          </p:nvSpPr>
+          <p:spPr>
+            <a:xfrm flipH="false" flipV="false" rot="0">
+              <a:off x="11887200" y="0"/>
+              <a:ext cx="3556000" cy="803656"/>
+            </a:xfrm>
+            <a:custGeom>
+              <a:avLst/>
+              <a:gdLst/>
+              <a:ahLst/>
+              <a:cxnLst/>
+              <a:rect r="r" b="b" t="t" l="l"/>
+              <a:pathLst>
+                <a:path h="803656" w="3556000">
+                  <a:moveTo>
+                    <a:pt x="0" y="0"/>
+                  </a:moveTo>
+                  <a:lnTo>
+                    <a:pt x="3556000" y="0"/>
+                  </a:lnTo>
+                  <a:lnTo>
+                    <a:pt x="3556000" y="803656"/>
+                  </a:lnTo>
+                  <a:lnTo>
+                    <a:pt x="0" y="803656"/>
+                  </a:lnTo>
+                  <a:lnTo>
+                    <a:pt x="0" y="0"/>
+                  </a:lnTo>
+                  <a:close/>
+                </a:path>
+              </a:pathLst>
+            </a:custGeom>
+            <a:blipFill>
+              <a:blip r:embed="rId6"/>
+              <a:stretch>
+                <a:fillRect l="0" t="0" r="0" b="0"/>
+              </a:stretch>
+            </a:blipFill>
+          </p:spPr>
+        </p:sp>
+        <p:sp>
+          <p:nvSpPr>
+            <p:cNvPr name="Freeform 8" id="8"/>
+            <p:cNvSpPr/>
+            <p:nvPr/>
+          </p:nvSpPr>
+          <p:spPr>
+            <a:xfrm flipH="false" flipV="false" rot="0">
+              <a:off x="812800" y="127000"/>
+              <a:ext cx="2413000" cy="504536"/>
+            </a:xfrm>
+            <a:custGeom>
+              <a:avLst/>
+              <a:gdLst/>
+              <a:ahLst/>
+              <a:cxnLst/>
+              <a:rect r="r" b="b" t="t" l="l"/>
+              <a:pathLst>
+                <a:path h="504536" w="2413000">
+                  <a:moveTo>
+                    <a:pt x="0" y="0"/>
+                  </a:moveTo>
+                  <a:lnTo>
+                    <a:pt x="2413000" y="0"/>
+                  </a:lnTo>
+                  <a:lnTo>
+                    <a:pt x="2413000" y="504536"/>
+                  </a:lnTo>
+                  <a:lnTo>
+                    <a:pt x="0" y="504536"/>
+                  </a:lnTo>
+                  <a:lnTo>
+                    <a:pt x="0" y="0"/>
+                  </a:lnTo>
+                  <a:close/>
+                </a:path>
+              </a:pathLst>
+            </a:custGeom>
+            <a:blipFill>
+              <a:blip r:embed="rId7">
+                <a:extLst>
+                  <a:ext uri="{96DAC541-7B7A-43D3-8B79-37D633B846F1}">
+                    <asvg:svgBlip xmlns:asvg="http://schemas.microsoft.com/office/drawing/2016/SVG/main" r:embed="rId8"/>
+                  </a:ext>
+                </a:extLst>
+              </a:blip>
+              <a:stretch>
+                <a:fillRect l="0" t="0" r="0" b="0"/>
+              </a:stretch>
+            </a:blipFill>
+          </p:spPr>
+        </p:sp>
+      </p:grpSp>
+      <p:sp>
+        <p:nvSpPr>
+          <p:cNvPr name="TextBox 9" id="9"/>
           <p:cNvSpPr txBox="true"/>
           <p:nvPr/>
         </p:nvSpPr>
@@ -8509,7 +8922,7 @@
       </p:sp>
       <p:sp>
         <p:nvSpPr>
-          <p:cNvPr name="TextBox 6" id="6"/>
+          <p:cNvPr name="TextBox 10" id="10"/>
           <p:cNvSpPr txBox="true"/>
           <p:nvPr/>
         </p:nvSpPr>
@@ -8550,7 +8963,7 @@
       </p:sp>
       <p:sp>
         <p:nvSpPr>
-          <p:cNvPr name="TextBox 7" id="7"/>
+          <p:cNvPr name="TextBox 11" id="11"/>
           <p:cNvSpPr txBox="true"/>
           <p:nvPr/>
         </p:nvSpPr>
@@ -8591,7 +9004,7 @@
       </p:sp>
       <p:sp>
         <p:nvSpPr>
-          <p:cNvPr name="TextBox 8" id="8"/>
+          <p:cNvPr name="TextBox 12" id="12"/>
           <p:cNvSpPr txBox="true"/>
           <p:nvPr/>
         </p:nvSpPr>
@@ -8632,7 +9045,7 @@
       </p:sp>
       <p:sp>
         <p:nvSpPr>
-          <p:cNvPr name="TextBox 9" id="9"/>
+          <p:cNvPr name="TextBox 13" id="13"/>
           <p:cNvSpPr txBox="true"/>
           <p:nvPr/>
         </p:nvSpPr>
@@ -8673,7 +9086,7 @@
       </p:sp>
       <p:sp>
         <p:nvSpPr>
-          <p:cNvPr name="AutoShape 10" id="10"/>
+          <p:cNvPr name="AutoShape 14" id="14"/>
           <p:cNvSpPr/>
           <p:nvPr/>
         </p:nvSpPr>
@@ -8692,7 +9105,7 @@
       </p:sp>
       <p:grpSp>
         <p:nvGrpSpPr>
-          <p:cNvPr name="Group 11" id="11"/>
+          <p:cNvPr name="Group 15" id="15"/>
           <p:cNvGrpSpPr/>
           <p:nvPr/>
         </p:nvGrpSpPr>
@@ -8706,7 +9119,7 @@
         </p:grpSpPr>
         <p:sp>
           <p:nvSpPr>
-            <p:cNvPr name="Freeform 12" id="12"/>
+            <p:cNvPr name="Freeform 16" id="16"/>
             <p:cNvSpPr/>
             <p:nvPr/>
           </p:nvSpPr>
@@ -8764,7 +9177,7 @@
       </p:grpSp>
       <p:grpSp>
         <p:nvGrpSpPr>
-          <p:cNvPr name="Group 13" id="13"/>
+          <p:cNvPr name="Group 17" id="17"/>
           <p:cNvGrpSpPr/>
           <p:nvPr/>
         </p:nvGrpSpPr>
@@ -8778,7 +9191,7 @@
         </p:grpSpPr>
         <p:sp>
           <p:nvSpPr>
-            <p:cNvPr name="Freeform 14" id="14"/>
+            <p:cNvPr name="Freeform 18" id="18"/>
             <p:cNvSpPr/>
             <p:nvPr/>
           </p:nvSpPr>
@@ -8836,7 +9249,7 @@
       </p:grpSp>
       <p:sp>
         <p:nvSpPr>
-          <p:cNvPr name="TextBox 15" id="15"/>
+          <p:cNvPr name="TextBox 19" id="19"/>
           <p:cNvSpPr txBox="true"/>
           <p:nvPr/>
         </p:nvSpPr>
@@ -8877,7 +9290,7 @@
       </p:sp>
       <p:sp>
         <p:nvSpPr>
-          <p:cNvPr name="AutoShape 16" id="16"/>
+          <p:cNvPr name="AutoShape 20" id="20"/>
           <p:cNvSpPr/>
           <p:nvPr/>
         </p:nvSpPr>
@@ -8896,7 +9309,7 @@
       </p:sp>
       <p:sp>
         <p:nvSpPr>
-          <p:cNvPr name="TextBox 17" id="17"/>
+          <p:cNvPr name="TextBox 21" id="21"/>
           <p:cNvSpPr txBox="true"/>
           <p:nvPr/>
         </p:nvSpPr>
@@ -8937,7 +9350,7 @@
       </p:sp>
       <p:sp>
         <p:nvSpPr>
-          <p:cNvPr name="AutoShape 18" id="18"/>
+          <p:cNvPr name="AutoShape 22" id="22"/>
           <p:cNvSpPr/>
           <p:nvPr/>
         </p:nvSpPr>
@@ -8956,7 +9369,7 @@
       </p:sp>
       <p:grpSp>
         <p:nvGrpSpPr>
-          <p:cNvPr name="Group 19" id="19"/>
+          <p:cNvPr name="Group 23" id="23"/>
           <p:cNvGrpSpPr/>
           <p:nvPr/>
         </p:nvGrpSpPr>
@@ -8970,7 +9383,7 @@
         </p:grpSpPr>
         <p:sp>
           <p:nvSpPr>
-            <p:cNvPr name="Freeform 20" id="20"/>
+            <p:cNvPr name="Freeform 24" id="24"/>
             <p:cNvSpPr/>
             <p:nvPr/>
           </p:nvSpPr>
@@ -9028,7 +9441,7 @@
       </p:grpSp>
       <p:grpSp>
         <p:nvGrpSpPr>
-          <p:cNvPr name="Group 21" id="21"/>
+          <p:cNvPr name="Group 25" id="25"/>
           <p:cNvGrpSpPr/>
           <p:nvPr/>
         </p:nvGrpSpPr>
@@ -9042,7 +9455,7 @@
         </p:grpSpPr>
         <p:sp>
           <p:nvSpPr>
-            <p:cNvPr name="Freeform 22" id="22"/>
+            <p:cNvPr name="Freeform 26" id="26"/>
             <p:cNvSpPr/>
             <p:nvPr/>
           </p:nvSpPr>
@@ -9100,7 +9513,7 @@
       </p:grpSp>
       <p:sp>
         <p:nvSpPr>
-          <p:cNvPr name="TextBox 23" id="23"/>
+          <p:cNvPr name="TextBox 27" id="27"/>
           <p:cNvSpPr txBox="true"/>
           <p:nvPr/>
         </p:nvSpPr>
@@ -9141,7 +9554,7 @@
       </p:sp>
       <p:sp>
         <p:nvSpPr>
-          <p:cNvPr name="AutoShape 24" id="24"/>
+          <p:cNvPr name="AutoShape 28" id="28"/>
           <p:cNvSpPr/>
           <p:nvPr/>
         </p:nvSpPr>
@@ -9160,7 +9573,7 @@
       </p:sp>
       <p:sp>
         <p:nvSpPr>
-          <p:cNvPr name="TextBox 25" id="25"/>
+          <p:cNvPr name="TextBox 29" id="29"/>
           <p:cNvSpPr txBox="true"/>
           <p:nvPr/>
         </p:nvSpPr>
@@ -9201,7 +9614,7 @@
       </p:sp>
       <p:sp>
         <p:nvSpPr>
-          <p:cNvPr name="AutoShape 26" id="26"/>
+          <p:cNvPr name="AutoShape 30" id="30"/>
           <p:cNvSpPr/>
           <p:nvPr/>
         </p:nvSpPr>
@@ -9220,7 +9633,7 @@
       </p:sp>
       <p:grpSp>
         <p:nvGrpSpPr>
-          <p:cNvPr name="Group 27" id="27"/>
+          <p:cNvPr name="Group 31" id="31"/>
           <p:cNvGrpSpPr/>
           <p:nvPr/>
         </p:nvGrpSpPr>
@@ -9234,7 +9647,7 @@
         </p:grpSpPr>
         <p:sp>
           <p:nvSpPr>
-            <p:cNvPr name="Freeform 28" id="28"/>
+            <p:cNvPr name="Freeform 32" id="32"/>
             <p:cNvSpPr/>
             <p:nvPr/>
           </p:nvSpPr>
@@ -9292,7 +9705,7 @@
       </p:grpSp>
       <p:grpSp>
         <p:nvGrpSpPr>
-          <p:cNvPr name="Group 29" id="29"/>
+          <p:cNvPr name="Group 33" id="33"/>
           <p:cNvGrpSpPr/>
           <p:nvPr/>
         </p:nvGrpSpPr>
@@ -9306,7 +9719,7 @@
         </p:grpSpPr>
         <p:sp>
           <p:nvSpPr>
-            <p:cNvPr name="Freeform 30" id="30"/>
+            <p:cNvPr name="Freeform 34" id="34"/>
             <p:cNvSpPr/>
             <p:nvPr/>
           </p:nvSpPr>
@@ -9364,7 +9777,7 @@
       </p:grpSp>
       <p:sp>
         <p:nvSpPr>
-          <p:cNvPr name="TextBox 31" id="31"/>
+          <p:cNvPr name="TextBox 35" id="35"/>
           <p:cNvSpPr txBox="true"/>
           <p:nvPr/>
         </p:nvSpPr>
@@ -9405,7 +9818,7 @@
       </p:sp>
       <p:sp>
         <p:nvSpPr>
-          <p:cNvPr name="TextBox 32" id="32"/>
+          <p:cNvPr name="TextBox 36" id="36"/>
           <p:cNvSpPr txBox="true"/>
           <p:nvPr/>
         </p:nvSpPr>
@@ -9446,7 +9859,7 @@
       </p:sp>
       <p:sp>
         <p:nvSpPr>
-          <p:cNvPr name="AutoShape 33" id="33"/>
+          <p:cNvPr name="AutoShape 37" id="37"/>
           <p:cNvSpPr/>
           <p:nvPr/>
         </p:nvSpPr>
@@ -9573,9 +9986,174 @@
           </p:spPr>
         </p:sp>
       </p:grpSp>
-      <p:sp>
-        <p:nvSpPr>
-          <p:cNvPr name="TextBox 5" id="5"/>
+      <p:grpSp>
+        <p:nvGrpSpPr>
+          <p:cNvPr name="Group 5" id="5"/>
+          <p:cNvGrpSpPr/>
+          <p:nvPr/>
+        </p:nvGrpSpPr>
+        <p:grpSpPr>
+          <a:xfrm rot="0">
+            <a:off x="0" y="0"/>
+            <a:ext cx="12192000" cy="6858000"/>
+            <a:chOff x="0" y="0"/>
+            <a:chExt cx="16256000" cy="9144000"/>
+          </a:xfrm>
+        </p:grpSpPr>
+        <p:sp>
+          <p:nvSpPr>
+            <p:cNvPr name="Freeform 6" id="6"/>
+            <p:cNvSpPr/>
+            <p:nvPr/>
+          </p:nvSpPr>
+          <p:spPr>
+            <a:xfrm flipH="false" flipV="false" rot="0">
+              <a:off x="0" y="0"/>
+              <a:ext cx="16256000" cy="9144000"/>
+            </a:xfrm>
+            <a:custGeom>
+              <a:avLst/>
+              <a:gdLst/>
+              <a:ahLst/>
+              <a:cxnLst/>
+              <a:rect r="r" b="b" t="t" l="l"/>
+              <a:pathLst>
+                <a:path h="9144000" w="16256000">
+                  <a:moveTo>
+                    <a:pt x="0" y="0"/>
+                  </a:moveTo>
+                  <a:lnTo>
+                    <a:pt x="16256000" y="0"/>
+                  </a:lnTo>
+                  <a:lnTo>
+                    <a:pt x="16256000" y="9144000"/>
+                  </a:lnTo>
+                  <a:lnTo>
+                    <a:pt x="0" y="9144000"/>
+                  </a:lnTo>
+                  <a:lnTo>
+                    <a:pt x="0" y="0"/>
+                  </a:lnTo>
+                  <a:close/>
+                </a:path>
+              </a:pathLst>
+            </a:custGeom>
+            <a:blipFill>
+              <a:blip r:embed="rId4">
+                <a:extLst>
+                  <a:ext uri="{96DAC541-7B7A-43D3-8B79-37D633B846F1}">
+                    <asvg:svgBlip xmlns:asvg="http://schemas.microsoft.com/office/drawing/2016/SVG/main" r:embed="rId5"/>
+                  </a:ext>
+                </a:extLst>
+              </a:blip>
+              <a:stretch>
+                <a:fillRect l="0" t="0" r="0" b="0"/>
+              </a:stretch>
+            </a:blipFill>
+          </p:spPr>
+        </p:sp>
+        <p:sp>
+          <p:nvSpPr>
+            <p:cNvPr name="Freeform 7" id="7"/>
+            <p:cNvSpPr/>
+            <p:nvPr/>
+          </p:nvSpPr>
+          <p:spPr>
+            <a:xfrm flipH="false" flipV="false" rot="0">
+              <a:off x="11887200" y="0"/>
+              <a:ext cx="3556000" cy="803656"/>
+            </a:xfrm>
+            <a:custGeom>
+              <a:avLst/>
+              <a:gdLst/>
+              <a:ahLst/>
+              <a:cxnLst/>
+              <a:rect r="r" b="b" t="t" l="l"/>
+              <a:pathLst>
+                <a:path h="803656" w="3556000">
+                  <a:moveTo>
+                    <a:pt x="0" y="0"/>
+                  </a:moveTo>
+                  <a:lnTo>
+                    <a:pt x="3556000" y="0"/>
+                  </a:lnTo>
+                  <a:lnTo>
+                    <a:pt x="3556000" y="803656"/>
+                  </a:lnTo>
+                  <a:lnTo>
+                    <a:pt x="0" y="803656"/>
+                  </a:lnTo>
+                  <a:lnTo>
+                    <a:pt x="0" y="0"/>
+                  </a:lnTo>
+                  <a:close/>
+                </a:path>
+              </a:pathLst>
+            </a:custGeom>
+            <a:blipFill>
+              <a:blip r:embed="rId6"/>
+              <a:stretch>
+                <a:fillRect l="0" t="0" r="0" b="0"/>
+              </a:stretch>
+            </a:blipFill>
+          </p:spPr>
+        </p:sp>
+        <p:sp>
+          <p:nvSpPr>
+            <p:cNvPr name="Freeform 8" id="8"/>
+            <p:cNvSpPr/>
+            <p:nvPr/>
+          </p:nvSpPr>
+          <p:spPr>
+            <a:xfrm flipH="false" flipV="false" rot="0">
+              <a:off x="812800" y="127000"/>
+              <a:ext cx="2413000" cy="504536"/>
+            </a:xfrm>
+            <a:custGeom>
+              <a:avLst/>
+              <a:gdLst/>
+              <a:ahLst/>
+              <a:cxnLst/>
+              <a:rect r="r" b="b" t="t" l="l"/>
+              <a:pathLst>
+                <a:path h="504536" w="2413000">
+                  <a:moveTo>
+                    <a:pt x="0" y="0"/>
+                  </a:moveTo>
+                  <a:lnTo>
+                    <a:pt x="2413000" y="0"/>
+                  </a:lnTo>
+                  <a:lnTo>
+                    <a:pt x="2413000" y="504536"/>
+                  </a:lnTo>
+                  <a:lnTo>
+                    <a:pt x="0" y="504536"/>
+                  </a:lnTo>
+                  <a:lnTo>
+                    <a:pt x="0" y="0"/>
+                  </a:lnTo>
+                  <a:close/>
+                </a:path>
+              </a:pathLst>
+            </a:custGeom>
+            <a:blipFill>
+              <a:blip r:embed="rId7">
+                <a:extLst>
+                  <a:ext uri="{96DAC541-7B7A-43D3-8B79-37D633B846F1}">
+                    <asvg:svgBlip xmlns:asvg="http://schemas.microsoft.com/office/drawing/2016/SVG/main" r:embed="rId8"/>
+                  </a:ext>
+                </a:extLst>
+              </a:blip>
+              <a:stretch>
+                <a:fillRect l="0" t="0" r="0" b="0"/>
+              </a:stretch>
+            </a:blipFill>
+          </p:spPr>
+        </p:sp>
+      </p:grpSp>
+      <p:sp>
+        <p:nvSpPr>
+          <p:cNvPr name="TextBox 9" id="9"/>
           <p:cNvSpPr txBox="true"/>
           <p:nvPr/>
         </p:nvSpPr>
@@ -9616,7 +10194,7 @@
       </p:sp>
       <p:sp>
         <p:nvSpPr>
-          <p:cNvPr name="TextBox 6" id="6"/>
+          <p:cNvPr name="TextBox 10" id="10"/>
           <p:cNvSpPr txBox="true"/>
           <p:nvPr/>
         </p:nvSpPr>
@@ -9657,7 +10235,7 @@
       </p:sp>
       <p:sp>
         <p:nvSpPr>
-          <p:cNvPr name="AutoShape 7" id="7"/>
+          <p:cNvPr name="AutoShape 11" id="11"/>
           <p:cNvSpPr/>
           <p:nvPr/>
         </p:nvSpPr>
@@ -9676,7 +10254,7 @@
       </p:sp>
       <p:sp>
         <p:nvSpPr>
-          <p:cNvPr name="TextBox 8" id="8"/>
+          <p:cNvPr name="TextBox 12" id="12"/>
           <p:cNvSpPr txBox="true"/>
           <p:nvPr/>
         </p:nvSpPr>
@@ -9717,7 +10295,7 @@
       </p:sp>
       <p:sp>
         <p:nvSpPr>
-          <p:cNvPr name="AutoShape 9" id="9"/>
+          <p:cNvPr name="AutoShape 13" id="13"/>
           <p:cNvSpPr/>
           <p:nvPr/>
         </p:nvSpPr>
@@ -9736,7 +10314,7 @@
       </p:sp>
       <p:sp>
         <p:nvSpPr>
-          <p:cNvPr name="TextBox 10" id="10"/>
+          <p:cNvPr name="TextBox 14" id="14"/>
           <p:cNvSpPr txBox="true"/>
           <p:nvPr/>
         </p:nvSpPr>
@@ -9777,7 +10355,7 @@
       </p:sp>
       <p:sp>
         <p:nvSpPr>
-          <p:cNvPr name="AutoShape 11" id="11"/>
+          <p:cNvPr name="AutoShape 15" id="15"/>
           <p:cNvSpPr/>
           <p:nvPr/>
         </p:nvSpPr>
@@ -9796,7 +10374,7 @@
       </p:sp>
       <p:sp>
         <p:nvSpPr>
-          <p:cNvPr name="TextBox 12" id="12"/>
+          <p:cNvPr name="TextBox 16" id="16"/>
           <p:cNvSpPr txBox="true"/>
           <p:nvPr/>
         </p:nvSpPr>
@@ -9837,7 +10415,7 @@
       </p:sp>
       <p:sp>
         <p:nvSpPr>
-          <p:cNvPr name="TextBox 13" id="13"/>
+          <p:cNvPr name="TextBox 17" id="17"/>
           <p:cNvSpPr txBox="true"/>
           <p:nvPr/>
         </p:nvSpPr>
@@ -9878,7 +10456,7 @@
       </p:sp>
       <p:sp>
         <p:nvSpPr>
-          <p:cNvPr name="TextBox 14" id="14"/>
+          <p:cNvPr name="TextBox 18" id="18"/>
           <p:cNvSpPr txBox="true"/>
           <p:nvPr/>
         </p:nvSpPr>
@@ -9919,7 +10497,7 @@
       </p:sp>
       <p:sp>
         <p:nvSpPr>
-          <p:cNvPr name="TextBox 15" id="15"/>
+          <p:cNvPr name="TextBox 19" id="19"/>
           <p:cNvSpPr txBox="true"/>
           <p:nvPr/>
         </p:nvSpPr>
@@ -9960,7 +10538,7 @@
       </p:sp>
       <p:sp>
         <p:nvSpPr>
-          <p:cNvPr name="TextBox 16" id="16"/>
+          <p:cNvPr name="TextBox 20" id="20"/>
           <p:cNvSpPr txBox="true"/>
           <p:nvPr/>
         </p:nvSpPr>
@@ -10001,7 +10579,7 @@
       </p:sp>
       <p:sp>
         <p:nvSpPr>
-          <p:cNvPr name="AutoShape 17" id="17"/>
+          <p:cNvPr name="AutoShape 21" id="21"/>
           <p:cNvSpPr/>
           <p:nvPr/>
         </p:nvSpPr>
@@ -10128,9 +10706,174 @@
           </p:spPr>
         </p:sp>
       </p:grpSp>
-      <p:sp>
-        <p:nvSpPr>
-          <p:cNvPr name="TextBox 5" id="5"/>
+      <p:grpSp>
+        <p:nvGrpSpPr>
+          <p:cNvPr name="Group 5" id="5"/>
+          <p:cNvGrpSpPr/>
+          <p:nvPr/>
+        </p:nvGrpSpPr>
+        <p:grpSpPr>
+          <a:xfrm rot="0">
+            <a:off x="0" y="0"/>
+            <a:ext cx="12192000" cy="6858000"/>
+            <a:chOff x="0" y="0"/>
+            <a:chExt cx="16256000" cy="9144000"/>
+          </a:xfrm>
+        </p:grpSpPr>
+        <p:sp>
+          <p:nvSpPr>
+            <p:cNvPr name="Freeform 6" id="6"/>
+            <p:cNvSpPr/>
+            <p:nvPr/>
+          </p:nvSpPr>
+          <p:spPr>
+            <a:xfrm flipH="false" flipV="false" rot="0">
+              <a:off x="0" y="0"/>
+              <a:ext cx="16256000" cy="9144000"/>
+            </a:xfrm>
+            <a:custGeom>
+              <a:avLst/>
+              <a:gdLst/>
+              <a:ahLst/>
+              <a:cxnLst/>
+              <a:rect r="r" b="b" t="t" l="l"/>
+              <a:pathLst>
+                <a:path h="9144000" w="16256000">
+                  <a:moveTo>
+                    <a:pt x="0" y="0"/>
+                  </a:moveTo>
+                  <a:lnTo>
+                    <a:pt x="16256000" y="0"/>
+                  </a:lnTo>
+                  <a:lnTo>
+                    <a:pt x="16256000" y="9144000"/>
+                  </a:lnTo>
+                  <a:lnTo>
+                    <a:pt x="0" y="9144000"/>
+                  </a:lnTo>
+                  <a:lnTo>
+                    <a:pt x="0" y="0"/>
+                  </a:lnTo>
+                  <a:close/>
+                </a:path>
+              </a:pathLst>
+            </a:custGeom>
+            <a:blipFill>
+              <a:blip r:embed="rId4">
+                <a:extLst>
+                  <a:ext uri="{96DAC541-7B7A-43D3-8B79-37D633B846F1}">
+                    <asvg:svgBlip xmlns:asvg="http://schemas.microsoft.com/office/drawing/2016/SVG/main" r:embed="rId5"/>
+                  </a:ext>
+                </a:extLst>
+              </a:blip>
+              <a:stretch>
+                <a:fillRect l="0" t="0" r="0" b="0"/>
+              </a:stretch>
+            </a:blipFill>
+          </p:spPr>
+        </p:sp>
+        <p:sp>
+          <p:nvSpPr>
+            <p:cNvPr name="Freeform 7" id="7"/>
+            <p:cNvSpPr/>
+            <p:nvPr/>
+          </p:nvSpPr>
+          <p:spPr>
+            <a:xfrm flipH="false" flipV="false" rot="0">
+              <a:off x="11887200" y="0"/>
+              <a:ext cx="3556000" cy="803656"/>
+            </a:xfrm>
+            <a:custGeom>
+              <a:avLst/>
+              <a:gdLst/>
+              <a:ahLst/>
+              <a:cxnLst/>
+              <a:rect r="r" b="b" t="t" l="l"/>
+              <a:pathLst>
+                <a:path h="803656" w="3556000">
+                  <a:moveTo>
+                    <a:pt x="0" y="0"/>
+                  </a:moveTo>
+                  <a:lnTo>
+                    <a:pt x="3556000" y="0"/>
+                  </a:lnTo>
+                  <a:lnTo>
+                    <a:pt x="3556000" y="803656"/>
+                  </a:lnTo>
+                  <a:lnTo>
+                    <a:pt x="0" y="803656"/>
+                  </a:lnTo>
+                  <a:lnTo>
+                    <a:pt x="0" y="0"/>
+                  </a:lnTo>
+                  <a:close/>
+                </a:path>
+              </a:pathLst>
+            </a:custGeom>
+            <a:blipFill>
+              <a:blip r:embed="rId6"/>
+              <a:stretch>
+                <a:fillRect l="0" t="0" r="0" b="0"/>
+              </a:stretch>
+            </a:blipFill>
+          </p:spPr>
+        </p:sp>
+        <p:sp>
+          <p:nvSpPr>
+            <p:cNvPr name="Freeform 8" id="8"/>
+            <p:cNvSpPr/>
+            <p:nvPr/>
+          </p:nvSpPr>
+          <p:spPr>
+            <a:xfrm flipH="false" flipV="false" rot="0">
+              <a:off x="812800" y="127000"/>
+              <a:ext cx="2413000" cy="504536"/>
+            </a:xfrm>
+            <a:custGeom>
+              <a:avLst/>
+              <a:gdLst/>
+              <a:ahLst/>
+              <a:cxnLst/>
+              <a:rect r="r" b="b" t="t" l="l"/>
+              <a:pathLst>
+                <a:path h="504536" w="2413000">
+                  <a:moveTo>
+                    <a:pt x="0" y="0"/>
+                  </a:moveTo>
+                  <a:lnTo>
+                    <a:pt x="2413000" y="0"/>
+                  </a:lnTo>
+                  <a:lnTo>
+                    <a:pt x="2413000" y="504536"/>
+                  </a:lnTo>
+                  <a:lnTo>
+                    <a:pt x="0" y="504536"/>
+                  </a:lnTo>
+                  <a:lnTo>
+                    <a:pt x="0" y="0"/>
+                  </a:lnTo>
+                  <a:close/>
+                </a:path>
+              </a:pathLst>
+            </a:custGeom>
+            <a:blipFill>
+              <a:blip r:embed="rId7">
+                <a:extLst>
+                  <a:ext uri="{96DAC541-7B7A-43D3-8B79-37D633B846F1}">
+                    <asvg:svgBlip xmlns:asvg="http://schemas.microsoft.com/office/drawing/2016/SVG/main" r:embed="rId8"/>
+                  </a:ext>
+                </a:extLst>
+              </a:blip>
+              <a:stretch>
+                <a:fillRect l="0" t="0" r="0" b="0"/>
+              </a:stretch>
+            </a:blipFill>
+          </p:spPr>
+        </p:sp>
+      </p:grpSp>
+      <p:sp>
+        <p:nvSpPr>
+          <p:cNvPr name="TextBox 9" id="9"/>
           <p:cNvSpPr txBox="true"/>
           <p:nvPr/>
         </p:nvSpPr>
@@ -10171,7 +10914,7 @@
       </p:sp>
       <p:sp>
         <p:nvSpPr>
-          <p:cNvPr name="TextBox 6" id="6"/>
+          <p:cNvPr name="TextBox 10" id="10"/>
           <p:cNvSpPr txBox="true"/>
           <p:nvPr/>
         </p:nvSpPr>
@@ -10212,7 +10955,7 @@
       </p:sp>
       <p:sp>
         <p:nvSpPr>
-          <p:cNvPr name="TextBox 7" id="7"/>
+          <p:cNvPr name="TextBox 11" id="11"/>
           <p:cNvSpPr txBox="true"/>
           <p:nvPr/>
         </p:nvSpPr>
@@ -10253,7 +10996,7 @@
       </p:sp>
       <p:sp>
         <p:nvSpPr>
-          <p:cNvPr name="TextBox 8" id="8"/>
+          <p:cNvPr name="TextBox 12" id="12"/>
           <p:cNvSpPr txBox="true"/>
           <p:nvPr/>
         </p:nvSpPr>
@@ -10294,7 +11037,7 @@
       </p:sp>
       <p:sp>
         <p:nvSpPr>
-          <p:cNvPr name="TextBox 9" id="9"/>
+          <p:cNvPr name="TextBox 13" id="13"/>
           <p:cNvSpPr txBox="true"/>
           <p:nvPr/>
         </p:nvSpPr>
@@ -10335,7 +11078,7 @@
       </p:sp>
       <p:sp>
         <p:nvSpPr>
-          <p:cNvPr name="TextBox 10" id="10"/>
+          <p:cNvPr name="TextBox 14" id="14"/>
           <p:cNvSpPr txBox="true"/>
           <p:nvPr/>
         </p:nvSpPr>
@@ -10376,7 +11119,7 @@
       </p:sp>
       <p:grpSp>
         <p:nvGrpSpPr>
-          <p:cNvPr name="Group 11" id="11"/>
+          <p:cNvPr name="Group 15" id="15"/>
           <p:cNvGrpSpPr/>
           <p:nvPr/>
         </p:nvGrpSpPr>
@@ -10390,7 +11133,7 @@
         </p:grpSpPr>
         <p:sp>
           <p:nvSpPr>
-            <p:cNvPr name="Freeform 12" id="12"/>
+            <p:cNvPr name="Freeform 16" id="16"/>
             <p:cNvSpPr/>
             <p:nvPr/>
           </p:nvSpPr>
@@ -10433,7 +11176,7 @@
         </p:sp>
         <p:sp>
           <p:nvSpPr>
-            <p:cNvPr name="Freeform 13" id="13"/>
+            <p:cNvPr name="Freeform 17" id="17"/>
             <p:cNvSpPr/>
             <p:nvPr/>
           </p:nvSpPr>
@@ -10485,7 +11228,7 @@
         </p:sp>
         <p:sp>
           <p:nvSpPr>
-            <p:cNvPr name="TextBox 14" id="14"/>
+            <p:cNvPr name="TextBox 18" id="18"/>
             <p:cNvSpPr txBox="true"/>
             <p:nvPr/>
           </p:nvSpPr>
@@ -10525,7 +11268,7 @@
       </p:grpSp>
       <p:grpSp>
         <p:nvGrpSpPr>
-          <p:cNvPr name="Group 15" id="15"/>
+          <p:cNvPr name="Group 19" id="19"/>
           <p:cNvGrpSpPr/>
           <p:nvPr/>
         </p:nvGrpSpPr>
@@ -10539,7 +11282,7 @@
         </p:grpSpPr>
         <p:sp>
           <p:nvSpPr>
-            <p:cNvPr name="Freeform 16" id="16"/>
+            <p:cNvPr name="Freeform 20" id="20"/>
             <p:cNvSpPr/>
             <p:nvPr/>
           </p:nvSpPr>
@@ -10582,7 +11325,7 @@
         </p:sp>
         <p:sp>
           <p:nvSpPr>
-            <p:cNvPr name="Freeform 17" id="17"/>
+            <p:cNvPr name="Freeform 21" id="21"/>
             <p:cNvSpPr/>
             <p:nvPr/>
           </p:nvSpPr>
@@ -10634,7 +11377,7 @@
         </p:sp>
         <p:sp>
           <p:nvSpPr>
-            <p:cNvPr name="TextBox 18" id="18"/>
+            <p:cNvPr name="TextBox 22" id="22"/>
             <p:cNvSpPr txBox="true"/>
             <p:nvPr/>
           </p:nvSpPr>
@@ -10674,7 +11417,7 @@
       </p:grpSp>
       <p:grpSp>
         <p:nvGrpSpPr>
-          <p:cNvPr name="Group 19" id="19"/>
+          <p:cNvPr name="Group 23" id="23"/>
           <p:cNvGrpSpPr/>
           <p:nvPr/>
         </p:nvGrpSpPr>
@@ -10688,7 +11431,7 @@
         </p:grpSpPr>
         <p:sp>
           <p:nvSpPr>
-            <p:cNvPr name="Freeform 20" id="20"/>
+            <p:cNvPr name="Freeform 24" id="24"/>
             <p:cNvSpPr/>
             <p:nvPr/>
           </p:nvSpPr>
@@ -10731,7 +11474,7 @@
         </p:sp>
         <p:sp>
           <p:nvSpPr>
-            <p:cNvPr name="Freeform 21" id="21"/>
+            <p:cNvPr name="Freeform 25" id="25"/>
             <p:cNvSpPr/>
             <p:nvPr/>
           </p:nvSpPr>
@@ -10783,7 +11526,7 @@
         </p:sp>
         <p:sp>
           <p:nvSpPr>
-            <p:cNvPr name="TextBox 22" id="22"/>
+            <p:cNvPr name="TextBox 26" id="26"/>
             <p:cNvSpPr txBox="true"/>
             <p:nvPr/>
           </p:nvSpPr>
@@ -10823,7 +11566,7 @@
       </p:grpSp>
       <p:grpSp>
         <p:nvGrpSpPr>
-          <p:cNvPr name="Group 23" id="23"/>
+          <p:cNvPr name="Group 27" id="27"/>
           <p:cNvGrpSpPr/>
           <p:nvPr/>
         </p:nvGrpSpPr>
@@ -10837,7 +11580,7 @@
         </p:grpSpPr>
         <p:sp>
           <p:nvSpPr>
-            <p:cNvPr name="Freeform 24" id="24"/>
+            <p:cNvPr name="Freeform 28" id="28"/>
             <p:cNvSpPr/>
             <p:nvPr/>
           </p:nvSpPr>
@@ -10880,7 +11623,7 @@
         </p:sp>
         <p:sp>
           <p:nvSpPr>
-            <p:cNvPr name="Freeform 25" id="25"/>
+            <p:cNvPr name="Freeform 29" id="29"/>
             <p:cNvSpPr/>
             <p:nvPr/>
           </p:nvSpPr>
@@ -10932,7 +11675,7 @@
         </p:sp>
         <p:sp>
           <p:nvSpPr>
-            <p:cNvPr name="TextBox 26" id="26"/>
+            <p:cNvPr name="TextBox 30" id="30"/>
             <p:cNvSpPr txBox="true"/>
             <p:nvPr/>
           </p:nvSpPr>
@@ -10972,7 +11715,7 @@
       </p:grpSp>
       <p:grpSp>
         <p:nvGrpSpPr>
-          <p:cNvPr name="Group 27" id="27"/>
+          <p:cNvPr name="Group 31" id="31"/>
           <p:cNvGrpSpPr/>
           <p:nvPr/>
         </p:nvGrpSpPr>
@@ -10986,7 +11729,7 @@
         </p:grpSpPr>
         <p:sp>
           <p:nvSpPr>
-            <p:cNvPr name="Freeform 28" id="28"/>
+            <p:cNvPr name="Freeform 32" id="32"/>
             <p:cNvSpPr/>
             <p:nvPr/>
           </p:nvSpPr>
@@ -11029,7 +11772,7 @@
         </p:sp>
         <p:sp>
           <p:nvSpPr>
-            <p:cNvPr name="Freeform 29" id="29"/>
+            <p:cNvPr name="Freeform 33" id="33"/>
             <p:cNvSpPr/>
             <p:nvPr/>
           </p:nvSpPr>
@@ -11081,7 +11824,7 @@
         </p:sp>
         <p:sp>
           <p:nvSpPr>
-            <p:cNvPr name="TextBox 30" id="30"/>
+            <p:cNvPr name="TextBox 34" id="34"/>
             <p:cNvSpPr txBox="true"/>
             <p:nvPr/>
           </p:nvSpPr>
@@ -11121,7 +11864,7 @@
       </p:grpSp>
       <p:grpSp>
         <p:nvGrpSpPr>
-          <p:cNvPr name="Group 31" id="31"/>
+          <p:cNvPr name="Group 35" id="35"/>
           <p:cNvGrpSpPr/>
           <p:nvPr/>
         </p:nvGrpSpPr>
@@ -11135,7 +11878,7 @@
         </p:grpSpPr>
         <p:sp>
           <p:nvSpPr>
-            <p:cNvPr name="Freeform 32" id="32"/>
+            <p:cNvPr name="Freeform 36" id="36"/>
             <p:cNvSpPr/>
             <p:nvPr/>
           </p:nvSpPr>
@@ -11178,7 +11921,7 @@
         </p:sp>
         <p:sp>
           <p:nvSpPr>
-            <p:cNvPr name="Freeform 33" id="33"/>
+            <p:cNvPr name="Freeform 37" id="37"/>
             <p:cNvSpPr/>
             <p:nvPr/>
           </p:nvSpPr>
@@ -11230,7 +11973,7 @@
         </p:sp>
         <p:sp>
           <p:nvSpPr>
-            <p:cNvPr name="TextBox 34" id="34"/>
+            <p:cNvPr name="TextBox 38" id="38"/>
             <p:cNvSpPr txBox="true"/>
             <p:nvPr/>
           </p:nvSpPr>
@@ -11270,7 +12013,7 @@
       </p:grpSp>
       <p:grpSp>
         <p:nvGrpSpPr>
-          <p:cNvPr name="Group 35" id="35"/>
+          <p:cNvPr name="Group 39" id="39"/>
           <p:cNvGrpSpPr/>
           <p:nvPr/>
         </p:nvGrpSpPr>
@@ -11284,7 +12027,7 @@
         </p:grpSpPr>
         <p:sp>
           <p:nvSpPr>
-            <p:cNvPr name="Freeform 36" id="36"/>
+            <p:cNvPr name="Freeform 40" id="40"/>
             <p:cNvSpPr/>
             <p:nvPr/>
           </p:nvSpPr>
@@ -11327,7 +12070,7 @@
         </p:sp>
         <p:sp>
           <p:nvSpPr>
-            <p:cNvPr name="Freeform 37" id="37"/>
+            <p:cNvPr name="Freeform 41" id="41"/>
             <p:cNvSpPr/>
             <p:nvPr/>
           </p:nvSpPr>
@@ -11379,7 +12122,7 @@
         </p:sp>
         <p:sp>
           <p:nvSpPr>
-            <p:cNvPr name="TextBox 38" id="38"/>
+            <p:cNvPr name="TextBox 42" id="42"/>
             <p:cNvSpPr txBox="true"/>
             <p:nvPr/>
           </p:nvSpPr>
@@ -11419,7 +12162,7 @@
       </p:grpSp>
       <p:grpSp>
         <p:nvGrpSpPr>
-          <p:cNvPr name="Group 39" id="39"/>
+          <p:cNvPr name="Group 43" id="43"/>
           <p:cNvGrpSpPr/>
           <p:nvPr/>
         </p:nvGrpSpPr>
@@ -11433,7 +12176,7 @@
         </p:grpSpPr>
         <p:sp>
           <p:nvSpPr>
-            <p:cNvPr name="Freeform 40" id="40"/>
+            <p:cNvPr name="Freeform 44" id="44"/>
             <p:cNvSpPr/>
             <p:nvPr/>
           </p:nvSpPr>
@@ -11476,7 +12219,7 @@
         </p:sp>
         <p:sp>
           <p:nvSpPr>
-            <p:cNvPr name="Freeform 41" id="41"/>
+            <p:cNvPr name="Freeform 45" id="45"/>
             <p:cNvSpPr/>
             <p:nvPr/>
           </p:nvSpPr>
@@ -11528,7 +12271,7 @@
         </p:sp>
         <p:sp>
           <p:nvSpPr>
-            <p:cNvPr name="TextBox 42" id="42"/>
+            <p:cNvPr name="TextBox 46" id="46"/>
             <p:cNvSpPr txBox="true"/>
             <p:nvPr/>
           </p:nvSpPr>
@@ -11568,7 +12311,7 @@
       </p:grpSp>
       <p:grpSp>
         <p:nvGrpSpPr>
-          <p:cNvPr name="Group 43" id="43"/>
+          <p:cNvPr name="Group 47" id="47"/>
           <p:cNvGrpSpPr/>
           <p:nvPr/>
         </p:nvGrpSpPr>
@@ -11582,7 +12325,7 @@
         </p:grpSpPr>
         <p:sp>
           <p:nvSpPr>
-            <p:cNvPr name="Freeform 44" id="44"/>
+            <p:cNvPr name="Freeform 48" id="48"/>
             <p:cNvSpPr/>
             <p:nvPr/>
           </p:nvSpPr>
@@ -11625,7 +12368,7 @@
         </p:sp>
         <p:sp>
           <p:nvSpPr>
-            <p:cNvPr name="Freeform 45" id="45"/>
+            <p:cNvPr name="Freeform 49" id="49"/>
             <p:cNvSpPr/>
             <p:nvPr/>
           </p:nvSpPr>
@@ -11677,7 +12420,7 @@
         </p:sp>
         <p:sp>
           <p:nvSpPr>
-            <p:cNvPr name="TextBox 46" id="46"/>
+            <p:cNvPr name="TextBox 50" id="50"/>
             <p:cNvSpPr txBox="true"/>
             <p:nvPr/>
           </p:nvSpPr>
@@ -11717,7 +12460,7 @@
       </p:grpSp>
       <p:grpSp>
         <p:nvGrpSpPr>
-          <p:cNvPr name="Group 47" id="47"/>
+          <p:cNvPr name="Group 51" id="51"/>
           <p:cNvGrpSpPr/>
           <p:nvPr/>
         </p:nvGrpSpPr>
@@ -11731,7 +12474,7 @@
         </p:grpSpPr>
         <p:sp>
           <p:nvSpPr>
-            <p:cNvPr name="Freeform 48" id="48"/>
+            <p:cNvPr name="Freeform 52" id="52"/>
             <p:cNvSpPr/>
             <p:nvPr/>
           </p:nvSpPr>
@@ -11774,7 +12517,7 @@
         </p:sp>
         <p:sp>
           <p:nvSpPr>
-            <p:cNvPr name="Freeform 49" id="49"/>
+            <p:cNvPr name="Freeform 53" id="53"/>
             <p:cNvSpPr/>
             <p:nvPr/>
           </p:nvSpPr>
@@ -11826,7 +12569,7 @@
         </p:sp>
         <p:sp>
           <p:nvSpPr>
-            <p:cNvPr name="TextBox 50" id="50"/>
+            <p:cNvPr name="TextBox 54" id="54"/>
             <p:cNvSpPr txBox="true"/>
             <p:nvPr/>
           </p:nvSpPr>
@@ -11866,7 +12609,7 @@
       </p:grpSp>
       <p:grpSp>
         <p:nvGrpSpPr>
-          <p:cNvPr name="Group 51" id="51"/>
+          <p:cNvPr name="Group 55" id="55"/>
           <p:cNvGrpSpPr/>
           <p:nvPr/>
         </p:nvGrpSpPr>
@@ -11880,7 +12623,7 @@
         </p:grpSpPr>
         <p:sp>
           <p:nvSpPr>
-            <p:cNvPr name="Freeform 52" id="52"/>
+            <p:cNvPr name="Freeform 56" id="56"/>
             <p:cNvSpPr/>
             <p:nvPr/>
           </p:nvSpPr>
@@ -11923,7 +12666,7 @@
         </p:sp>
         <p:sp>
           <p:nvSpPr>
-            <p:cNvPr name="Freeform 53" id="53"/>
+            <p:cNvPr name="Freeform 57" id="57"/>
             <p:cNvSpPr/>
             <p:nvPr/>
           </p:nvSpPr>
@@ -11975,7 +12718,7 @@
         </p:sp>
         <p:sp>
           <p:nvSpPr>
-            <p:cNvPr name="TextBox 54" id="54"/>
+            <p:cNvPr name="TextBox 58" id="58"/>
             <p:cNvSpPr txBox="true"/>
             <p:nvPr/>
           </p:nvSpPr>
@@ -12015,7 +12758,7 @@
       </p:grpSp>
       <p:grpSp>
         <p:nvGrpSpPr>
-          <p:cNvPr name="Group 55" id="55"/>
+          <p:cNvPr name="Group 59" id="59"/>
           <p:cNvGrpSpPr/>
           <p:nvPr/>
         </p:nvGrpSpPr>
@@ -12029,7 +12772,7 @@
         </p:grpSpPr>
         <p:sp>
           <p:nvSpPr>
-            <p:cNvPr name="Freeform 56" id="56"/>
+            <p:cNvPr name="Freeform 60" id="60"/>
             <p:cNvSpPr/>
             <p:nvPr/>
           </p:nvSpPr>
@@ -12072,7 +12815,7 @@
         </p:sp>
         <p:sp>
           <p:nvSpPr>
-            <p:cNvPr name="Freeform 57" id="57"/>
+            <p:cNvPr name="Freeform 61" id="61"/>
             <p:cNvSpPr/>
             <p:nvPr/>
           </p:nvSpPr>
@@ -12124,7 +12867,7 @@
         </p:sp>
         <p:sp>
           <p:nvSpPr>
-            <p:cNvPr name="TextBox 58" id="58"/>
+            <p:cNvPr name="TextBox 62" id="62"/>
             <p:cNvSpPr txBox="true"/>
             <p:nvPr/>
           </p:nvSpPr>
@@ -12164,7 +12907,7 @@
       </p:grpSp>
       <p:grpSp>
         <p:nvGrpSpPr>
-          <p:cNvPr name="Group 59" id="59"/>
+          <p:cNvPr name="Group 63" id="63"/>
           <p:cNvGrpSpPr/>
           <p:nvPr/>
         </p:nvGrpSpPr>
@@ -12178,7 +12921,7 @@
         </p:grpSpPr>
         <p:sp>
           <p:nvSpPr>
-            <p:cNvPr name="Freeform 60" id="60"/>
+            <p:cNvPr name="Freeform 64" id="64"/>
             <p:cNvSpPr/>
             <p:nvPr/>
           </p:nvSpPr>
@@ -12221,7 +12964,7 @@
         </p:sp>
         <p:sp>
           <p:nvSpPr>
-            <p:cNvPr name="Freeform 61" id="61"/>
+            <p:cNvPr name="Freeform 65" id="65"/>
             <p:cNvSpPr/>
             <p:nvPr/>
           </p:nvSpPr>
@@ -12273,7 +13016,7 @@
         </p:sp>
         <p:sp>
           <p:nvSpPr>
-            <p:cNvPr name="TextBox 62" id="62"/>
+            <p:cNvPr name="TextBox 66" id="66"/>
             <p:cNvSpPr txBox="true"/>
             <p:nvPr/>
           </p:nvSpPr>
@@ -12313,7 +13056,7 @@
       </p:grpSp>
       <p:grpSp>
         <p:nvGrpSpPr>
-          <p:cNvPr name="Group 63" id="63"/>
+          <p:cNvPr name="Group 67" id="67"/>
           <p:cNvGrpSpPr/>
           <p:nvPr/>
         </p:nvGrpSpPr>
@@ -12327,7 +13070,7 @@
         </p:grpSpPr>
         <p:sp>
           <p:nvSpPr>
-            <p:cNvPr name="Freeform 64" id="64"/>
+            <p:cNvPr name="Freeform 68" id="68"/>
             <p:cNvSpPr/>
             <p:nvPr/>
           </p:nvSpPr>
@@ -12370,7 +13113,7 @@
         </p:sp>
         <p:sp>
           <p:nvSpPr>
-            <p:cNvPr name="Freeform 65" id="65"/>
+            <p:cNvPr name="Freeform 69" id="69"/>
             <p:cNvSpPr/>
             <p:nvPr/>
           </p:nvSpPr>
@@ -12422,7 +13165,7 @@
         </p:sp>
         <p:sp>
           <p:nvSpPr>
-            <p:cNvPr name="TextBox 66" id="66"/>
+            <p:cNvPr name="TextBox 70" id="70"/>
             <p:cNvSpPr txBox="true"/>
             <p:nvPr/>
           </p:nvSpPr>
@@ -12462,7 +13205,7 @@
       </p:grpSp>
       <p:grpSp>
         <p:nvGrpSpPr>
-          <p:cNvPr name="Group 67" id="67"/>
+          <p:cNvPr name="Group 71" id="71"/>
           <p:cNvGrpSpPr/>
           <p:nvPr/>
         </p:nvGrpSpPr>
@@ -12476,7 +13219,7 @@
         </p:grpSpPr>
         <p:sp>
           <p:nvSpPr>
-            <p:cNvPr name="Freeform 68" id="68"/>
+            <p:cNvPr name="Freeform 72" id="72"/>
             <p:cNvSpPr/>
             <p:nvPr/>
           </p:nvSpPr>
@@ -12519,7 +13262,7 @@
         </p:sp>
         <p:sp>
           <p:nvSpPr>
-            <p:cNvPr name="Freeform 69" id="69"/>
+            <p:cNvPr name="Freeform 73" id="73"/>
             <p:cNvSpPr/>
             <p:nvPr/>
           </p:nvSpPr>
@@ -12571,7 +13314,7 @@
         </p:sp>
         <p:sp>
           <p:nvSpPr>
-            <p:cNvPr name="TextBox 70" id="70"/>
+            <p:cNvPr name="TextBox 74" id="74"/>
             <p:cNvSpPr txBox="true"/>
             <p:nvPr/>
           </p:nvSpPr>
@@ -12611,7 +13354,7 @@
       </p:grpSp>
       <p:grpSp>
         <p:nvGrpSpPr>
-          <p:cNvPr name="Group 71" id="71"/>
+          <p:cNvPr name="Group 75" id="75"/>
           <p:cNvGrpSpPr/>
           <p:nvPr/>
         </p:nvGrpSpPr>
@@ -12625,7 +13368,7 @@
         </p:grpSpPr>
         <p:sp>
           <p:nvSpPr>
-            <p:cNvPr name="Freeform 72" id="72"/>
+            <p:cNvPr name="Freeform 76" id="76"/>
             <p:cNvSpPr/>
             <p:nvPr/>
           </p:nvSpPr>
@@ -12668,7 +13411,7 @@
         </p:sp>
         <p:sp>
           <p:nvSpPr>
-            <p:cNvPr name="Freeform 73" id="73"/>
+            <p:cNvPr name="Freeform 77" id="77"/>
             <p:cNvSpPr/>
             <p:nvPr/>
           </p:nvSpPr>
@@ -12720,7 +13463,7 @@
         </p:sp>
         <p:sp>
           <p:nvSpPr>
-            <p:cNvPr name="TextBox 74" id="74"/>
+            <p:cNvPr name="TextBox 78" id="78"/>
             <p:cNvSpPr txBox="true"/>
             <p:nvPr/>
           </p:nvSpPr>
@@ -12760,7 +13503,7 @@
       </p:grpSp>
       <p:grpSp>
         <p:nvGrpSpPr>
-          <p:cNvPr name="Group 75" id="75"/>
+          <p:cNvPr name="Group 79" id="79"/>
           <p:cNvGrpSpPr/>
           <p:nvPr/>
         </p:nvGrpSpPr>
@@ -12774,7 +13517,7 @@
         </p:grpSpPr>
         <p:sp>
           <p:nvSpPr>
-            <p:cNvPr name="Freeform 76" id="76"/>
+            <p:cNvPr name="Freeform 80" id="80"/>
             <p:cNvSpPr/>
             <p:nvPr/>
           </p:nvSpPr>
@@ -12817,7 +13560,7 @@
         </p:sp>
         <p:sp>
           <p:nvSpPr>
-            <p:cNvPr name="Freeform 77" id="77"/>
+            <p:cNvPr name="Freeform 81" id="81"/>
             <p:cNvSpPr/>
             <p:nvPr/>
           </p:nvSpPr>
@@ -12869,7 +13612,7 @@
         </p:sp>
         <p:sp>
           <p:nvSpPr>
-            <p:cNvPr name="TextBox 78" id="78"/>
+            <p:cNvPr name="TextBox 82" id="82"/>
             <p:cNvSpPr txBox="true"/>
             <p:nvPr/>
           </p:nvSpPr>
@@ -12909,7 +13652,7 @@
       </p:grpSp>
       <p:grpSp>
         <p:nvGrpSpPr>
-          <p:cNvPr name="Group 79" id="79"/>
+          <p:cNvPr name="Group 83" id="83"/>
           <p:cNvGrpSpPr/>
           <p:nvPr/>
         </p:nvGrpSpPr>
@@ -12923,7 +13666,7 @@
         </p:grpSpPr>
         <p:sp>
           <p:nvSpPr>
-            <p:cNvPr name="Freeform 80" id="80"/>
+            <p:cNvPr name="Freeform 84" id="84"/>
             <p:cNvSpPr/>
             <p:nvPr/>
           </p:nvSpPr>
@@ -12966,7 +13709,7 @@
         </p:sp>
         <p:sp>
           <p:nvSpPr>
-            <p:cNvPr name="Freeform 81" id="81"/>
+            <p:cNvPr name="Freeform 85" id="85"/>
             <p:cNvSpPr/>
             <p:nvPr/>
           </p:nvSpPr>
@@ -13018,7 +13761,7 @@
         </p:sp>
         <p:sp>
           <p:nvSpPr>
-            <p:cNvPr name="TextBox 82" id="82"/>
+            <p:cNvPr name="TextBox 86" id="86"/>
             <p:cNvSpPr txBox="true"/>
             <p:nvPr/>
           </p:nvSpPr>
@@ -13058,7 +13801,7 @@
       </p:grpSp>
       <p:grpSp>
         <p:nvGrpSpPr>
-          <p:cNvPr name="Group 83" id="83"/>
+          <p:cNvPr name="Group 87" id="87"/>
           <p:cNvGrpSpPr/>
           <p:nvPr/>
         </p:nvGrpSpPr>
@@ -13072,7 +13815,7 @@
         </p:grpSpPr>
         <p:sp>
           <p:nvSpPr>
-            <p:cNvPr name="Freeform 84" id="84"/>
+            <p:cNvPr name="Freeform 88" id="88"/>
             <p:cNvSpPr/>
             <p:nvPr/>
           </p:nvSpPr>
@@ -13115,7 +13858,7 @@
         </p:sp>
         <p:sp>
           <p:nvSpPr>
-            <p:cNvPr name="Freeform 85" id="85"/>
+            <p:cNvPr name="Freeform 89" id="89"/>
             <p:cNvSpPr/>
             <p:nvPr/>
           </p:nvSpPr>
@@ -13167,7 +13910,7 @@
         </p:sp>
         <p:sp>
           <p:nvSpPr>
-            <p:cNvPr name="TextBox 86" id="86"/>
+            <p:cNvPr name="TextBox 90" id="90"/>
             <p:cNvSpPr txBox="true"/>
             <p:nvPr/>
           </p:nvSpPr>
@@ -13207,7 +13950,7 @@
       </p:grpSp>
       <p:grpSp>
         <p:nvGrpSpPr>
-          <p:cNvPr name="Group 87" id="87"/>
+          <p:cNvPr name="Group 91" id="91"/>
           <p:cNvGrpSpPr/>
           <p:nvPr/>
         </p:nvGrpSpPr>
@@ -13221,7 +13964,7 @@
         </p:grpSpPr>
         <p:sp>
           <p:nvSpPr>
-            <p:cNvPr name="Freeform 88" id="88"/>
+            <p:cNvPr name="Freeform 92" id="92"/>
             <p:cNvSpPr/>
             <p:nvPr/>
           </p:nvSpPr>
@@ -13264,7 +14007,7 @@
         </p:sp>
         <p:sp>
           <p:nvSpPr>
-            <p:cNvPr name="Freeform 89" id="89"/>
+            <p:cNvPr name="Freeform 93" id="93"/>
             <p:cNvSpPr/>
             <p:nvPr/>
           </p:nvSpPr>
@@ -13316,7 +14059,7 @@
         </p:sp>
         <p:sp>
           <p:nvSpPr>
-            <p:cNvPr name="TextBox 90" id="90"/>
+            <p:cNvPr name="TextBox 94" id="94"/>
             <p:cNvSpPr txBox="true"/>
             <p:nvPr/>
           </p:nvSpPr>
@@ -13356,7 +14099,7 @@
       </p:grpSp>
       <p:sp>
         <p:nvSpPr>
-          <p:cNvPr name="TextBox 91" id="91"/>
+          <p:cNvPr name="TextBox 95" id="95"/>
           <p:cNvSpPr txBox="true"/>
           <p:nvPr/>
         </p:nvSpPr>
@@ -13397,7 +14140,7 @@
       </p:sp>
       <p:sp>
         <p:nvSpPr>
-          <p:cNvPr name="AutoShape 92" id="92"/>
+          <p:cNvPr name="AutoShape 96" id="96"/>
           <p:cNvSpPr/>
           <p:nvPr/>
         </p:nvSpPr>
@@ -13524,9 +14267,174 @@
           </p:spPr>
         </p:sp>
       </p:grpSp>
-      <p:sp>
-        <p:nvSpPr>
-          <p:cNvPr name="Freeform 5" id="5"/>
+      <p:grpSp>
+        <p:nvGrpSpPr>
+          <p:cNvPr name="Group 5" id="5"/>
+          <p:cNvGrpSpPr/>
+          <p:nvPr/>
+        </p:nvGrpSpPr>
+        <p:grpSpPr>
+          <a:xfrm rot="0">
+            <a:off x="0" y="0"/>
+            <a:ext cx="12192000" cy="6858000"/>
+            <a:chOff x="0" y="0"/>
+            <a:chExt cx="16256000" cy="9144000"/>
+          </a:xfrm>
+        </p:grpSpPr>
+        <p:sp>
+          <p:nvSpPr>
+            <p:cNvPr name="Freeform 6" id="6"/>
+            <p:cNvSpPr/>
+            <p:nvPr/>
+          </p:nvSpPr>
+          <p:spPr>
+            <a:xfrm flipH="false" flipV="false" rot="0">
+              <a:off x="0" y="0"/>
+              <a:ext cx="16256000" cy="9144000"/>
+            </a:xfrm>
+            <a:custGeom>
+              <a:avLst/>
+              <a:gdLst/>
+              <a:ahLst/>
+              <a:cxnLst/>
+              <a:rect r="r" b="b" t="t" l="l"/>
+              <a:pathLst>
+                <a:path h="9144000" w="16256000">
+                  <a:moveTo>
+                    <a:pt x="0" y="0"/>
+                  </a:moveTo>
+                  <a:lnTo>
+                    <a:pt x="16256000" y="0"/>
+                  </a:lnTo>
+                  <a:lnTo>
+                    <a:pt x="16256000" y="9144000"/>
+                  </a:lnTo>
+                  <a:lnTo>
+                    <a:pt x="0" y="9144000"/>
+                  </a:lnTo>
+                  <a:lnTo>
+                    <a:pt x="0" y="0"/>
+                  </a:lnTo>
+                  <a:close/>
+                </a:path>
+              </a:pathLst>
+            </a:custGeom>
+            <a:blipFill>
+              <a:blip r:embed="rId4">
+                <a:extLst>
+                  <a:ext uri="{96DAC541-7B7A-43D3-8B79-37D633B846F1}">
+                    <asvg:svgBlip xmlns:asvg="http://schemas.microsoft.com/office/drawing/2016/SVG/main" r:embed="rId5"/>
+                  </a:ext>
+                </a:extLst>
+              </a:blip>
+              <a:stretch>
+                <a:fillRect l="0" t="0" r="0" b="0"/>
+              </a:stretch>
+            </a:blipFill>
+          </p:spPr>
+        </p:sp>
+        <p:sp>
+          <p:nvSpPr>
+            <p:cNvPr name="Freeform 7" id="7"/>
+            <p:cNvSpPr/>
+            <p:nvPr/>
+          </p:nvSpPr>
+          <p:spPr>
+            <a:xfrm flipH="false" flipV="false" rot="0">
+              <a:off x="11887200" y="0"/>
+              <a:ext cx="3556000" cy="803656"/>
+            </a:xfrm>
+            <a:custGeom>
+              <a:avLst/>
+              <a:gdLst/>
+              <a:ahLst/>
+              <a:cxnLst/>
+              <a:rect r="r" b="b" t="t" l="l"/>
+              <a:pathLst>
+                <a:path h="803656" w="3556000">
+                  <a:moveTo>
+                    <a:pt x="0" y="0"/>
+                  </a:moveTo>
+                  <a:lnTo>
+                    <a:pt x="3556000" y="0"/>
+                  </a:lnTo>
+                  <a:lnTo>
+                    <a:pt x="3556000" y="803656"/>
+                  </a:lnTo>
+                  <a:lnTo>
+                    <a:pt x="0" y="803656"/>
+                  </a:lnTo>
+                  <a:lnTo>
+                    <a:pt x="0" y="0"/>
+                  </a:lnTo>
+                  <a:close/>
+                </a:path>
+              </a:pathLst>
+            </a:custGeom>
+            <a:blipFill>
+              <a:blip r:embed="rId6"/>
+              <a:stretch>
+                <a:fillRect l="0" t="0" r="0" b="0"/>
+              </a:stretch>
+            </a:blipFill>
+          </p:spPr>
+        </p:sp>
+        <p:sp>
+          <p:nvSpPr>
+            <p:cNvPr name="Freeform 8" id="8"/>
+            <p:cNvSpPr/>
+            <p:nvPr/>
+          </p:nvSpPr>
+          <p:spPr>
+            <a:xfrm flipH="false" flipV="false" rot="0">
+              <a:off x="812800" y="127000"/>
+              <a:ext cx="2413000" cy="504536"/>
+            </a:xfrm>
+            <a:custGeom>
+              <a:avLst/>
+              <a:gdLst/>
+              <a:ahLst/>
+              <a:cxnLst/>
+              <a:rect r="r" b="b" t="t" l="l"/>
+              <a:pathLst>
+                <a:path h="504536" w="2413000">
+                  <a:moveTo>
+                    <a:pt x="0" y="0"/>
+                  </a:moveTo>
+                  <a:lnTo>
+                    <a:pt x="2413000" y="0"/>
+                  </a:lnTo>
+                  <a:lnTo>
+                    <a:pt x="2413000" y="504536"/>
+                  </a:lnTo>
+                  <a:lnTo>
+                    <a:pt x="0" y="504536"/>
+                  </a:lnTo>
+                  <a:lnTo>
+                    <a:pt x="0" y="0"/>
+                  </a:lnTo>
+                  <a:close/>
+                </a:path>
+              </a:pathLst>
+            </a:custGeom>
+            <a:blipFill>
+              <a:blip r:embed="rId7">
+                <a:extLst>
+                  <a:ext uri="{96DAC541-7B7A-43D3-8B79-37D633B846F1}">
+                    <asvg:svgBlip xmlns:asvg="http://schemas.microsoft.com/office/drawing/2016/SVG/main" r:embed="rId8"/>
+                  </a:ext>
+                </a:extLst>
+              </a:blip>
+              <a:stretch>
+                <a:fillRect l="0" t="0" r="0" b="0"/>
+              </a:stretch>
+            </a:blipFill>
+          </p:spPr>
+        </p:sp>
+      </p:grpSp>
+      <p:sp>
+        <p:nvSpPr>
+          <p:cNvPr name="Freeform 9" id="9"/>
           <p:cNvSpPr/>
           <p:nvPr/>
         </p:nvSpPr>
@@ -13563,10 +14471,10 @@
             </a:pathLst>
           </a:custGeom>
           <a:blipFill>
-            <a:blip r:embed="rId4">
+            <a:blip r:embed="rId9">
               <a:extLst>
                 <a:ext uri="{96DAC541-7B7A-43D3-8B79-37D633B846F1}">
-                  <asvg:svgBlip xmlns:asvg="http://schemas.microsoft.com/office/drawing/2016/SVG/main" r:embed="rId5"/>
+                  <asvg:svgBlip xmlns:asvg="http://schemas.microsoft.com/office/drawing/2016/SVG/main" r:embed="rId10"/>
                 </a:ext>
               </a:extLst>
             </a:blip>
@@ -13578,7 +14486,59 @@
       </p:sp>
       <p:sp>
         <p:nvSpPr>
-          <p:cNvPr name="TextBox 6" id="6"/>
+          <p:cNvPr name="Freeform 10" id="10"/>
+          <p:cNvSpPr/>
+          <p:nvPr/>
+        </p:nvSpPr>
+        <p:spPr>
+          <a:xfrm flipH="false" flipV="false" rot="0">
+            <a:off x="9667875" y="2971800"/>
+            <a:ext cx="342900" cy="457755"/>
+          </a:xfrm>
+          <a:custGeom>
+            <a:avLst/>
+            <a:gdLst/>
+            <a:ahLst/>
+            <a:cxnLst/>
+            <a:rect r="r" b="b" t="t" l="l"/>
+            <a:pathLst>
+              <a:path h="457755" w="342900">
+                <a:moveTo>
+                  <a:pt x="0" y="0"/>
+                </a:moveTo>
+                <a:lnTo>
+                  <a:pt x="342900" y="0"/>
+                </a:lnTo>
+                <a:lnTo>
+                  <a:pt x="342900" y="457755"/>
+                </a:lnTo>
+                <a:lnTo>
+                  <a:pt x="0" y="457755"/>
+                </a:lnTo>
+                <a:lnTo>
+                  <a:pt x="0" y="0"/>
+                </a:lnTo>
+                <a:close/>
+              </a:path>
+            </a:pathLst>
+          </a:custGeom>
+          <a:blipFill>
+            <a:blip r:embed="rId11">
+              <a:extLst>
+                <a:ext uri="{96DAC541-7B7A-43D3-8B79-37D633B846F1}">
+                  <asvg:svgBlip xmlns:asvg="http://schemas.microsoft.com/office/drawing/2016/SVG/main" r:embed="rId12"/>
+                </a:ext>
+              </a:extLst>
+            </a:blip>
+            <a:stretch>
+              <a:fillRect l="0" t="0" r="0" b="0"/>
+            </a:stretch>
+          </a:blipFill>
+        </p:spPr>
+      </p:sp>
+      <p:sp>
+        <p:nvSpPr>
+          <p:cNvPr name="TextBox 11" id="11"/>
           <p:cNvSpPr txBox="true"/>
           <p:nvPr/>
         </p:nvSpPr>
@@ -13619,48 +14579,7 @@
       </p:sp>
       <p:sp>
         <p:nvSpPr>
-          <p:cNvPr name="TextBox 7" id="7"/>
-          <p:cNvSpPr txBox="true"/>
-          <p:nvPr/>
-        </p:nvSpPr>
-        <p:spPr>
-          <a:xfrm rot="0">
-            <a:off x="609600" y="533400"/>
-            <a:ext cx="5715000" cy="393382"/>
-          </a:xfrm>
-          <a:prstGeom prst="rect">
-            <a:avLst/>
-          </a:prstGeom>
-        </p:spPr>
-        <p:txBody>
-          <a:bodyPr anchor="t" rtlCol="false" tIns="0" lIns="0" bIns="0" rIns="0">
-            <a:spAutoFit/>
-          </a:bodyPr>
-          <a:lstStyle/>
-          <a:p>
-            <a:pPr algn="l">
-              <a:lnSpc>
-                <a:spcPts val="3202"/>
-              </a:lnSpc>
-            </a:pPr>
-            <a:r>
-              <a:rPr lang="en-US" b="true" sz="2625">
-                <a:solidFill>
-                  <a:srgbClr val="087E70"/>
-                </a:solidFill>
-                <a:latin typeface="DM Sans Bold"/>
-                <a:ea typeface="DM Sans Bold"/>
-                <a:cs typeface="DM Sans Bold"/>
-                <a:sym typeface="DM Sans Bold"/>
-              </a:rPr>
-              <a:t>backtrack.</a:t>
-            </a:r>
-          </a:p>
-        </p:txBody>
-      </p:sp>
-      <p:sp>
-        <p:nvSpPr>
-          <p:cNvPr name="TextBox 8" id="8"/>
+          <p:cNvPr name="TextBox 12" id="12"/>
           <p:cNvSpPr txBox="true"/>
           <p:nvPr/>
         </p:nvSpPr>
@@ -13720,7 +14639,7 @@
       </p:sp>
       <p:sp>
         <p:nvSpPr>
-          <p:cNvPr name="TextBox 9" id="9"/>
+          <p:cNvPr name="TextBox 13" id="13"/>
           <p:cNvSpPr txBox="true"/>
           <p:nvPr/>
         </p:nvSpPr>
@@ -13761,7 +14680,7 @@
       </p:sp>
       <p:sp>
         <p:nvSpPr>
-          <p:cNvPr name="TextBox 10" id="10"/>
+          <p:cNvPr name="TextBox 14" id="14"/>
           <p:cNvSpPr txBox="true"/>
           <p:nvPr/>
         </p:nvSpPr>
@@ -13802,7 +14721,7 @@
       </p:sp>
       <p:sp>
         <p:nvSpPr>
-          <p:cNvPr name="TextBox 11" id="11"/>
+          <p:cNvPr name="TextBox 15" id="15"/>
           <p:cNvSpPr txBox="true"/>
           <p:nvPr/>
         </p:nvSpPr>
@@ -13946,9 +14865,174 @@
           </p:spPr>
         </p:sp>
       </p:grpSp>
-      <p:sp>
-        <p:nvSpPr>
-          <p:cNvPr name="TextBox 5" id="5"/>
+      <p:grpSp>
+        <p:nvGrpSpPr>
+          <p:cNvPr name="Group 5" id="5"/>
+          <p:cNvGrpSpPr/>
+          <p:nvPr/>
+        </p:nvGrpSpPr>
+        <p:grpSpPr>
+          <a:xfrm rot="0">
+            <a:off x="0" y="0"/>
+            <a:ext cx="12192000" cy="6858000"/>
+            <a:chOff x="0" y="0"/>
+            <a:chExt cx="16256000" cy="9144000"/>
+          </a:xfrm>
+        </p:grpSpPr>
+        <p:sp>
+          <p:nvSpPr>
+            <p:cNvPr name="Freeform 6" id="6"/>
+            <p:cNvSpPr/>
+            <p:nvPr/>
+          </p:nvSpPr>
+          <p:spPr>
+            <a:xfrm flipH="false" flipV="false" rot="0">
+              <a:off x="0" y="0"/>
+              <a:ext cx="16256000" cy="9144000"/>
+            </a:xfrm>
+            <a:custGeom>
+              <a:avLst/>
+              <a:gdLst/>
+              <a:ahLst/>
+              <a:cxnLst/>
+              <a:rect r="r" b="b" t="t" l="l"/>
+              <a:pathLst>
+                <a:path h="9144000" w="16256000">
+                  <a:moveTo>
+                    <a:pt x="0" y="0"/>
+                  </a:moveTo>
+                  <a:lnTo>
+                    <a:pt x="16256000" y="0"/>
+                  </a:lnTo>
+                  <a:lnTo>
+                    <a:pt x="16256000" y="9144000"/>
+                  </a:lnTo>
+                  <a:lnTo>
+                    <a:pt x="0" y="9144000"/>
+                  </a:lnTo>
+                  <a:lnTo>
+                    <a:pt x="0" y="0"/>
+                  </a:lnTo>
+                  <a:close/>
+                </a:path>
+              </a:pathLst>
+            </a:custGeom>
+            <a:blipFill>
+              <a:blip r:embed="rId4">
+                <a:extLst>
+                  <a:ext uri="{96DAC541-7B7A-43D3-8B79-37D633B846F1}">
+                    <asvg:svgBlip xmlns:asvg="http://schemas.microsoft.com/office/drawing/2016/SVG/main" r:embed="rId5"/>
+                  </a:ext>
+                </a:extLst>
+              </a:blip>
+              <a:stretch>
+                <a:fillRect l="0" t="0" r="0" b="0"/>
+              </a:stretch>
+            </a:blipFill>
+          </p:spPr>
+        </p:sp>
+        <p:sp>
+          <p:nvSpPr>
+            <p:cNvPr name="Freeform 7" id="7"/>
+            <p:cNvSpPr/>
+            <p:nvPr/>
+          </p:nvSpPr>
+          <p:spPr>
+            <a:xfrm flipH="false" flipV="false" rot="0">
+              <a:off x="11887200" y="0"/>
+              <a:ext cx="3556000" cy="803656"/>
+            </a:xfrm>
+            <a:custGeom>
+              <a:avLst/>
+              <a:gdLst/>
+              <a:ahLst/>
+              <a:cxnLst/>
+              <a:rect r="r" b="b" t="t" l="l"/>
+              <a:pathLst>
+                <a:path h="803656" w="3556000">
+                  <a:moveTo>
+                    <a:pt x="0" y="0"/>
+                  </a:moveTo>
+                  <a:lnTo>
+                    <a:pt x="3556000" y="0"/>
+                  </a:lnTo>
+                  <a:lnTo>
+                    <a:pt x="3556000" y="803656"/>
+                  </a:lnTo>
+                  <a:lnTo>
+                    <a:pt x="0" y="803656"/>
+                  </a:lnTo>
+                  <a:lnTo>
+                    <a:pt x="0" y="0"/>
+                  </a:lnTo>
+                  <a:close/>
+                </a:path>
+              </a:pathLst>
+            </a:custGeom>
+            <a:blipFill>
+              <a:blip r:embed="rId6"/>
+              <a:stretch>
+                <a:fillRect l="0" t="0" r="0" b="0"/>
+              </a:stretch>
+            </a:blipFill>
+          </p:spPr>
+        </p:sp>
+        <p:sp>
+          <p:nvSpPr>
+            <p:cNvPr name="Freeform 8" id="8"/>
+            <p:cNvSpPr/>
+            <p:nvPr/>
+          </p:nvSpPr>
+          <p:spPr>
+            <a:xfrm flipH="false" flipV="false" rot="0">
+              <a:off x="812800" y="127000"/>
+              <a:ext cx="2413000" cy="504536"/>
+            </a:xfrm>
+            <a:custGeom>
+              <a:avLst/>
+              <a:gdLst/>
+              <a:ahLst/>
+              <a:cxnLst/>
+              <a:rect r="r" b="b" t="t" l="l"/>
+              <a:pathLst>
+                <a:path h="504536" w="2413000">
+                  <a:moveTo>
+                    <a:pt x="0" y="0"/>
+                  </a:moveTo>
+                  <a:lnTo>
+                    <a:pt x="2413000" y="0"/>
+                  </a:lnTo>
+                  <a:lnTo>
+                    <a:pt x="2413000" y="504536"/>
+                  </a:lnTo>
+                  <a:lnTo>
+                    <a:pt x="0" y="504536"/>
+                  </a:lnTo>
+                  <a:lnTo>
+                    <a:pt x="0" y="0"/>
+                  </a:lnTo>
+                  <a:close/>
+                </a:path>
+              </a:pathLst>
+            </a:custGeom>
+            <a:blipFill>
+              <a:blip r:embed="rId7">
+                <a:extLst>
+                  <a:ext uri="{96DAC541-7B7A-43D3-8B79-37D633B846F1}">
+                    <asvg:svgBlip xmlns:asvg="http://schemas.microsoft.com/office/drawing/2016/SVG/main" r:embed="rId8"/>
+                  </a:ext>
+                </a:extLst>
+              </a:blip>
+              <a:stretch>
+                <a:fillRect l="0" t="0" r="0" b="0"/>
+              </a:stretch>
+            </a:blipFill>
+          </p:spPr>
+        </p:sp>
+      </p:grpSp>
+      <p:sp>
+        <p:nvSpPr>
+          <p:cNvPr name="TextBox 9" id="9"/>
           <p:cNvSpPr txBox="true"/>
           <p:nvPr/>
         </p:nvSpPr>
@@ -13989,7 +15073,7 @@
       </p:sp>
       <p:sp>
         <p:nvSpPr>
-          <p:cNvPr name="TextBox 6" id="6"/>
+          <p:cNvPr name="TextBox 10" id="10"/>
           <p:cNvSpPr txBox="true"/>
           <p:nvPr/>
         </p:nvSpPr>
@@ -14030,7 +15114,7 @@
       </p:sp>
       <p:sp>
         <p:nvSpPr>
-          <p:cNvPr name="TextBox 7" id="7"/>
+          <p:cNvPr name="TextBox 11" id="11"/>
           <p:cNvSpPr txBox="true"/>
           <p:nvPr/>
         </p:nvSpPr>
@@ -14063,7 +15147,7 @@
                 <a:ea typeface="DM Sans"/>
                 <a:cs typeface="DM Sans"/>
                 <a:sym typeface="DM Sans"/>
-                <a:hlinkClick r:id="rId4" tooltip="https://support.khanacademy.org/hc/en-us/articles/360031129891-What-reporting-options-are-available-on-Khan-Academy-for-teachers-to-track-student-performance"/>
+                <a:hlinkClick r:id="rId9" tooltip="https://support.khanacademy.org/hc/en-us/articles/360031129891-What-reporting-options-are-available-on-Khan-Academy-for-teachers-to-track-student-performance"/>
               </a:rPr>
               <a:t>Khan Academy teacher reports</a:t>
             </a:r>
@@ -14072,7 +15156,7 @@
       </p:sp>
       <p:sp>
         <p:nvSpPr>
-          <p:cNvPr name="TextBox 8" id="8"/>
+          <p:cNvPr name="TextBox 12" id="12"/>
           <p:cNvSpPr txBox="true"/>
           <p:nvPr/>
         </p:nvSpPr>
@@ -14105,7 +15189,7 @@
                 <a:ea typeface="DM Sans"/>
                 <a:cs typeface="DM Sans"/>
                 <a:sym typeface="DM Sans"/>
-                <a:hlinkClick r:id="rId5" tooltip="https://www.mheducation.com/unitas/school/explore/sites/aleks/customizing-custom-objectives.pdf"/>
+                <a:hlinkClick r:id="rId10" tooltip="https://www.mheducation.com/unitas/school/explore/sites/aleks/customizing-custom-objectives.pdf"/>
               </a:rPr>
               <a:t>ALEKS custom objectives</a:t>
             </a:r>
@@ -14114,7 +15198,7 @@
       </p:sp>
       <p:sp>
         <p:nvSpPr>
-          <p:cNvPr name="TextBox 9" id="9"/>
+          <p:cNvPr name="TextBox 13" id="13"/>
           <p:cNvSpPr txBox="true"/>
           <p:nvPr/>
         </p:nvSpPr>
@@ -14147,7 +15231,7 @@
                 <a:ea typeface="DM Sans"/>
                 <a:cs typeface="DM Sans"/>
                 <a:sym typeface="DM Sans"/>
-                <a:hlinkClick r:id="rId6" tooltip="https://blog.google/innovation-and-ai/products/gemini-app/gemini-study-notebooks/"/>
+                <a:hlinkClick r:id="rId11" tooltip="https://blog.google/innovation-and-ai/products/gemini-app/gemini-study-notebooks/"/>
               </a:rPr>
               <a:t>Gemini study notebooks · 2026</a:t>
             </a:r>
@@ -14156,7 +15240,7 @@
       </p:sp>
       <p:sp>
         <p:nvSpPr>
-          <p:cNvPr name="TextBox 10" id="10"/>
+          <p:cNvPr name="TextBox 14" id="14"/>
           <p:cNvSpPr txBox="true"/>
           <p:nvPr/>
         </p:nvSpPr>
@@ -14189,7 +15273,7 @@
                 <a:ea typeface="DM Sans"/>
                 <a:cs typeface="DM Sans"/>
                 <a:sym typeface="DM Sans"/>
-                <a:hlinkClick r:id="rId7" tooltip="https://ies.ed.gov/ncee/wwc/practiceguide/1"/>
+                <a:hlinkClick r:id="rId12" tooltip="https://ies.ed.gov/ncee/wwc/practiceguide/1"/>
               </a:rPr>
               <a:t>IES learning practice guide</a:t>
             </a:r>
@@ -14198,7 +15282,7 @@
       </p:sp>
       <p:sp>
         <p:nvSpPr>
-          <p:cNvPr name="TextBox 11" id="11"/>
+          <p:cNvPr name="TextBox 15" id="15"/>
           <p:cNvSpPr txBox="true"/>
           <p:nvPr/>
         </p:nvSpPr>
@@ -14231,7 +15315,7 @@
                 <a:ea typeface="DM Sans"/>
                 <a:cs typeface="DM Sans"/>
                 <a:sym typeface="DM Sans"/>
-                <a:hlinkClick r:id="rId8" tooltip="https://doi.org/10.1038/s44159-022-00089-1"/>
+                <a:hlinkClick r:id="rId13" tooltip="https://doi.org/10.1038/s44159-022-00089-1"/>
               </a:rPr>
               <a:t>Spacing and retrieval · 2022</a:t>
             </a:r>
@@ -14240,7 +15324,7 @@
       </p:sp>
       <p:sp>
         <p:nvSpPr>
-          <p:cNvPr name="TextBox 12" id="12"/>
+          <p:cNvPr name="TextBox 16" id="16"/>
           <p:cNvSpPr txBox="true"/>
           <p:nvPr/>
         </p:nvSpPr>
@@ -14273,7 +15357,7 @@
                 <a:ea typeface="DM Sans"/>
                 <a:cs typeface="DM Sans"/>
                 <a:sym typeface="DM Sans"/>
-                <a:hlinkClick r:id="rId9" tooltip="https://doi.org/10.1007/s10763-021-10207-9"/>
+                <a:hlinkClick r:id="rId14" tooltip="https://doi.org/10.1007/s10763-021-10207-9"/>
               </a:rPr>
               <a:t>Confidence assessment · Foster</a:t>
             </a:r>
@@ -14282,7 +15366,7 @@
       </p:sp>
       <p:sp>
         <p:nvSpPr>
-          <p:cNvPr name="TextBox 13" id="13"/>
+          <p:cNvPr name="TextBox 17" id="17"/>
           <p:cNvSpPr txBox="true"/>
           <p:nvPr/>
         </p:nvSpPr>
@@ -14315,7 +15399,7 @@
                 <a:ea typeface="DM Sans"/>
                 <a:cs typeface="DM Sans"/>
                 <a:sym typeface="DM Sans"/>
-                <a:hlinkClick r:id="rId10" tooltip="https://selfdeterminationtheory.org/topics/application-education/"/>
+                <a:hlinkClick r:id="rId15" tooltip="https://selfdeterminationtheory.org/topics/application-education/"/>
               </a:rPr>
               <a:t>Self-Determination Theory in education</a:t>
             </a:r>
@@ -14324,7 +15408,7 @@
       </p:sp>
       <p:sp>
         <p:nvSpPr>
-          <p:cNvPr name="AutoShape 14" id="14"/>
+          <p:cNvPr name="AutoShape 18" id="18"/>
           <p:cNvSpPr/>
           <p:nvPr/>
         </p:nvSpPr>
@@ -14451,9 +15535,174 @@
           </p:spPr>
         </p:sp>
       </p:grpSp>
-      <p:sp>
-        <p:nvSpPr>
-          <p:cNvPr name="TextBox 5" id="5"/>
+      <p:grpSp>
+        <p:nvGrpSpPr>
+          <p:cNvPr name="Group 5" id="5"/>
+          <p:cNvGrpSpPr/>
+          <p:nvPr/>
+        </p:nvGrpSpPr>
+        <p:grpSpPr>
+          <a:xfrm rot="0">
+            <a:off x="0" y="0"/>
+            <a:ext cx="12192000" cy="6858000"/>
+            <a:chOff x="0" y="0"/>
+            <a:chExt cx="16256000" cy="9144000"/>
+          </a:xfrm>
+        </p:grpSpPr>
+        <p:sp>
+          <p:nvSpPr>
+            <p:cNvPr name="Freeform 6" id="6"/>
+            <p:cNvSpPr/>
+            <p:nvPr/>
+          </p:nvSpPr>
+          <p:spPr>
+            <a:xfrm flipH="false" flipV="false" rot="0">
+              <a:off x="0" y="0"/>
+              <a:ext cx="16256000" cy="9144000"/>
+            </a:xfrm>
+            <a:custGeom>
+              <a:avLst/>
+              <a:gdLst/>
+              <a:ahLst/>
+              <a:cxnLst/>
+              <a:rect r="r" b="b" t="t" l="l"/>
+              <a:pathLst>
+                <a:path h="9144000" w="16256000">
+                  <a:moveTo>
+                    <a:pt x="0" y="0"/>
+                  </a:moveTo>
+                  <a:lnTo>
+                    <a:pt x="16256000" y="0"/>
+                  </a:lnTo>
+                  <a:lnTo>
+                    <a:pt x="16256000" y="9144000"/>
+                  </a:lnTo>
+                  <a:lnTo>
+                    <a:pt x="0" y="9144000"/>
+                  </a:lnTo>
+                  <a:lnTo>
+                    <a:pt x="0" y="0"/>
+                  </a:lnTo>
+                  <a:close/>
+                </a:path>
+              </a:pathLst>
+            </a:custGeom>
+            <a:blipFill>
+              <a:blip r:embed="rId4">
+                <a:extLst>
+                  <a:ext uri="{96DAC541-7B7A-43D3-8B79-37D633B846F1}">
+                    <asvg:svgBlip xmlns:asvg="http://schemas.microsoft.com/office/drawing/2016/SVG/main" r:embed="rId5"/>
+                  </a:ext>
+                </a:extLst>
+              </a:blip>
+              <a:stretch>
+                <a:fillRect l="0" t="0" r="0" b="0"/>
+              </a:stretch>
+            </a:blipFill>
+          </p:spPr>
+        </p:sp>
+        <p:sp>
+          <p:nvSpPr>
+            <p:cNvPr name="Freeform 7" id="7"/>
+            <p:cNvSpPr/>
+            <p:nvPr/>
+          </p:nvSpPr>
+          <p:spPr>
+            <a:xfrm flipH="false" flipV="false" rot="0">
+              <a:off x="11887200" y="0"/>
+              <a:ext cx="3556000" cy="803656"/>
+            </a:xfrm>
+            <a:custGeom>
+              <a:avLst/>
+              <a:gdLst/>
+              <a:ahLst/>
+              <a:cxnLst/>
+              <a:rect r="r" b="b" t="t" l="l"/>
+              <a:pathLst>
+                <a:path h="803656" w="3556000">
+                  <a:moveTo>
+                    <a:pt x="0" y="0"/>
+                  </a:moveTo>
+                  <a:lnTo>
+                    <a:pt x="3556000" y="0"/>
+                  </a:lnTo>
+                  <a:lnTo>
+                    <a:pt x="3556000" y="803656"/>
+                  </a:lnTo>
+                  <a:lnTo>
+                    <a:pt x="0" y="803656"/>
+                  </a:lnTo>
+                  <a:lnTo>
+                    <a:pt x="0" y="0"/>
+                  </a:lnTo>
+                  <a:close/>
+                </a:path>
+              </a:pathLst>
+            </a:custGeom>
+            <a:blipFill>
+              <a:blip r:embed="rId6"/>
+              <a:stretch>
+                <a:fillRect l="0" t="0" r="0" b="0"/>
+              </a:stretch>
+            </a:blipFill>
+          </p:spPr>
+        </p:sp>
+        <p:sp>
+          <p:nvSpPr>
+            <p:cNvPr name="Freeform 8" id="8"/>
+            <p:cNvSpPr/>
+            <p:nvPr/>
+          </p:nvSpPr>
+          <p:spPr>
+            <a:xfrm flipH="false" flipV="false" rot="0">
+              <a:off x="812800" y="127000"/>
+              <a:ext cx="2413000" cy="504536"/>
+            </a:xfrm>
+            <a:custGeom>
+              <a:avLst/>
+              <a:gdLst/>
+              <a:ahLst/>
+              <a:cxnLst/>
+              <a:rect r="r" b="b" t="t" l="l"/>
+              <a:pathLst>
+                <a:path h="504536" w="2413000">
+                  <a:moveTo>
+                    <a:pt x="0" y="0"/>
+                  </a:moveTo>
+                  <a:lnTo>
+                    <a:pt x="2413000" y="0"/>
+                  </a:lnTo>
+                  <a:lnTo>
+                    <a:pt x="2413000" y="504536"/>
+                  </a:lnTo>
+                  <a:lnTo>
+                    <a:pt x="0" y="504536"/>
+                  </a:lnTo>
+                  <a:lnTo>
+                    <a:pt x="0" y="0"/>
+                  </a:lnTo>
+                  <a:close/>
+                </a:path>
+              </a:pathLst>
+            </a:custGeom>
+            <a:blipFill>
+              <a:blip r:embed="rId7">
+                <a:extLst>
+                  <a:ext uri="{96DAC541-7B7A-43D3-8B79-37D633B846F1}">
+                    <asvg:svgBlip xmlns:asvg="http://schemas.microsoft.com/office/drawing/2016/SVG/main" r:embed="rId8"/>
+                  </a:ext>
+                </a:extLst>
+              </a:blip>
+              <a:stretch>
+                <a:fillRect l="0" t="0" r="0" b="0"/>
+              </a:stretch>
+            </a:blipFill>
+          </p:spPr>
+        </p:sp>
+      </p:grpSp>
+      <p:sp>
+        <p:nvSpPr>
+          <p:cNvPr name="TextBox 9" id="9"/>
           <p:cNvSpPr txBox="true"/>
           <p:nvPr/>
         </p:nvSpPr>
@@ -14494,7 +15743,7 @@
       </p:sp>
       <p:sp>
         <p:nvSpPr>
-          <p:cNvPr name="TextBox 6" id="6"/>
+          <p:cNvPr name="TextBox 10" id="10"/>
           <p:cNvSpPr txBox="true"/>
           <p:nvPr/>
         </p:nvSpPr>
@@ -14535,7 +15784,7 @@
       </p:sp>
       <p:sp>
         <p:nvSpPr>
-          <p:cNvPr name="TextBox 7" id="7"/>
+          <p:cNvPr name="TextBox 11" id="11"/>
           <p:cNvSpPr txBox="true"/>
           <p:nvPr/>
         </p:nvSpPr>
@@ -14576,7 +15825,7 @@
       </p:sp>
       <p:sp>
         <p:nvSpPr>
-          <p:cNvPr name="AutoShape 8" id="8"/>
+          <p:cNvPr name="AutoShape 12" id="12"/>
           <p:cNvSpPr/>
           <p:nvPr/>
         </p:nvSpPr>
@@ -14595,7 +15844,7 @@
       </p:sp>
       <p:sp>
         <p:nvSpPr>
-          <p:cNvPr name="TextBox 9" id="9"/>
+          <p:cNvPr name="TextBox 13" id="13"/>
           <p:cNvSpPr txBox="true"/>
           <p:nvPr/>
         </p:nvSpPr>
@@ -14636,7 +15885,7 @@
       </p:sp>
       <p:sp>
         <p:nvSpPr>
-          <p:cNvPr name="TextBox 10" id="10"/>
+          <p:cNvPr name="TextBox 14" id="14"/>
           <p:cNvSpPr txBox="true"/>
           <p:nvPr/>
         </p:nvSpPr>
@@ -14677,7 +15926,7 @@
       </p:sp>
       <p:sp>
         <p:nvSpPr>
-          <p:cNvPr name="TextBox 11" id="11"/>
+          <p:cNvPr name="TextBox 15" id="15"/>
           <p:cNvSpPr txBox="true"/>
           <p:nvPr/>
         </p:nvSpPr>
@@ -14718,7 +15967,7 @@
       </p:sp>
       <p:sp>
         <p:nvSpPr>
-          <p:cNvPr name="AutoShape 12" id="12"/>
+          <p:cNvPr name="AutoShape 16" id="16"/>
           <p:cNvSpPr/>
           <p:nvPr/>
         </p:nvSpPr>
@@ -14737,7 +15986,7 @@
       </p:sp>
       <p:grpSp>
         <p:nvGrpSpPr>
-          <p:cNvPr name="Group 13" id="13"/>
+          <p:cNvPr name="Group 17" id="17"/>
           <p:cNvGrpSpPr/>
           <p:nvPr/>
         </p:nvGrpSpPr>
@@ -14751,7 +16000,7 @@
         </p:grpSpPr>
         <p:sp>
           <p:nvSpPr>
-            <p:cNvPr name="Freeform 14" id="14"/>
+            <p:cNvPr name="Freeform 18" id="18"/>
             <p:cNvSpPr/>
             <p:nvPr/>
           </p:nvSpPr>
@@ -14809,7 +16058,7 @@
       </p:grpSp>
       <p:grpSp>
         <p:nvGrpSpPr>
-          <p:cNvPr name="Group 15" id="15"/>
+          <p:cNvPr name="Group 19" id="19"/>
           <p:cNvGrpSpPr/>
           <p:nvPr/>
         </p:nvGrpSpPr>
@@ -14823,7 +16072,7 @@
         </p:grpSpPr>
         <p:sp>
           <p:nvSpPr>
-            <p:cNvPr name="Freeform 16" id="16"/>
+            <p:cNvPr name="Freeform 20" id="20"/>
             <p:cNvSpPr/>
             <p:nvPr/>
           </p:nvSpPr>
@@ -14881,7 +16130,7 @@
       </p:grpSp>
       <p:sp>
         <p:nvSpPr>
-          <p:cNvPr name="TextBox 17" id="17"/>
+          <p:cNvPr name="TextBox 21" id="21"/>
           <p:cNvSpPr txBox="true"/>
           <p:nvPr/>
         </p:nvSpPr>
@@ -14922,7 +16171,7 @@
       </p:sp>
       <p:sp>
         <p:nvSpPr>
-          <p:cNvPr name="AutoShape 18" id="18"/>
+          <p:cNvPr name="AutoShape 22" id="22"/>
           <p:cNvSpPr/>
           <p:nvPr/>
         </p:nvSpPr>
@@ -14941,7 +16190,7 @@
       </p:sp>
       <p:sp>
         <p:nvSpPr>
-          <p:cNvPr name="TextBox 19" id="19"/>
+          <p:cNvPr name="TextBox 23" id="23"/>
           <p:cNvSpPr txBox="true"/>
           <p:nvPr/>
         </p:nvSpPr>
@@ -14982,7 +16231,7 @@
       </p:sp>
       <p:sp>
         <p:nvSpPr>
-          <p:cNvPr name="TextBox 20" id="20"/>
+          <p:cNvPr name="TextBox 24" id="24"/>
           <p:cNvSpPr txBox="true"/>
           <p:nvPr/>
         </p:nvSpPr>
@@ -15023,7 +16272,7 @@
       </p:sp>
       <p:sp>
         <p:nvSpPr>
-          <p:cNvPr name="TextBox 21" id="21"/>
+          <p:cNvPr name="TextBox 25" id="25"/>
           <p:cNvSpPr txBox="true"/>
           <p:nvPr/>
         </p:nvSpPr>
@@ -15064,7 +16313,7 @@
       </p:sp>
       <p:sp>
         <p:nvSpPr>
-          <p:cNvPr name="AutoShape 22" id="22"/>
+          <p:cNvPr name="AutoShape 26" id="26"/>
           <p:cNvSpPr/>
           <p:nvPr/>
         </p:nvSpPr>
@@ -15191,9 +16440,174 @@
           </p:spPr>
         </p:sp>
       </p:grpSp>
-      <p:sp>
-        <p:nvSpPr>
-          <p:cNvPr name="TextBox 5" id="5"/>
+      <p:grpSp>
+        <p:nvGrpSpPr>
+          <p:cNvPr name="Group 5" id="5"/>
+          <p:cNvGrpSpPr/>
+          <p:nvPr/>
+        </p:nvGrpSpPr>
+        <p:grpSpPr>
+          <a:xfrm rot="0">
+            <a:off x="0" y="0"/>
+            <a:ext cx="12192000" cy="6858000"/>
+            <a:chOff x="0" y="0"/>
+            <a:chExt cx="16256000" cy="9144000"/>
+          </a:xfrm>
+        </p:grpSpPr>
+        <p:sp>
+          <p:nvSpPr>
+            <p:cNvPr name="Freeform 6" id="6"/>
+            <p:cNvSpPr/>
+            <p:nvPr/>
+          </p:nvSpPr>
+          <p:spPr>
+            <a:xfrm flipH="false" flipV="false" rot="0">
+              <a:off x="0" y="0"/>
+              <a:ext cx="16256000" cy="9144000"/>
+            </a:xfrm>
+            <a:custGeom>
+              <a:avLst/>
+              <a:gdLst/>
+              <a:ahLst/>
+              <a:cxnLst/>
+              <a:rect r="r" b="b" t="t" l="l"/>
+              <a:pathLst>
+                <a:path h="9144000" w="16256000">
+                  <a:moveTo>
+                    <a:pt x="0" y="0"/>
+                  </a:moveTo>
+                  <a:lnTo>
+                    <a:pt x="16256000" y="0"/>
+                  </a:lnTo>
+                  <a:lnTo>
+                    <a:pt x="16256000" y="9144000"/>
+                  </a:lnTo>
+                  <a:lnTo>
+                    <a:pt x="0" y="9144000"/>
+                  </a:lnTo>
+                  <a:lnTo>
+                    <a:pt x="0" y="0"/>
+                  </a:lnTo>
+                  <a:close/>
+                </a:path>
+              </a:pathLst>
+            </a:custGeom>
+            <a:blipFill>
+              <a:blip r:embed="rId4">
+                <a:extLst>
+                  <a:ext uri="{96DAC541-7B7A-43D3-8B79-37D633B846F1}">
+                    <asvg:svgBlip xmlns:asvg="http://schemas.microsoft.com/office/drawing/2016/SVG/main" r:embed="rId5"/>
+                  </a:ext>
+                </a:extLst>
+              </a:blip>
+              <a:stretch>
+                <a:fillRect l="0" t="0" r="0" b="0"/>
+              </a:stretch>
+            </a:blipFill>
+          </p:spPr>
+        </p:sp>
+        <p:sp>
+          <p:nvSpPr>
+            <p:cNvPr name="Freeform 7" id="7"/>
+            <p:cNvSpPr/>
+            <p:nvPr/>
+          </p:nvSpPr>
+          <p:spPr>
+            <a:xfrm flipH="false" flipV="false" rot="0">
+              <a:off x="11887200" y="0"/>
+              <a:ext cx="3556000" cy="803656"/>
+            </a:xfrm>
+            <a:custGeom>
+              <a:avLst/>
+              <a:gdLst/>
+              <a:ahLst/>
+              <a:cxnLst/>
+              <a:rect r="r" b="b" t="t" l="l"/>
+              <a:pathLst>
+                <a:path h="803656" w="3556000">
+                  <a:moveTo>
+                    <a:pt x="0" y="0"/>
+                  </a:moveTo>
+                  <a:lnTo>
+                    <a:pt x="3556000" y="0"/>
+                  </a:lnTo>
+                  <a:lnTo>
+                    <a:pt x="3556000" y="803656"/>
+                  </a:lnTo>
+                  <a:lnTo>
+                    <a:pt x="0" y="803656"/>
+                  </a:lnTo>
+                  <a:lnTo>
+                    <a:pt x="0" y="0"/>
+                  </a:lnTo>
+                  <a:close/>
+                </a:path>
+              </a:pathLst>
+            </a:custGeom>
+            <a:blipFill>
+              <a:blip r:embed="rId6"/>
+              <a:stretch>
+                <a:fillRect l="0" t="0" r="0" b="0"/>
+              </a:stretch>
+            </a:blipFill>
+          </p:spPr>
+        </p:sp>
+        <p:sp>
+          <p:nvSpPr>
+            <p:cNvPr name="Freeform 8" id="8"/>
+            <p:cNvSpPr/>
+            <p:nvPr/>
+          </p:nvSpPr>
+          <p:spPr>
+            <a:xfrm flipH="false" flipV="false" rot="0">
+              <a:off x="812800" y="127000"/>
+              <a:ext cx="2413000" cy="504536"/>
+            </a:xfrm>
+            <a:custGeom>
+              <a:avLst/>
+              <a:gdLst/>
+              <a:ahLst/>
+              <a:cxnLst/>
+              <a:rect r="r" b="b" t="t" l="l"/>
+              <a:pathLst>
+                <a:path h="504536" w="2413000">
+                  <a:moveTo>
+                    <a:pt x="0" y="0"/>
+                  </a:moveTo>
+                  <a:lnTo>
+                    <a:pt x="2413000" y="0"/>
+                  </a:lnTo>
+                  <a:lnTo>
+                    <a:pt x="2413000" y="504536"/>
+                  </a:lnTo>
+                  <a:lnTo>
+                    <a:pt x="0" y="504536"/>
+                  </a:lnTo>
+                  <a:lnTo>
+                    <a:pt x="0" y="0"/>
+                  </a:lnTo>
+                  <a:close/>
+                </a:path>
+              </a:pathLst>
+            </a:custGeom>
+            <a:blipFill>
+              <a:blip r:embed="rId7">
+                <a:extLst>
+                  <a:ext uri="{96DAC541-7B7A-43D3-8B79-37D633B846F1}">
+                    <asvg:svgBlip xmlns:asvg="http://schemas.microsoft.com/office/drawing/2016/SVG/main" r:embed="rId8"/>
+                  </a:ext>
+                </a:extLst>
+              </a:blip>
+              <a:stretch>
+                <a:fillRect l="0" t="0" r="0" b="0"/>
+              </a:stretch>
+            </a:blipFill>
+          </p:spPr>
+        </p:sp>
+      </p:grpSp>
+      <p:sp>
+        <p:nvSpPr>
+          <p:cNvPr name="TextBox 9" id="9"/>
           <p:cNvSpPr txBox="true"/>
           <p:nvPr/>
         </p:nvSpPr>
@@ -15234,7 +16648,7 @@
       </p:sp>
       <p:sp>
         <p:nvSpPr>
-          <p:cNvPr name="TextBox 6" id="6"/>
+          <p:cNvPr name="TextBox 10" id="10"/>
           <p:cNvSpPr txBox="true"/>
           <p:nvPr/>
         </p:nvSpPr>
@@ -15275,7 +16689,7 @@
       </p:sp>
       <p:grpSp>
         <p:nvGrpSpPr>
-          <p:cNvPr name="Group 7" id="7"/>
+          <p:cNvPr name="Group 11" id="11"/>
           <p:cNvGrpSpPr/>
           <p:nvPr/>
         </p:nvGrpSpPr>
@@ -15289,7 +16703,7 @@
         </p:grpSpPr>
         <p:sp>
           <p:nvSpPr>
-            <p:cNvPr name="Freeform 8" id="8"/>
+            <p:cNvPr name="Freeform 12" id="12"/>
             <p:cNvSpPr/>
             <p:nvPr/>
           </p:nvSpPr>
@@ -15341,7 +16755,7 @@
       </p:grpSp>
       <p:sp>
         <p:nvSpPr>
-          <p:cNvPr name="TextBox 9" id="9"/>
+          <p:cNvPr name="TextBox 13" id="13"/>
           <p:cNvSpPr txBox="true"/>
           <p:nvPr/>
         </p:nvSpPr>
@@ -15382,7 +16796,7 @@
       </p:sp>
       <p:sp>
         <p:nvSpPr>
-          <p:cNvPr name="TextBox 10" id="10"/>
+          <p:cNvPr name="TextBox 14" id="14"/>
           <p:cNvSpPr txBox="true"/>
           <p:nvPr/>
         </p:nvSpPr>
@@ -15442,7 +16856,7 @@
       </p:sp>
       <p:sp>
         <p:nvSpPr>
-          <p:cNvPr name="AutoShape 11" id="11"/>
+          <p:cNvPr name="AutoShape 15" id="15"/>
           <p:cNvSpPr/>
           <p:nvPr/>
         </p:nvSpPr>
@@ -15461,7 +16875,7 @@
       </p:sp>
       <p:grpSp>
         <p:nvGrpSpPr>
-          <p:cNvPr name="Group 12" id="12"/>
+          <p:cNvPr name="Group 16" id="16"/>
           <p:cNvGrpSpPr/>
           <p:nvPr/>
         </p:nvGrpSpPr>
@@ -15475,7 +16889,7 @@
         </p:grpSpPr>
         <p:sp>
           <p:nvSpPr>
-            <p:cNvPr name="Freeform 13" id="13"/>
+            <p:cNvPr name="Freeform 17" id="17"/>
             <p:cNvSpPr/>
             <p:nvPr/>
           </p:nvSpPr>
@@ -15533,7 +16947,7 @@
       </p:grpSp>
       <p:grpSp>
         <p:nvGrpSpPr>
-          <p:cNvPr name="Group 14" id="14"/>
+          <p:cNvPr name="Group 18" id="18"/>
           <p:cNvGrpSpPr/>
           <p:nvPr/>
         </p:nvGrpSpPr>
@@ -15547,7 +16961,7 @@
         </p:grpSpPr>
         <p:sp>
           <p:nvSpPr>
-            <p:cNvPr name="Freeform 15" id="15"/>
+            <p:cNvPr name="Freeform 19" id="19"/>
             <p:cNvSpPr/>
             <p:nvPr/>
           </p:nvSpPr>
@@ -15605,7 +17019,7 @@
       </p:grpSp>
       <p:grpSp>
         <p:nvGrpSpPr>
-          <p:cNvPr name="Group 16" id="16"/>
+          <p:cNvPr name="Group 20" id="20"/>
           <p:cNvGrpSpPr/>
           <p:nvPr/>
         </p:nvGrpSpPr>
@@ -15619,7 +17033,7 @@
         </p:grpSpPr>
         <p:sp>
           <p:nvSpPr>
-            <p:cNvPr name="Freeform 17" id="17"/>
+            <p:cNvPr name="Freeform 21" id="21"/>
             <p:cNvSpPr/>
             <p:nvPr/>
           </p:nvSpPr>
@@ -15671,7 +17085,7 @@
       </p:grpSp>
       <p:sp>
         <p:nvSpPr>
-          <p:cNvPr name="TextBox 18" id="18"/>
+          <p:cNvPr name="TextBox 22" id="22"/>
           <p:cNvSpPr txBox="true"/>
           <p:nvPr/>
         </p:nvSpPr>
@@ -15712,7 +17126,7 @@
       </p:sp>
       <p:sp>
         <p:nvSpPr>
-          <p:cNvPr name="TextBox 19" id="19"/>
+          <p:cNvPr name="TextBox 23" id="23"/>
           <p:cNvSpPr txBox="true"/>
           <p:nvPr/>
         </p:nvSpPr>
@@ -15772,7 +17186,7 @@
       </p:sp>
       <p:sp>
         <p:nvSpPr>
-          <p:cNvPr name="AutoShape 20" id="20"/>
+          <p:cNvPr name="AutoShape 24" id="24"/>
           <p:cNvSpPr/>
           <p:nvPr/>
         </p:nvSpPr>
@@ -15791,7 +17205,7 @@
       </p:sp>
       <p:grpSp>
         <p:nvGrpSpPr>
-          <p:cNvPr name="Group 21" id="21"/>
+          <p:cNvPr name="Group 25" id="25"/>
           <p:cNvGrpSpPr/>
           <p:nvPr/>
         </p:nvGrpSpPr>
@@ -15805,7 +17219,7 @@
         </p:grpSpPr>
         <p:sp>
           <p:nvSpPr>
-            <p:cNvPr name="Freeform 22" id="22"/>
+            <p:cNvPr name="Freeform 26" id="26"/>
             <p:cNvSpPr/>
             <p:nvPr/>
           </p:nvSpPr>
@@ -15863,7 +17277,7 @@
       </p:grpSp>
       <p:grpSp>
         <p:nvGrpSpPr>
-          <p:cNvPr name="Group 23" id="23"/>
+          <p:cNvPr name="Group 27" id="27"/>
           <p:cNvGrpSpPr/>
           <p:nvPr/>
         </p:nvGrpSpPr>
@@ -15877,7 +17291,7 @@
         </p:grpSpPr>
         <p:sp>
           <p:nvSpPr>
-            <p:cNvPr name="Freeform 24" id="24"/>
+            <p:cNvPr name="Freeform 28" id="28"/>
             <p:cNvSpPr/>
             <p:nvPr/>
           </p:nvSpPr>
@@ -15935,7 +17349,7 @@
       </p:grpSp>
       <p:grpSp>
         <p:nvGrpSpPr>
-          <p:cNvPr name="Group 25" id="25"/>
+          <p:cNvPr name="Group 29" id="29"/>
           <p:cNvGrpSpPr/>
           <p:nvPr/>
         </p:nvGrpSpPr>
@@ -15949,7 +17363,7 @@
         </p:grpSpPr>
         <p:sp>
           <p:nvSpPr>
-            <p:cNvPr name="Freeform 26" id="26"/>
+            <p:cNvPr name="Freeform 30" id="30"/>
             <p:cNvSpPr/>
             <p:nvPr/>
           </p:nvSpPr>
@@ -16001,7 +17415,7 @@
       </p:grpSp>
       <p:sp>
         <p:nvSpPr>
-          <p:cNvPr name="TextBox 27" id="27"/>
+          <p:cNvPr name="TextBox 31" id="31"/>
           <p:cNvSpPr txBox="true"/>
           <p:nvPr/>
         </p:nvSpPr>
@@ -16042,7 +17456,7 @@
       </p:sp>
       <p:sp>
         <p:nvSpPr>
-          <p:cNvPr name="TextBox 28" id="28"/>
+          <p:cNvPr name="TextBox 32" id="32"/>
           <p:cNvSpPr txBox="true"/>
           <p:nvPr/>
         </p:nvSpPr>
@@ -16102,7 +17516,7 @@
       </p:sp>
       <p:sp>
         <p:nvSpPr>
-          <p:cNvPr name="AutoShape 29" id="29"/>
+          <p:cNvPr name="AutoShape 33" id="33"/>
           <p:cNvSpPr/>
           <p:nvPr/>
         </p:nvSpPr>
@@ -16121,7 +17535,7 @@
       </p:sp>
       <p:grpSp>
         <p:nvGrpSpPr>
-          <p:cNvPr name="Group 30" id="30"/>
+          <p:cNvPr name="Group 34" id="34"/>
           <p:cNvGrpSpPr/>
           <p:nvPr/>
         </p:nvGrpSpPr>
@@ -16135,7 +17549,7 @@
         </p:grpSpPr>
         <p:sp>
           <p:nvSpPr>
-            <p:cNvPr name="Freeform 31" id="31"/>
+            <p:cNvPr name="Freeform 35" id="35"/>
             <p:cNvSpPr/>
             <p:nvPr/>
           </p:nvSpPr>
@@ -16193,7 +17607,7 @@
       </p:grpSp>
       <p:grpSp>
         <p:nvGrpSpPr>
-          <p:cNvPr name="Group 32" id="32"/>
+          <p:cNvPr name="Group 36" id="36"/>
           <p:cNvGrpSpPr/>
           <p:nvPr/>
         </p:nvGrpSpPr>
@@ -16207,7 +17621,7 @@
         </p:grpSpPr>
         <p:sp>
           <p:nvSpPr>
-            <p:cNvPr name="Freeform 33" id="33"/>
+            <p:cNvPr name="Freeform 37" id="37"/>
             <p:cNvSpPr/>
             <p:nvPr/>
           </p:nvSpPr>
@@ -16265,7 +17679,7 @@
       </p:grpSp>
       <p:grpSp>
         <p:nvGrpSpPr>
-          <p:cNvPr name="Group 34" id="34"/>
+          <p:cNvPr name="Group 38" id="38"/>
           <p:cNvGrpSpPr/>
           <p:nvPr/>
         </p:nvGrpSpPr>
@@ -16279,7 +17693,7 @@
         </p:grpSpPr>
         <p:sp>
           <p:nvSpPr>
-            <p:cNvPr name="Freeform 35" id="35"/>
+            <p:cNvPr name="Freeform 39" id="39"/>
             <p:cNvSpPr/>
             <p:nvPr/>
           </p:nvSpPr>
@@ -16331,7 +17745,7 @@
       </p:grpSp>
       <p:sp>
         <p:nvSpPr>
-          <p:cNvPr name="TextBox 36" id="36"/>
+          <p:cNvPr name="TextBox 40" id="40"/>
           <p:cNvSpPr txBox="true"/>
           <p:nvPr/>
         </p:nvSpPr>
@@ -16372,7 +17786,7 @@
       </p:sp>
       <p:sp>
         <p:nvSpPr>
-          <p:cNvPr name="TextBox 37" id="37"/>
+          <p:cNvPr name="TextBox 41" id="41"/>
           <p:cNvSpPr txBox="true"/>
           <p:nvPr/>
         </p:nvSpPr>
@@ -16432,7 +17846,7 @@
       </p:sp>
       <p:sp>
         <p:nvSpPr>
-          <p:cNvPr name="TextBox 38" id="38"/>
+          <p:cNvPr name="TextBox 42" id="42"/>
           <p:cNvSpPr txBox="true"/>
           <p:nvPr/>
         </p:nvSpPr>
@@ -16473,7 +17887,7 @@
       </p:sp>
       <p:sp>
         <p:nvSpPr>
-          <p:cNvPr name="AutoShape 39" id="39"/>
+          <p:cNvPr name="AutoShape 43" id="43"/>
           <p:cNvSpPr/>
           <p:nvPr/>
         </p:nvSpPr>
@@ -16600,9 +18014,174 @@
           </p:spPr>
         </p:sp>
       </p:grpSp>
-      <p:sp>
-        <p:nvSpPr>
-          <p:cNvPr name="Freeform 5" id="5"/>
+      <p:grpSp>
+        <p:nvGrpSpPr>
+          <p:cNvPr name="Group 5" id="5"/>
+          <p:cNvGrpSpPr/>
+          <p:nvPr/>
+        </p:nvGrpSpPr>
+        <p:grpSpPr>
+          <a:xfrm rot="0">
+            <a:off x="0" y="0"/>
+            <a:ext cx="12192000" cy="6858000"/>
+            <a:chOff x="0" y="0"/>
+            <a:chExt cx="16256000" cy="9144000"/>
+          </a:xfrm>
+        </p:grpSpPr>
+        <p:sp>
+          <p:nvSpPr>
+            <p:cNvPr name="Freeform 6" id="6"/>
+            <p:cNvSpPr/>
+            <p:nvPr/>
+          </p:nvSpPr>
+          <p:spPr>
+            <a:xfrm flipH="false" flipV="false" rot="0">
+              <a:off x="0" y="0"/>
+              <a:ext cx="16256000" cy="9144000"/>
+            </a:xfrm>
+            <a:custGeom>
+              <a:avLst/>
+              <a:gdLst/>
+              <a:ahLst/>
+              <a:cxnLst/>
+              <a:rect r="r" b="b" t="t" l="l"/>
+              <a:pathLst>
+                <a:path h="9144000" w="16256000">
+                  <a:moveTo>
+                    <a:pt x="0" y="0"/>
+                  </a:moveTo>
+                  <a:lnTo>
+                    <a:pt x="16256000" y="0"/>
+                  </a:lnTo>
+                  <a:lnTo>
+                    <a:pt x="16256000" y="9144000"/>
+                  </a:lnTo>
+                  <a:lnTo>
+                    <a:pt x="0" y="9144000"/>
+                  </a:lnTo>
+                  <a:lnTo>
+                    <a:pt x="0" y="0"/>
+                  </a:lnTo>
+                  <a:close/>
+                </a:path>
+              </a:pathLst>
+            </a:custGeom>
+            <a:blipFill>
+              <a:blip r:embed="rId4">
+                <a:extLst>
+                  <a:ext uri="{96DAC541-7B7A-43D3-8B79-37D633B846F1}">
+                    <asvg:svgBlip xmlns:asvg="http://schemas.microsoft.com/office/drawing/2016/SVG/main" r:embed="rId5"/>
+                  </a:ext>
+                </a:extLst>
+              </a:blip>
+              <a:stretch>
+                <a:fillRect l="0" t="0" r="0" b="0"/>
+              </a:stretch>
+            </a:blipFill>
+          </p:spPr>
+        </p:sp>
+        <p:sp>
+          <p:nvSpPr>
+            <p:cNvPr name="Freeform 7" id="7"/>
+            <p:cNvSpPr/>
+            <p:nvPr/>
+          </p:nvSpPr>
+          <p:spPr>
+            <a:xfrm flipH="false" flipV="false" rot="0">
+              <a:off x="11887200" y="0"/>
+              <a:ext cx="3556000" cy="803656"/>
+            </a:xfrm>
+            <a:custGeom>
+              <a:avLst/>
+              <a:gdLst/>
+              <a:ahLst/>
+              <a:cxnLst/>
+              <a:rect r="r" b="b" t="t" l="l"/>
+              <a:pathLst>
+                <a:path h="803656" w="3556000">
+                  <a:moveTo>
+                    <a:pt x="0" y="0"/>
+                  </a:moveTo>
+                  <a:lnTo>
+                    <a:pt x="3556000" y="0"/>
+                  </a:lnTo>
+                  <a:lnTo>
+                    <a:pt x="3556000" y="803656"/>
+                  </a:lnTo>
+                  <a:lnTo>
+                    <a:pt x="0" y="803656"/>
+                  </a:lnTo>
+                  <a:lnTo>
+                    <a:pt x="0" y="0"/>
+                  </a:lnTo>
+                  <a:close/>
+                </a:path>
+              </a:pathLst>
+            </a:custGeom>
+            <a:blipFill>
+              <a:blip r:embed="rId6"/>
+              <a:stretch>
+                <a:fillRect l="0" t="0" r="0" b="0"/>
+              </a:stretch>
+            </a:blipFill>
+          </p:spPr>
+        </p:sp>
+        <p:sp>
+          <p:nvSpPr>
+            <p:cNvPr name="Freeform 8" id="8"/>
+            <p:cNvSpPr/>
+            <p:nvPr/>
+          </p:nvSpPr>
+          <p:spPr>
+            <a:xfrm flipH="false" flipV="false" rot="0">
+              <a:off x="812800" y="127000"/>
+              <a:ext cx="2413000" cy="504536"/>
+            </a:xfrm>
+            <a:custGeom>
+              <a:avLst/>
+              <a:gdLst/>
+              <a:ahLst/>
+              <a:cxnLst/>
+              <a:rect r="r" b="b" t="t" l="l"/>
+              <a:pathLst>
+                <a:path h="504536" w="2413000">
+                  <a:moveTo>
+                    <a:pt x="0" y="0"/>
+                  </a:moveTo>
+                  <a:lnTo>
+                    <a:pt x="2413000" y="0"/>
+                  </a:lnTo>
+                  <a:lnTo>
+                    <a:pt x="2413000" y="504536"/>
+                  </a:lnTo>
+                  <a:lnTo>
+                    <a:pt x="0" y="504536"/>
+                  </a:lnTo>
+                  <a:lnTo>
+                    <a:pt x="0" y="0"/>
+                  </a:lnTo>
+                  <a:close/>
+                </a:path>
+              </a:pathLst>
+            </a:custGeom>
+            <a:blipFill>
+              <a:blip r:embed="rId7">
+                <a:extLst>
+                  <a:ext uri="{96DAC541-7B7A-43D3-8B79-37D633B846F1}">
+                    <asvg:svgBlip xmlns:asvg="http://schemas.microsoft.com/office/drawing/2016/SVG/main" r:embed="rId8"/>
+                  </a:ext>
+                </a:extLst>
+              </a:blip>
+              <a:stretch>
+                <a:fillRect l="0" t="0" r="0" b="0"/>
+              </a:stretch>
+            </a:blipFill>
+          </p:spPr>
+        </p:sp>
+      </p:grpSp>
+      <p:sp>
+        <p:nvSpPr>
+          <p:cNvPr name="Freeform 9" id="9"/>
           <p:cNvSpPr/>
           <p:nvPr/>
         </p:nvSpPr>
@@ -16639,10 +18218,10 @@
             </a:pathLst>
           </a:custGeom>
           <a:blipFill>
-            <a:blip r:embed="rId4">
+            <a:blip r:embed="rId9">
               <a:extLst>
                 <a:ext uri="{96DAC541-7B7A-43D3-8B79-37D633B846F1}">
-                  <asvg:svgBlip xmlns:asvg="http://schemas.microsoft.com/office/drawing/2016/SVG/main" r:embed="rId5"/>
+                  <asvg:svgBlip xmlns:asvg="http://schemas.microsoft.com/office/drawing/2016/SVG/main" r:embed="rId10"/>
                 </a:ext>
               </a:extLst>
             </a:blip>
@@ -16654,7 +18233,7 @@
       </p:sp>
       <p:sp>
         <p:nvSpPr>
-          <p:cNvPr name="AutoShape 6" id="6"/>
+          <p:cNvPr name="AutoShape 10" id="10"/>
           <p:cNvSpPr/>
           <p:nvPr/>
         </p:nvSpPr>
@@ -16678,7 +18257,7 @@
       </p:sp>
       <p:grpSp>
         <p:nvGrpSpPr>
-          <p:cNvPr name="Group 7" id="7"/>
+          <p:cNvPr name="Group 11" id="11"/>
           <p:cNvGrpSpPr/>
           <p:nvPr/>
         </p:nvGrpSpPr>
@@ -16692,7 +18271,7 @@
         </p:grpSpPr>
         <p:sp>
           <p:nvSpPr>
-            <p:cNvPr name="Freeform 8" id="8"/>
+            <p:cNvPr name="Freeform 12" id="12"/>
             <p:cNvSpPr/>
             <p:nvPr/>
           </p:nvSpPr>
@@ -16775,7 +18354,7 @@
         </p:sp>
         <p:sp>
           <p:nvSpPr>
-            <p:cNvPr name="TextBox 9" id="9"/>
+            <p:cNvPr name="TextBox 13" id="13"/>
             <p:cNvSpPr txBox="true"/>
             <p:nvPr/>
           </p:nvSpPr>
@@ -16803,7 +18382,7 @@
       </p:grpSp>
       <p:grpSp>
         <p:nvGrpSpPr>
-          <p:cNvPr name="Group 10" id="10"/>
+          <p:cNvPr name="Group 14" id="14"/>
           <p:cNvGrpSpPr/>
           <p:nvPr/>
         </p:nvGrpSpPr>
@@ -16817,7 +18396,7 @@
         </p:grpSpPr>
         <p:sp>
           <p:nvSpPr>
-            <p:cNvPr name="Freeform 11" id="11"/>
+            <p:cNvPr name="Freeform 15" id="15"/>
             <p:cNvSpPr/>
             <p:nvPr/>
           </p:nvSpPr>
@@ -16900,7 +18479,7 @@
         </p:sp>
         <p:sp>
           <p:nvSpPr>
-            <p:cNvPr name="TextBox 12" id="12"/>
+            <p:cNvPr name="TextBox 16" id="16"/>
             <p:cNvSpPr txBox="true"/>
             <p:nvPr/>
           </p:nvSpPr>
@@ -16928,7 +18507,7 @@
       </p:grpSp>
       <p:grpSp>
         <p:nvGrpSpPr>
-          <p:cNvPr name="Group 13" id="13"/>
+          <p:cNvPr name="Group 17" id="17"/>
           <p:cNvGrpSpPr/>
           <p:nvPr/>
         </p:nvGrpSpPr>
@@ -16942,7 +18521,7 @@
         </p:grpSpPr>
         <p:sp>
           <p:nvSpPr>
-            <p:cNvPr name="Freeform 14" id="14"/>
+            <p:cNvPr name="Freeform 18" id="18"/>
             <p:cNvSpPr/>
             <p:nvPr/>
           </p:nvSpPr>
@@ -17025,7 +18604,7 @@
         </p:sp>
         <p:sp>
           <p:nvSpPr>
-            <p:cNvPr name="TextBox 15" id="15"/>
+            <p:cNvPr name="TextBox 19" id="19"/>
             <p:cNvSpPr txBox="true"/>
             <p:nvPr/>
           </p:nvSpPr>
@@ -17053,7 +18632,7 @@
       </p:grpSp>
       <p:sp>
         <p:nvSpPr>
-          <p:cNvPr name="TextBox 16" id="16"/>
+          <p:cNvPr name="TextBox 20" id="20"/>
           <p:cNvSpPr txBox="true"/>
           <p:nvPr/>
         </p:nvSpPr>
@@ -17094,7 +18673,7 @@
       </p:sp>
       <p:sp>
         <p:nvSpPr>
-          <p:cNvPr name="TextBox 17" id="17"/>
+          <p:cNvPr name="TextBox 21" id="21"/>
           <p:cNvSpPr txBox="true"/>
           <p:nvPr/>
         </p:nvSpPr>
@@ -17135,7 +18714,7 @@
       </p:sp>
       <p:sp>
         <p:nvSpPr>
-          <p:cNvPr name="TextBox 18" id="18"/>
+          <p:cNvPr name="TextBox 22" id="22"/>
           <p:cNvSpPr txBox="true"/>
           <p:nvPr/>
         </p:nvSpPr>
@@ -17176,7 +18755,7 @@
       </p:sp>
       <p:sp>
         <p:nvSpPr>
-          <p:cNvPr name="TextBox 19" id="19"/>
+          <p:cNvPr name="TextBox 23" id="23"/>
           <p:cNvSpPr txBox="true"/>
           <p:nvPr/>
         </p:nvSpPr>
@@ -17220,7 +18799,7 @@
       </p:sp>
       <p:sp>
         <p:nvSpPr>
-          <p:cNvPr name="TextBox 20" id="20"/>
+          <p:cNvPr name="TextBox 24" id="24"/>
           <p:cNvSpPr txBox="true"/>
           <p:nvPr/>
         </p:nvSpPr>
@@ -17283,7 +18862,7 @@
       </p:sp>
       <p:sp>
         <p:nvSpPr>
-          <p:cNvPr name="TextBox 21" id="21"/>
+          <p:cNvPr name="TextBox 25" id="25"/>
           <p:cNvSpPr txBox="true"/>
           <p:nvPr/>
         </p:nvSpPr>
@@ -17327,7 +18906,7 @@
       </p:sp>
       <p:sp>
         <p:nvSpPr>
-          <p:cNvPr name="TextBox 22" id="22"/>
+          <p:cNvPr name="TextBox 26" id="26"/>
           <p:cNvSpPr txBox="true"/>
           <p:nvPr/>
         </p:nvSpPr>
@@ -17390,7 +18969,7 @@
       </p:sp>
       <p:sp>
         <p:nvSpPr>
-          <p:cNvPr name="TextBox 23" id="23"/>
+          <p:cNvPr name="TextBox 27" id="27"/>
           <p:cNvSpPr txBox="true"/>
           <p:nvPr/>
         </p:nvSpPr>
@@ -17537,9 +19116,174 @@
           </p:spPr>
         </p:sp>
       </p:grpSp>
-      <p:sp>
-        <p:nvSpPr>
-          <p:cNvPr name="TextBox 5" id="5"/>
+      <p:grpSp>
+        <p:nvGrpSpPr>
+          <p:cNvPr name="Group 5" id="5"/>
+          <p:cNvGrpSpPr/>
+          <p:nvPr/>
+        </p:nvGrpSpPr>
+        <p:grpSpPr>
+          <a:xfrm rot="0">
+            <a:off x="0" y="0"/>
+            <a:ext cx="12192000" cy="6858000"/>
+            <a:chOff x="0" y="0"/>
+            <a:chExt cx="16256000" cy="9144000"/>
+          </a:xfrm>
+        </p:grpSpPr>
+        <p:sp>
+          <p:nvSpPr>
+            <p:cNvPr name="Freeform 6" id="6"/>
+            <p:cNvSpPr/>
+            <p:nvPr/>
+          </p:nvSpPr>
+          <p:spPr>
+            <a:xfrm flipH="false" flipV="false" rot="0">
+              <a:off x="0" y="0"/>
+              <a:ext cx="16256000" cy="9144000"/>
+            </a:xfrm>
+            <a:custGeom>
+              <a:avLst/>
+              <a:gdLst/>
+              <a:ahLst/>
+              <a:cxnLst/>
+              <a:rect r="r" b="b" t="t" l="l"/>
+              <a:pathLst>
+                <a:path h="9144000" w="16256000">
+                  <a:moveTo>
+                    <a:pt x="0" y="0"/>
+                  </a:moveTo>
+                  <a:lnTo>
+                    <a:pt x="16256000" y="0"/>
+                  </a:lnTo>
+                  <a:lnTo>
+                    <a:pt x="16256000" y="9144000"/>
+                  </a:lnTo>
+                  <a:lnTo>
+                    <a:pt x="0" y="9144000"/>
+                  </a:lnTo>
+                  <a:lnTo>
+                    <a:pt x="0" y="0"/>
+                  </a:lnTo>
+                  <a:close/>
+                </a:path>
+              </a:pathLst>
+            </a:custGeom>
+            <a:blipFill>
+              <a:blip r:embed="rId4">
+                <a:extLst>
+                  <a:ext uri="{96DAC541-7B7A-43D3-8B79-37D633B846F1}">
+                    <asvg:svgBlip xmlns:asvg="http://schemas.microsoft.com/office/drawing/2016/SVG/main" r:embed="rId5"/>
+                  </a:ext>
+                </a:extLst>
+              </a:blip>
+              <a:stretch>
+                <a:fillRect l="0" t="0" r="0" b="0"/>
+              </a:stretch>
+            </a:blipFill>
+          </p:spPr>
+        </p:sp>
+        <p:sp>
+          <p:nvSpPr>
+            <p:cNvPr name="Freeform 7" id="7"/>
+            <p:cNvSpPr/>
+            <p:nvPr/>
+          </p:nvSpPr>
+          <p:spPr>
+            <a:xfrm flipH="false" flipV="false" rot="0">
+              <a:off x="11887200" y="0"/>
+              <a:ext cx="3556000" cy="803656"/>
+            </a:xfrm>
+            <a:custGeom>
+              <a:avLst/>
+              <a:gdLst/>
+              <a:ahLst/>
+              <a:cxnLst/>
+              <a:rect r="r" b="b" t="t" l="l"/>
+              <a:pathLst>
+                <a:path h="803656" w="3556000">
+                  <a:moveTo>
+                    <a:pt x="0" y="0"/>
+                  </a:moveTo>
+                  <a:lnTo>
+                    <a:pt x="3556000" y="0"/>
+                  </a:lnTo>
+                  <a:lnTo>
+                    <a:pt x="3556000" y="803656"/>
+                  </a:lnTo>
+                  <a:lnTo>
+                    <a:pt x="0" y="803656"/>
+                  </a:lnTo>
+                  <a:lnTo>
+                    <a:pt x="0" y="0"/>
+                  </a:lnTo>
+                  <a:close/>
+                </a:path>
+              </a:pathLst>
+            </a:custGeom>
+            <a:blipFill>
+              <a:blip r:embed="rId6"/>
+              <a:stretch>
+                <a:fillRect l="0" t="0" r="0" b="0"/>
+              </a:stretch>
+            </a:blipFill>
+          </p:spPr>
+        </p:sp>
+        <p:sp>
+          <p:nvSpPr>
+            <p:cNvPr name="Freeform 8" id="8"/>
+            <p:cNvSpPr/>
+            <p:nvPr/>
+          </p:nvSpPr>
+          <p:spPr>
+            <a:xfrm flipH="false" flipV="false" rot="0">
+              <a:off x="812800" y="127000"/>
+              <a:ext cx="2413000" cy="504536"/>
+            </a:xfrm>
+            <a:custGeom>
+              <a:avLst/>
+              <a:gdLst/>
+              <a:ahLst/>
+              <a:cxnLst/>
+              <a:rect r="r" b="b" t="t" l="l"/>
+              <a:pathLst>
+                <a:path h="504536" w="2413000">
+                  <a:moveTo>
+                    <a:pt x="0" y="0"/>
+                  </a:moveTo>
+                  <a:lnTo>
+                    <a:pt x="2413000" y="0"/>
+                  </a:lnTo>
+                  <a:lnTo>
+                    <a:pt x="2413000" y="504536"/>
+                  </a:lnTo>
+                  <a:lnTo>
+                    <a:pt x="0" y="504536"/>
+                  </a:lnTo>
+                  <a:lnTo>
+                    <a:pt x="0" y="0"/>
+                  </a:lnTo>
+                  <a:close/>
+                </a:path>
+              </a:pathLst>
+            </a:custGeom>
+            <a:blipFill>
+              <a:blip r:embed="rId7">
+                <a:extLst>
+                  <a:ext uri="{96DAC541-7B7A-43D3-8B79-37D633B846F1}">
+                    <asvg:svgBlip xmlns:asvg="http://schemas.microsoft.com/office/drawing/2016/SVG/main" r:embed="rId8"/>
+                  </a:ext>
+                </a:extLst>
+              </a:blip>
+              <a:stretch>
+                <a:fillRect l="0" t="0" r="0" b="0"/>
+              </a:stretch>
+            </a:blipFill>
+          </p:spPr>
+        </p:sp>
+      </p:grpSp>
+      <p:sp>
+        <p:nvSpPr>
+          <p:cNvPr name="TextBox 9" id="9"/>
           <p:cNvSpPr txBox="true"/>
           <p:nvPr/>
         </p:nvSpPr>
@@ -17580,7 +19324,7 @@
       </p:sp>
       <p:sp>
         <p:nvSpPr>
-          <p:cNvPr name="TextBox 6" id="6"/>
+          <p:cNvPr name="TextBox 10" id="10"/>
           <p:cNvSpPr txBox="true"/>
           <p:nvPr/>
         </p:nvSpPr>
@@ -17621,7 +19365,7 @@
       </p:sp>
       <p:grpSp>
         <p:nvGrpSpPr>
-          <p:cNvPr name="Group 7" id="7"/>
+          <p:cNvPr name="Group 11" id="11"/>
           <p:cNvGrpSpPr/>
           <p:nvPr/>
         </p:nvGrpSpPr>
@@ -17635,7 +19379,7 @@
         </p:grpSpPr>
         <p:sp>
           <p:nvSpPr>
-            <p:cNvPr name="Freeform 8" id="8"/>
+            <p:cNvPr name="Freeform 12" id="12"/>
             <p:cNvSpPr/>
             <p:nvPr/>
           </p:nvSpPr>
@@ -17672,7 +19416,7 @@
               </a:pathLst>
             </a:custGeom>
             <a:blipFill>
-              <a:blip r:embed="rId4"/>
+              <a:blip r:embed="rId9"/>
               <a:stretch>
                 <a:fillRect l="0" t="283" r="0" b="283"/>
               </a:stretch>
@@ -17682,7 +19426,7 @@
       </p:grpSp>
       <p:sp>
         <p:nvSpPr>
-          <p:cNvPr name="AutoShape 9" id="9"/>
+          <p:cNvPr name="AutoShape 13" id="13"/>
           <p:cNvSpPr/>
           <p:nvPr/>
         </p:nvSpPr>
@@ -17701,7 +19445,7 @@
       </p:sp>
       <p:sp>
         <p:nvSpPr>
-          <p:cNvPr name="TextBox 10" id="10"/>
+          <p:cNvPr name="TextBox 14" id="14"/>
           <p:cNvSpPr txBox="true"/>
           <p:nvPr/>
         </p:nvSpPr>
@@ -17742,7 +19486,7 @@
       </p:sp>
       <p:sp>
         <p:nvSpPr>
-          <p:cNvPr name="TextBox 11" id="11"/>
+          <p:cNvPr name="TextBox 15" id="15"/>
           <p:cNvSpPr txBox="true"/>
           <p:nvPr/>
         </p:nvSpPr>
@@ -17783,7 +19527,7 @@
       </p:sp>
       <p:sp>
         <p:nvSpPr>
-          <p:cNvPr name="TextBox 12" id="12"/>
+          <p:cNvPr name="TextBox 16" id="16"/>
           <p:cNvSpPr txBox="true"/>
           <p:nvPr/>
         </p:nvSpPr>
@@ -17843,7 +19587,7 @@
       </p:sp>
       <p:sp>
         <p:nvSpPr>
-          <p:cNvPr name="AutoShape 13" id="13"/>
+          <p:cNvPr name="AutoShape 17" id="17"/>
           <p:cNvSpPr/>
           <p:nvPr/>
         </p:nvSpPr>
@@ -17862,7 +19606,7 @@
       </p:sp>
       <p:grpSp>
         <p:nvGrpSpPr>
-          <p:cNvPr name="Group 14" id="14"/>
+          <p:cNvPr name="Group 18" id="18"/>
           <p:cNvGrpSpPr/>
           <p:nvPr/>
         </p:nvGrpSpPr>
@@ -17876,7 +19620,7 @@
         </p:grpSpPr>
         <p:sp>
           <p:nvSpPr>
-            <p:cNvPr name="Freeform 15" id="15"/>
+            <p:cNvPr name="Freeform 19" id="19"/>
             <p:cNvSpPr/>
             <p:nvPr/>
           </p:nvSpPr>
@@ -17934,7 +19678,7 @@
       </p:grpSp>
       <p:grpSp>
         <p:nvGrpSpPr>
-          <p:cNvPr name="Group 16" id="16"/>
+          <p:cNvPr name="Group 20" id="20"/>
           <p:cNvGrpSpPr/>
           <p:nvPr/>
         </p:nvGrpSpPr>
@@ -17948,7 +19692,7 @@
         </p:grpSpPr>
         <p:sp>
           <p:nvSpPr>
-            <p:cNvPr name="Freeform 17" id="17"/>
+            <p:cNvPr name="Freeform 21" id="21"/>
             <p:cNvSpPr/>
             <p:nvPr/>
           </p:nvSpPr>
@@ -18006,7 +19750,7 @@
       </p:grpSp>
       <p:sp>
         <p:nvSpPr>
-          <p:cNvPr name="AutoShape 18" id="18"/>
+          <p:cNvPr name="AutoShape 22" id="22"/>
           <p:cNvSpPr/>
           <p:nvPr/>
         </p:nvSpPr>
@@ -18025,7 +19769,7 @@
       </p:sp>
       <p:sp>
         <p:nvSpPr>
-          <p:cNvPr name="TextBox 19" id="19"/>
+          <p:cNvPr name="TextBox 23" id="23"/>
           <p:cNvSpPr txBox="true"/>
           <p:nvPr/>
         </p:nvSpPr>
@@ -18066,7 +19810,7 @@
       </p:sp>
       <p:sp>
         <p:nvSpPr>
-          <p:cNvPr name="TextBox 20" id="20"/>
+          <p:cNvPr name="TextBox 24" id="24"/>
           <p:cNvSpPr txBox="true"/>
           <p:nvPr/>
         </p:nvSpPr>
@@ -18107,7 +19851,7 @@
       </p:sp>
       <p:sp>
         <p:nvSpPr>
-          <p:cNvPr name="TextBox 21" id="21"/>
+          <p:cNvPr name="TextBox 25" id="25"/>
           <p:cNvSpPr txBox="true"/>
           <p:nvPr/>
         </p:nvSpPr>
@@ -18148,7 +19892,7 @@
       </p:sp>
       <p:sp>
         <p:nvSpPr>
-          <p:cNvPr name="AutoShape 22" id="22"/>
+          <p:cNvPr name="AutoShape 26" id="26"/>
           <p:cNvSpPr/>
           <p:nvPr/>
         </p:nvSpPr>
@@ -18167,7 +19911,7 @@
       </p:sp>
       <p:grpSp>
         <p:nvGrpSpPr>
-          <p:cNvPr name="Group 23" id="23"/>
+          <p:cNvPr name="Group 27" id="27"/>
           <p:cNvGrpSpPr/>
           <p:nvPr/>
         </p:nvGrpSpPr>
@@ -18181,7 +19925,7 @@
         </p:grpSpPr>
         <p:sp>
           <p:nvSpPr>
-            <p:cNvPr name="Freeform 24" id="24"/>
+            <p:cNvPr name="Freeform 28" id="28"/>
             <p:cNvSpPr/>
             <p:nvPr/>
           </p:nvSpPr>
@@ -18239,7 +19983,7 @@
       </p:grpSp>
       <p:grpSp>
         <p:nvGrpSpPr>
-          <p:cNvPr name="Group 25" id="25"/>
+          <p:cNvPr name="Group 29" id="29"/>
           <p:cNvGrpSpPr/>
           <p:nvPr/>
         </p:nvGrpSpPr>
@@ -18253,7 +19997,7 @@
         </p:grpSpPr>
         <p:sp>
           <p:nvSpPr>
-            <p:cNvPr name="Freeform 26" id="26"/>
+            <p:cNvPr name="Freeform 30" id="30"/>
             <p:cNvSpPr/>
             <p:nvPr/>
           </p:nvSpPr>
@@ -18311,7 +20055,7 @@
       </p:grpSp>
       <p:sp>
         <p:nvSpPr>
-          <p:cNvPr name="AutoShape 27" id="27"/>
+          <p:cNvPr name="AutoShape 31" id="31"/>
           <p:cNvSpPr/>
           <p:nvPr/>
         </p:nvSpPr>
@@ -18330,7 +20074,7 @@
       </p:sp>
       <p:sp>
         <p:nvSpPr>
-          <p:cNvPr name="TextBox 28" id="28"/>
+          <p:cNvPr name="TextBox 32" id="32"/>
           <p:cNvSpPr txBox="true"/>
           <p:nvPr/>
         </p:nvSpPr>
@@ -18371,7 +20115,7 @@
       </p:sp>
       <p:sp>
         <p:nvSpPr>
-          <p:cNvPr name="TextBox 29" id="29"/>
+          <p:cNvPr name="TextBox 33" id="33"/>
           <p:cNvSpPr txBox="true"/>
           <p:nvPr/>
         </p:nvSpPr>
@@ -18412,7 +20156,7 @@
       </p:sp>
       <p:sp>
         <p:nvSpPr>
-          <p:cNvPr name="TextBox 30" id="30"/>
+          <p:cNvPr name="TextBox 34" id="34"/>
           <p:cNvSpPr txBox="true"/>
           <p:nvPr/>
         </p:nvSpPr>
@@ -18453,7 +20197,7 @@
       </p:sp>
       <p:sp>
         <p:nvSpPr>
-          <p:cNvPr name="TextBox 31" id="31"/>
+          <p:cNvPr name="TextBox 35" id="35"/>
           <p:cNvSpPr txBox="true"/>
           <p:nvPr/>
         </p:nvSpPr>
@@ -18494,7 +20238,7 @@
       </p:sp>
       <p:sp>
         <p:nvSpPr>
-          <p:cNvPr name="TextBox 32" id="32"/>
+          <p:cNvPr name="TextBox 36" id="36"/>
           <p:cNvSpPr txBox="true"/>
           <p:nvPr/>
         </p:nvSpPr>
@@ -18527,7 +20271,7 @@
                 <a:ea typeface="DM Sans"/>
                 <a:cs typeface="DM Sans"/>
                 <a:sym typeface="DM Sans"/>
-                <a:hlinkClick r:id="rId5" tooltip="https://www.khanacademy.org/math/algebra/x2f8bb11595b61c86:quadratics-multiplying-factoring/x2f8bb11595b61c86:factor-quadratics-intro/v/factoring-simple-quadratic-expression"/>
+                <a:hlinkClick r:id="rId10" tooltip="https://www.khanacademy.org/math/algebra/x2f8bb11595b61c86:quadratics-multiplying-factoring/x2f8bb11595b61c86:factor-quadratics-intro/v/factoring-simple-quadratic-expression"/>
               </a:rPr>
               <a:t>Khan Academy: factoring quadratics</a:t>
             </a:r>
@@ -18536,7 +20280,7 @@
       </p:sp>
       <p:sp>
         <p:nvSpPr>
-          <p:cNvPr name="AutoShape 33" id="33"/>
+          <p:cNvPr name="AutoShape 37" id="37"/>
           <p:cNvSpPr/>
           <p:nvPr/>
         </p:nvSpPr>
@@ -18663,9 +20407,174 @@
           </p:spPr>
         </p:sp>
       </p:grpSp>
-      <p:sp>
-        <p:nvSpPr>
-          <p:cNvPr name="TextBox 5" id="5"/>
+      <p:grpSp>
+        <p:nvGrpSpPr>
+          <p:cNvPr name="Group 5" id="5"/>
+          <p:cNvGrpSpPr/>
+          <p:nvPr/>
+        </p:nvGrpSpPr>
+        <p:grpSpPr>
+          <a:xfrm rot="0">
+            <a:off x="0" y="0"/>
+            <a:ext cx="12192000" cy="6858000"/>
+            <a:chOff x="0" y="0"/>
+            <a:chExt cx="16256000" cy="9144000"/>
+          </a:xfrm>
+        </p:grpSpPr>
+        <p:sp>
+          <p:nvSpPr>
+            <p:cNvPr name="Freeform 6" id="6"/>
+            <p:cNvSpPr/>
+            <p:nvPr/>
+          </p:nvSpPr>
+          <p:spPr>
+            <a:xfrm flipH="false" flipV="false" rot="0">
+              <a:off x="0" y="0"/>
+              <a:ext cx="16256000" cy="9144000"/>
+            </a:xfrm>
+            <a:custGeom>
+              <a:avLst/>
+              <a:gdLst/>
+              <a:ahLst/>
+              <a:cxnLst/>
+              <a:rect r="r" b="b" t="t" l="l"/>
+              <a:pathLst>
+                <a:path h="9144000" w="16256000">
+                  <a:moveTo>
+                    <a:pt x="0" y="0"/>
+                  </a:moveTo>
+                  <a:lnTo>
+                    <a:pt x="16256000" y="0"/>
+                  </a:lnTo>
+                  <a:lnTo>
+                    <a:pt x="16256000" y="9144000"/>
+                  </a:lnTo>
+                  <a:lnTo>
+                    <a:pt x="0" y="9144000"/>
+                  </a:lnTo>
+                  <a:lnTo>
+                    <a:pt x="0" y="0"/>
+                  </a:lnTo>
+                  <a:close/>
+                </a:path>
+              </a:pathLst>
+            </a:custGeom>
+            <a:blipFill>
+              <a:blip r:embed="rId4">
+                <a:extLst>
+                  <a:ext uri="{96DAC541-7B7A-43D3-8B79-37D633B846F1}">
+                    <asvg:svgBlip xmlns:asvg="http://schemas.microsoft.com/office/drawing/2016/SVG/main" r:embed="rId5"/>
+                  </a:ext>
+                </a:extLst>
+              </a:blip>
+              <a:stretch>
+                <a:fillRect l="0" t="0" r="0" b="0"/>
+              </a:stretch>
+            </a:blipFill>
+          </p:spPr>
+        </p:sp>
+        <p:sp>
+          <p:nvSpPr>
+            <p:cNvPr name="Freeform 7" id="7"/>
+            <p:cNvSpPr/>
+            <p:nvPr/>
+          </p:nvSpPr>
+          <p:spPr>
+            <a:xfrm flipH="false" flipV="false" rot="0">
+              <a:off x="11887200" y="0"/>
+              <a:ext cx="3556000" cy="803656"/>
+            </a:xfrm>
+            <a:custGeom>
+              <a:avLst/>
+              <a:gdLst/>
+              <a:ahLst/>
+              <a:cxnLst/>
+              <a:rect r="r" b="b" t="t" l="l"/>
+              <a:pathLst>
+                <a:path h="803656" w="3556000">
+                  <a:moveTo>
+                    <a:pt x="0" y="0"/>
+                  </a:moveTo>
+                  <a:lnTo>
+                    <a:pt x="3556000" y="0"/>
+                  </a:lnTo>
+                  <a:lnTo>
+                    <a:pt x="3556000" y="803656"/>
+                  </a:lnTo>
+                  <a:lnTo>
+                    <a:pt x="0" y="803656"/>
+                  </a:lnTo>
+                  <a:lnTo>
+                    <a:pt x="0" y="0"/>
+                  </a:lnTo>
+                  <a:close/>
+                </a:path>
+              </a:pathLst>
+            </a:custGeom>
+            <a:blipFill>
+              <a:blip r:embed="rId6"/>
+              <a:stretch>
+                <a:fillRect l="0" t="0" r="0" b="0"/>
+              </a:stretch>
+            </a:blipFill>
+          </p:spPr>
+        </p:sp>
+        <p:sp>
+          <p:nvSpPr>
+            <p:cNvPr name="Freeform 8" id="8"/>
+            <p:cNvSpPr/>
+            <p:nvPr/>
+          </p:nvSpPr>
+          <p:spPr>
+            <a:xfrm flipH="false" flipV="false" rot="0">
+              <a:off x="812800" y="127000"/>
+              <a:ext cx="2413000" cy="504536"/>
+            </a:xfrm>
+            <a:custGeom>
+              <a:avLst/>
+              <a:gdLst/>
+              <a:ahLst/>
+              <a:cxnLst/>
+              <a:rect r="r" b="b" t="t" l="l"/>
+              <a:pathLst>
+                <a:path h="504536" w="2413000">
+                  <a:moveTo>
+                    <a:pt x="0" y="0"/>
+                  </a:moveTo>
+                  <a:lnTo>
+                    <a:pt x="2413000" y="0"/>
+                  </a:lnTo>
+                  <a:lnTo>
+                    <a:pt x="2413000" y="504536"/>
+                  </a:lnTo>
+                  <a:lnTo>
+                    <a:pt x="0" y="504536"/>
+                  </a:lnTo>
+                  <a:lnTo>
+                    <a:pt x="0" y="0"/>
+                  </a:lnTo>
+                  <a:close/>
+                </a:path>
+              </a:pathLst>
+            </a:custGeom>
+            <a:blipFill>
+              <a:blip r:embed="rId7">
+                <a:extLst>
+                  <a:ext uri="{96DAC541-7B7A-43D3-8B79-37D633B846F1}">
+                    <asvg:svgBlip xmlns:asvg="http://schemas.microsoft.com/office/drawing/2016/SVG/main" r:embed="rId8"/>
+                  </a:ext>
+                </a:extLst>
+              </a:blip>
+              <a:stretch>
+                <a:fillRect l="0" t="0" r="0" b="0"/>
+              </a:stretch>
+            </a:blipFill>
+          </p:spPr>
+        </p:sp>
+      </p:grpSp>
+      <p:sp>
+        <p:nvSpPr>
+          <p:cNvPr name="TextBox 9" id="9"/>
           <p:cNvSpPr txBox="true"/>
           <p:nvPr/>
         </p:nvSpPr>
@@ -18706,7 +20615,7 @@
       </p:sp>
       <p:sp>
         <p:nvSpPr>
-          <p:cNvPr name="TextBox 6" id="6"/>
+          <p:cNvPr name="TextBox 10" id="10"/>
           <p:cNvSpPr txBox="true"/>
           <p:nvPr/>
         </p:nvSpPr>
@@ -18747,7 +20656,7 @@
       </p:sp>
       <p:sp>
         <p:nvSpPr>
-          <p:cNvPr name="TextBox 7" id="7"/>
+          <p:cNvPr name="TextBox 11" id="11"/>
           <p:cNvSpPr txBox="true"/>
           <p:nvPr/>
         </p:nvSpPr>
@@ -18788,7 +20697,7 @@
       </p:sp>
       <p:sp>
         <p:nvSpPr>
-          <p:cNvPr name="TextBox 8" id="8"/>
+          <p:cNvPr name="TextBox 12" id="12"/>
           <p:cNvSpPr txBox="true"/>
           <p:nvPr/>
         </p:nvSpPr>
@@ -18829,7 +20738,7 @@
       </p:sp>
       <p:sp>
         <p:nvSpPr>
-          <p:cNvPr name="TextBox 9" id="9"/>
+          <p:cNvPr name="TextBox 13" id="13"/>
           <p:cNvSpPr txBox="true"/>
           <p:nvPr/>
         </p:nvSpPr>
@@ -18870,7 +20779,7 @@
       </p:sp>
       <p:sp>
         <p:nvSpPr>
-          <p:cNvPr name="TextBox 10" id="10"/>
+          <p:cNvPr name="TextBox 14" id="14"/>
           <p:cNvSpPr txBox="true"/>
           <p:nvPr/>
         </p:nvSpPr>
@@ -18911,7 +20820,7 @@
       </p:sp>
       <p:sp>
         <p:nvSpPr>
-          <p:cNvPr name="AutoShape 11" id="11"/>
+          <p:cNvPr name="AutoShape 15" id="15"/>
           <p:cNvSpPr/>
           <p:nvPr/>
         </p:nvSpPr>
@@ -19046,6 +20955,171 @@
         </p:nvGrpSpPr>
         <p:grpSpPr>
           <a:xfrm rot="0">
+            <a:off x="0" y="0"/>
+            <a:ext cx="12192000" cy="6858000"/>
+            <a:chOff x="0" y="0"/>
+            <a:chExt cx="16256000" cy="9144000"/>
+          </a:xfrm>
+        </p:grpSpPr>
+        <p:sp>
+          <p:nvSpPr>
+            <p:cNvPr name="Freeform 6" id="6"/>
+            <p:cNvSpPr/>
+            <p:nvPr/>
+          </p:nvSpPr>
+          <p:spPr>
+            <a:xfrm flipH="false" flipV="false" rot="0">
+              <a:off x="0" y="0"/>
+              <a:ext cx="16256000" cy="9144000"/>
+            </a:xfrm>
+            <a:custGeom>
+              <a:avLst/>
+              <a:gdLst/>
+              <a:ahLst/>
+              <a:cxnLst/>
+              <a:rect r="r" b="b" t="t" l="l"/>
+              <a:pathLst>
+                <a:path h="9144000" w="16256000">
+                  <a:moveTo>
+                    <a:pt x="0" y="0"/>
+                  </a:moveTo>
+                  <a:lnTo>
+                    <a:pt x="16256000" y="0"/>
+                  </a:lnTo>
+                  <a:lnTo>
+                    <a:pt x="16256000" y="9144000"/>
+                  </a:lnTo>
+                  <a:lnTo>
+                    <a:pt x="0" y="9144000"/>
+                  </a:lnTo>
+                  <a:lnTo>
+                    <a:pt x="0" y="0"/>
+                  </a:lnTo>
+                  <a:close/>
+                </a:path>
+              </a:pathLst>
+            </a:custGeom>
+            <a:blipFill>
+              <a:blip r:embed="rId4">
+                <a:extLst>
+                  <a:ext uri="{96DAC541-7B7A-43D3-8B79-37D633B846F1}">
+                    <asvg:svgBlip xmlns:asvg="http://schemas.microsoft.com/office/drawing/2016/SVG/main" r:embed="rId5"/>
+                  </a:ext>
+                </a:extLst>
+              </a:blip>
+              <a:stretch>
+                <a:fillRect l="0" t="0" r="0" b="0"/>
+              </a:stretch>
+            </a:blipFill>
+          </p:spPr>
+        </p:sp>
+        <p:sp>
+          <p:nvSpPr>
+            <p:cNvPr name="Freeform 7" id="7"/>
+            <p:cNvSpPr/>
+            <p:nvPr/>
+          </p:nvSpPr>
+          <p:spPr>
+            <a:xfrm flipH="false" flipV="false" rot="0">
+              <a:off x="11887200" y="0"/>
+              <a:ext cx="3556000" cy="803656"/>
+            </a:xfrm>
+            <a:custGeom>
+              <a:avLst/>
+              <a:gdLst/>
+              <a:ahLst/>
+              <a:cxnLst/>
+              <a:rect r="r" b="b" t="t" l="l"/>
+              <a:pathLst>
+                <a:path h="803656" w="3556000">
+                  <a:moveTo>
+                    <a:pt x="0" y="0"/>
+                  </a:moveTo>
+                  <a:lnTo>
+                    <a:pt x="3556000" y="0"/>
+                  </a:lnTo>
+                  <a:lnTo>
+                    <a:pt x="3556000" y="803656"/>
+                  </a:lnTo>
+                  <a:lnTo>
+                    <a:pt x="0" y="803656"/>
+                  </a:lnTo>
+                  <a:lnTo>
+                    <a:pt x="0" y="0"/>
+                  </a:lnTo>
+                  <a:close/>
+                </a:path>
+              </a:pathLst>
+            </a:custGeom>
+            <a:blipFill>
+              <a:blip r:embed="rId6"/>
+              <a:stretch>
+                <a:fillRect l="0" t="0" r="0" b="0"/>
+              </a:stretch>
+            </a:blipFill>
+          </p:spPr>
+        </p:sp>
+        <p:sp>
+          <p:nvSpPr>
+            <p:cNvPr name="Freeform 8" id="8"/>
+            <p:cNvSpPr/>
+            <p:nvPr/>
+          </p:nvSpPr>
+          <p:spPr>
+            <a:xfrm flipH="false" flipV="false" rot="0">
+              <a:off x="812800" y="127000"/>
+              <a:ext cx="2413000" cy="504536"/>
+            </a:xfrm>
+            <a:custGeom>
+              <a:avLst/>
+              <a:gdLst/>
+              <a:ahLst/>
+              <a:cxnLst/>
+              <a:rect r="r" b="b" t="t" l="l"/>
+              <a:pathLst>
+                <a:path h="504536" w="2413000">
+                  <a:moveTo>
+                    <a:pt x="0" y="0"/>
+                  </a:moveTo>
+                  <a:lnTo>
+                    <a:pt x="2413000" y="0"/>
+                  </a:lnTo>
+                  <a:lnTo>
+                    <a:pt x="2413000" y="504536"/>
+                  </a:lnTo>
+                  <a:lnTo>
+                    <a:pt x="0" y="504536"/>
+                  </a:lnTo>
+                  <a:lnTo>
+                    <a:pt x="0" y="0"/>
+                  </a:lnTo>
+                  <a:close/>
+                </a:path>
+              </a:pathLst>
+            </a:custGeom>
+            <a:blipFill>
+              <a:blip r:embed="rId7">
+                <a:extLst>
+                  <a:ext uri="{96DAC541-7B7A-43D3-8B79-37D633B846F1}">
+                    <asvg:svgBlip xmlns:asvg="http://schemas.microsoft.com/office/drawing/2016/SVG/main" r:embed="rId8"/>
+                  </a:ext>
+                </a:extLst>
+              </a:blip>
+              <a:stretch>
+                <a:fillRect l="0" t="0" r="0" b="0"/>
+              </a:stretch>
+            </a:blipFill>
+          </p:spPr>
+        </p:sp>
+      </p:grpSp>
+      <p:grpSp>
+        <p:nvGrpSpPr>
+          <p:cNvPr name="Group 9" id="9"/>
+          <p:cNvGrpSpPr/>
+          <p:nvPr/>
+        </p:nvGrpSpPr>
+        <p:grpSpPr>
+          <a:xfrm rot="0">
             <a:off x="609600" y="3648075"/>
             <a:ext cx="7029450" cy="1066800"/>
             <a:chOff x="0" y="0"/>
@@ -19054,7 +21128,7 @@
         </p:grpSpPr>
         <p:sp>
           <p:nvSpPr>
-            <p:cNvPr name="Freeform 6" id="6"/>
+            <p:cNvPr name="Freeform 10" id="10"/>
             <p:cNvSpPr/>
             <p:nvPr/>
           </p:nvSpPr>
@@ -19118,7 +21192,7 @@
       </p:grpSp>
       <p:grpSp>
         <p:nvGrpSpPr>
-          <p:cNvPr name="Group 7" id="7"/>
+          <p:cNvPr name="Group 11" id="11"/>
           <p:cNvGrpSpPr/>
           <p:nvPr/>
         </p:nvGrpSpPr>
@@ -19132,7 +21206,7 @@
         </p:grpSpPr>
         <p:sp>
           <p:nvSpPr>
-            <p:cNvPr name="Freeform 8" id="8"/>
+            <p:cNvPr name="Freeform 12" id="12"/>
             <p:cNvSpPr/>
             <p:nvPr/>
           </p:nvSpPr>
@@ -19169,7 +21243,7 @@
               </a:pathLst>
             </a:custGeom>
             <a:blipFill>
-              <a:blip r:embed="rId4"/>
+              <a:blip r:embed="rId9"/>
               <a:stretch>
                 <a:fillRect l="-78303" t="0" r="-78303" b="0"/>
               </a:stretch>
@@ -19179,7 +21253,7 @@
       </p:grpSp>
       <p:sp>
         <p:nvSpPr>
-          <p:cNvPr name="AutoShape 9" id="9"/>
+          <p:cNvPr name="AutoShape 13" id="13"/>
           <p:cNvSpPr/>
           <p:nvPr/>
         </p:nvSpPr>
@@ -19203,8 +21277,8 @@
       </p:sp>
       <p:sp>
         <p:nvSpPr>
-          <p:cNvPr name="Freeform 10" id="10">
-            <a:hlinkClick r:id="rId6" tooltip="https://backtrack-learning.vercel.app/demo"/>
+          <p:cNvPr name="Freeform 14" id="14">
+            <a:hlinkClick r:id="rId11" tooltip="https://backtrack-learning.vercel.app/demo"/>
           </p:cNvPr>
           <p:cNvSpPr/>
           <p:nvPr/>
@@ -19242,7 +21316,7 @@
             </a:pathLst>
           </a:custGeom>
           <a:blipFill>
-            <a:blip r:embed="rId5"/>
+            <a:blip r:embed="rId10"/>
             <a:stretch>
               <a:fillRect l="0" t="0" r="0" b="0"/>
             </a:stretch>
@@ -19251,7 +21325,7 @@
       </p:sp>
       <p:sp>
         <p:nvSpPr>
-          <p:cNvPr name="TextBox 11" id="11"/>
+          <p:cNvPr name="TextBox 15" id="15"/>
           <p:cNvSpPr txBox="true"/>
           <p:nvPr/>
         </p:nvSpPr>
@@ -19292,7 +21366,7 @@
       </p:sp>
       <p:sp>
         <p:nvSpPr>
-          <p:cNvPr name="TextBox 12" id="12"/>
+          <p:cNvPr name="TextBox 16" id="16"/>
           <p:cNvSpPr txBox="true"/>
           <p:nvPr/>
         </p:nvSpPr>
@@ -19333,7 +21407,7 @@
       </p:sp>
       <p:sp>
         <p:nvSpPr>
-          <p:cNvPr name="TextBox 13" id="13"/>
+          <p:cNvPr name="TextBox 17" id="17"/>
           <p:cNvSpPr txBox="true"/>
           <p:nvPr/>
         </p:nvSpPr>
@@ -19393,7 +21467,7 @@
       </p:sp>
       <p:sp>
         <p:nvSpPr>
-          <p:cNvPr name="TextBox 14" id="14"/>
+          <p:cNvPr name="TextBox 18" id="18"/>
           <p:cNvSpPr txBox="true"/>
           <p:nvPr/>
         </p:nvSpPr>
@@ -19426,7 +21500,7 @@
                 <a:ea typeface="DM Sans Bold"/>
                 <a:cs typeface="DM Sans Bold"/>
                 <a:sym typeface="DM Sans Bold"/>
-                <a:hlinkClick r:id="rId7" tooltip="https://backtrack-learning.vercel.app/demo"/>
+                <a:hlinkClick r:id="rId12" tooltip="https://backtrack-learning.vercel.app/demo"/>
               </a:rPr>
               <a:t>Try BACKTRACK</a:t>
             </a:r>
@@ -19435,7 +21509,7 @@
       </p:sp>
       <p:sp>
         <p:nvSpPr>
-          <p:cNvPr name="TextBox 15" id="15"/>
+          <p:cNvPr name="TextBox 19" id="19"/>
           <p:cNvSpPr txBox="true"/>
           <p:nvPr/>
         </p:nvSpPr>
@@ -19468,7 +21542,7 @@
                 <a:ea typeface="DM Sans"/>
                 <a:cs typeface="DM Sans"/>
                 <a:sym typeface="DM Sans"/>
-                <a:hlinkClick r:id="rId8" tooltip="https://backtrack-learning.vercel.app/demo"/>
+                <a:hlinkClick r:id="rId13" tooltip="https://backtrack-learning.vercel.app/demo"/>
               </a:rPr>
               <a:t>backtrack-learning.vercel.app/demo</a:t>
             </a:r>
@@ -19477,7 +21551,7 @@
       </p:sp>
       <p:sp>
         <p:nvSpPr>
-          <p:cNvPr name="TextBox 16" id="16"/>
+          <p:cNvPr name="TextBox 20" id="20"/>
           <p:cNvSpPr txBox="true"/>
           <p:nvPr/>
         </p:nvSpPr>
@@ -19518,7 +21592,7 @@
       </p:sp>
       <p:sp>
         <p:nvSpPr>
-          <p:cNvPr name="TextBox 17" id="17"/>
+          <p:cNvPr name="TextBox 21" id="21"/>
           <p:cNvSpPr txBox="true"/>
           <p:nvPr/>
         </p:nvSpPr>
@@ -19662,9 +21736,174 @@
           </p:spPr>
         </p:sp>
       </p:grpSp>
-      <p:sp>
-        <p:nvSpPr>
-          <p:cNvPr name="TextBox 5" id="5"/>
+      <p:grpSp>
+        <p:nvGrpSpPr>
+          <p:cNvPr name="Group 5" id="5"/>
+          <p:cNvGrpSpPr/>
+          <p:nvPr/>
+        </p:nvGrpSpPr>
+        <p:grpSpPr>
+          <a:xfrm rot="0">
+            <a:off x="0" y="0"/>
+            <a:ext cx="12192000" cy="6858000"/>
+            <a:chOff x="0" y="0"/>
+            <a:chExt cx="16256000" cy="9144000"/>
+          </a:xfrm>
+        </p:grpSpPr>
+        <p:sp>
+          <p:nvSpPr>
+            <p:cNvPr name="Freeform 6" id="6"/>
+            <p:cNvSpPr/>
+            <p:nvPr/>
+          </p:nvSpPr>
+          <p:spPr>
+            <a:xfrm flipH="false" flipV="false" rot="0">
+              <a:off x="0" y="0"/>
+              <a:ext cx="16256000" cy="9144000"/>
+            </a:xfrm>
+            <a:custGeom>
+              <a:avLst/>
+              <a:gdLst/>
+              <a:ahLst/>
+              <a:cxnLst/>
+              <a:rect r="r" b="b" t="t" l="l"/>
+              <a:pathLst>
+                <a:path h="9144000" w="16256000">
+                  <a:moveTo>
+                    <a:pt x="0" y="0"/>
+                  </a:moveTo>
+                  <a:lnTo>
+                    <a:pt x="16256000" y="0"/>
+                  </a:lnTo>
+                  <a:lnTo>
+                    <a:pt x="16256000" y="9144000"/>
+                  </a:lnTo>
+                  <a:lnTo>
+                    <a:pt x="0" y="9144000"/>
+                  </a:lnTo>
+                  <a:lnTo>
+                    <a:pt x="0" y="0"/>
+                  </a:lnTo>
+                  <a:close/>
+                </a:path>
+              </a:pathLst>
+            </a:custGeom>
+            <a:blipFill>
+              <a:blip r:embed="rId4">
+                <a:extLst>
+                  <a:ext uri="{96DAC541-7B7A-43D3-8B79-37D633B846F1}">
+                    <asvg:svgBlip xmlns:asvg="http://schemas.microsoft.com/office/drawing/2016/SVG/main" r:embed="rId5"/>
+                  </a:ext>
+                </a:extLst>
+              </a:blip>
+              <a:stretch>
+                <a:fillRect l="0" t="0" r="0" b="0"/>
+              </a:stretch>
+            </a:blipFill>
+          </p:spPr>
+        </p:sp>
+        <p:sp>
+          <p:nvSpPr>
+            <p:cNvPr name="Freeform 7" id="7"/>
+            <p:cNvSpPr/>
+            <p:nvPr/>
+          </p:nvSpPr>
+          <p:spPr>
+            <a:xfrm flipH="false" flipV="false" rot="0">
+              <a:off x="11887200" y="0"/>
+              <a:ext cx="3556000" cy="803656"/>
+            </a:xfrm>
+            <a:custGeom>
+              <a:avLst/>
+              <a:gdLst/>
+              <a:ahLst/>
+              <a:cxnLst/>
+              <a:rect r="r" b="b" t="t" l="l"/>
+              <a:pathLst>
+                <a:path h="803656" w="3556000">
+                  <a:moveTo>
+                    <a:pt x="0" y="0"/>
+                  </a:moveTo>
+                  <a:lnTo>
+                    <a:pt x="3556000" y="0"/>
+                  </a:lnTo>
+                  <a:lnTo>
+                    <a:pt x="3556000" y="803656"/>
+                  </a:lnTo>
+                  <a:lnTo>
+                    <a:pt x="0" y="803656"/>
+                  </a:lnTo>
+                  <a:lnTo>
+                    <a:pt x="0" y="0"/>
+                  </a:lnTo>
+                  <a:close/>
+                </a:path>
+              </a:pathLst>
+            </a:custGeom>
+            <a:blipFill>
+              <a:blip r:embed="rId6"/>
+              <a:stretch>
+                <a:fillRect l="0" t="0" r="0" b="0"/>
+              </a:stretch>
+            </a:blipFill>
+          </p:spPr>
+        </p:sp>
+        <p:sp>
+          <p:nvSpPr>
+            <p:cNvPr name="Freeform 8" id="8"/>
+            <p:cNvSpPr/>
+            <p:nvPr/>
+          </p:nvSpPr>
+          <p:spPr>
+            <a:xfrm flipH="false" flipV="false" rot="0">
+              <a:off x="812800" y="127000"/>
+              <a:ext cx="2413000" cy="504536"/>
+            </a:xfrm>
+            <a:custGeom>
+              <a:avLst/>
+              <a:gdLst/>
+              <a:ahLst/>
+              <a:cxnLst/>
+              <a:rect r="r" b="b" t="t" l="l"/>
+              <a:pathLst>
+                <a:path h="504536" w="2413000">
+                  <a:moveTo>
+                    <a:pt x="0" y="0"/>
+                  </a:moveTo>
+                  <a:lnTo>
+                    <a:pt x="2413000" y="0"/>
+                  </a:lnTo>
+                  <a:lnTo>
+                    <a:pt x="2413000" y="504536"/>
+                  </a:lnTo>
+                  <a:lnTo>
+                    <a:pt x="0" y="504536"/>
+                  </a:lnTo>
+                  <a:lnTo>
+                    <a:pt x="0" y="0"/>
+                  </a:lnTo>
+                  <a:close/>
+                </a:path>
+              </a:pathLst>
+            </a:custGeom>
+            <a:blipFill>
+              <a:blip r:embed="rId7">
+                <a:extLst>
+                  <a:ext uri="{96DAC541-7B7A-43D3-8B79-37D633B846F1}">
+                    <asvg:svgBlip xmlns:asvg="http://schemas.microsoft.com/office/drawing/2016/SVG/main" r:embed="rId8"/>
+                  </a:ext>
+                </a:extLst>
+              </a:blip>
+              <a:stretch>
+                <a:fillRect l="0" t="0" r="0" b="0"/>
+              </a:stretch>
+            </a:blipFill>
+          </p:spPr>
+        </p:sp>
+      </p:grpSp>
+      <p:sp>
+        <p:nvSpPr>
+          <p:cNvPr name="TextBox 9" id="9"/>
           <p:cNvSpPr txBox="true"/>
           <p:nvPr/>
         </p:nvSpPr>
@@ -19705,7 +21944,7 @@
       </p:sp>
       <p:sp>
         <p:nvSpPr>
-          <p:cNvPr name="TextBox 6" id="6"/>
+          <p:cNvPr name="TextBox 10" id="10"/>
           <p:cNvSpPr txBox="true"/>
           <p:nvPr/>
         </p:nvSpPr>
@@ -19746,7 +21985,7 @@
       </p:sp>
       <p:grpSp>
         <p:nvGrpSpPr>
-          <p:cNvPr name="Group 7" id="7"/>
+          <p:cNvPr name="Group 11" id="11"/>
           <p:cNvGrpSpPr/>
           <p:nvPr/>
         </p:nvGrpSpPr>
@@ -19760,7 +21999,7 @@
         </p:grpSpPr>
         <p:sp>
           <p:nvSpPr>
-            <p:cNvPr name="Freeform 8" id="8"/>
+            <p:cNvPr name="Freeform 12" id="12"/>
             <p:cNvSpPr/>
             <p:nvPr/>
           </p:nvSpPr>
@@ -19812,7 +22051,7 @@
       </p:grpSp>
       <p:sp>
         <p:nvSpPr>
-          <p:cNvPr name="TextBox 9" id="9"/>
+          <p:cNvPr name="TextBox 13" id="13"/>
           <p:cNvSpPr txBox="true"/>
           <p:nvPr/>
         </p:nvSpPr>
@@ -19853,7 +22092,7 @@
       </p:sp>
       <p:sp>
         <p:nvSpPr>
-          <p:cNvPr name="TextBox 10" id="10"/>
+          <p:cNvPr name="TextBox 14" id="14"/>
           <p:cNvSpPr txBox="true"/>
           <p:nvPr/>
         </p:nvSpPr>
@@ -19894,7 +22133,7 @@
       </p:sp>
       <p:sp>
         <p:nvSpPr>
-          <p:cNvPr name="AutoShape 11" id="11"/>
+          <p:cNvPr name="AutoShape 15" id="15"/>
           <p:cNvSpPr/>
           <p:nvPr/>
         </p:nvSpPr>
@@ -19913,7 +22152,7 @@
       </p:sp>
       <p:grpSp>
         <p:nvGrpSpPr>
-          <p:cNvPr name="Group 12" id="12"/>
+          <p:cNvPr name="Group 16" id="16"/>
           <p:cNvGrpSpPr/>
           <p:nvPr/>
         </p:nvGrpSpPr>
@@ -19927,7 +22166,7 @@
         </p:grpSpPr>
         <p:sp>
           <p:nvSpPr>
-            <p:cNvPr name="Freeform 13" id="13"/>
+            <p:cNvPr name="Freeform 17" id="17"/>
             <p:cNvSpPr/>
             <p:nvPr/>
           </p:nvSpPr>
@@ -19985,7 +22224,7 @@
       </p:grpSp>
       <p:grpSp>
         <p:nvGrpSpPr>
-          <p:cNvPr name="Group 14" id="14"/>
+          <p:cNvPr name="Group 18" id="18"/>
           <p:cNvGrpSpPr/>
           <p:nvPr/>
         </p:nvGrpSpPr>
@@ -19999,7 +22238,7 @@
         </p:grpSpPr>
         <p:sp>
           <p:nvSpPr>
-            <p:cNvPr name="Freeform 15" id="15"/>
+            <p:cNvPr name="Freeform 19" id="19"/>
             <p:cNvSpPr/>
             <p:nvPr/>
           </p:nvSpPr>
@@ -20057,7 +22296,7 @@
       </p:grpSp>
       <p:grpSp>
         <p:nvGrpSpPr>
-          <p:cNvPr name="Group 16" id="16"/>
+          <p:cNvPr name="Group 20" id="20"/>
           <p:cNvGrpSpPr/>
           <p:nvPr/>
         </p:nvGrpSpPr>
@@ -20071,7 +22310,7 @@
         </p:grpSpPr>
         <p:sp>
           <p:nvSpPr>
-            <p:cNvPr name="Freeform 17" id="17"/>
+            <p:cNvPr name="Freeform 21" id="21"/>
             <p:cNvSpPr/>
             <p:nvPr/>
           </p:nvSpPr>
@@ -20123,7 +22362,7 @@
       </p:grpSp>
       <p:sp>
         <p:nvSpPr>
-          <p:cNvPr name="TextBox 18" id="18"/>
+          <p:cNvPr name="TextBox 22" id="22"/>
           <p:cNvSpPr txBox="true"/>
           <p:nvPr/>
         </p:nvSpPr>
@@ -20164,7 +22403,7 @@
       </p:sp>
       <p:sp>
         <p:nvSpPr>
-          <p:cNvPr name="TextBox 19" id="19"/>
+          <p:cNvPr name="TextBox 23" id="23"/>
           <p:cNvSpPr txBox="true"/>
           <p:nvPr/>
         </p:nvSpPr>
@@ -20205,7 +22444,7 @@
       </p:sp>
       <p:sp>
         <p:nvSpPr>
-          <p:cNvPr name="AutoShape 20" id="20"/>
+          <p:cNvPr name="AutoShape 24" id="24"/>
           <p:cNvSpPr/>
           <p:nvPr/>
         </p:nvSpPr>
@@ -20224,7 +22463,7 @@
       </p:sp>
       <p:grpSp>
         <p:nvGrpSpPr>
-          <p:cNvPr name="Group 21" id="21"/>
+          <p:cNvPr name="Group 25" id="25"/>
           <p:cNvGrpSpPr/>
           <p:nvPr/>
         </p:nvGrpSpPr>
@@ -20238,7 +22477,7 @@
         </p:grpSpPr>
         <p:sp>
           <p:nvSpPr>
-            <p:cNvPr name="Freeform 22" id="22"/>
+            <p:cNvPr name="Freeform 26" id="26"/>
             <p:cNvSpPr/>
             <p:nvPr/>
           </p:nvSpPr>
@@ -20296,7 +22535,7 @@
       </p:grpSp>
       <p:grpSp>
         <p:nvGrpSpPr>
-          <p:cNvPr name="Group 23" id="23"/>
+          <p:cNvPr name="Group 27" id="27"/>
           <p:cNvGrpSpPr/>
           <p:nvPr/>
         </p:nvGrpSpPr>
@@ -20310,7 +22549,7 @@
         </p:grpSpPr>
         <p:sp>
           <p:nvSpPr>
-            <p:cNvPr name="Freeform 24" id="24"/>
+            <p:cNvPr name="Freeform 28" id="28"/>
             <p:cNvSpPr/>
             <p:nvPr/>
           </p:nvSpPr>
@@ -20368,7 +22607,7 @@
       </p:grpSp>
       <p:grpSp>
         <p:nvGrpSpPr>
-          <p:cNvPr name="Group 25" id="25"/>
+          <p:cNvPr name="Group 29" id="29"/>
           <p:cNvGrpSpPr/>
           <p:nvPr/>
         </p:nvGrpSpPr>
@@ -20382,7 +22621,7 @@
         </p:grpSpPr>
         <p:sp>
           <p:nvSpPr>
-            <p:cNvPr name="Freeform 26" id="26"/>
+            <p:cNvPr name="Freeform 30" id="30"/>
             <p:cNvSpPr/>
             <p:nvPr/>
           </p:nvSpPr>
@@ -20434,7 +22673,7 @@
       </p:grpSp>
       <p:sp>
         <p:nvSpPr>
-          <p:cNvPr name="TextBox 27" id="27"/>
+          <p:cNvPr name="TextBox 31" id="31"/>
           <p:cNvSpPr txBox="true"/>
           <p:nvPr/>
         </p:nvSpPr>
@@ -20475,7 +22714,7 @@
       </p:sp>
       <p:sp>
         <p:nvSpPr>
-          <p:cNvPr name="TextBox 28" id="28"/>
+          <p:cNvPr name="TextBox 32" id="32"/>
           <p:cNvSpPr txBox="true"/>
           <p:nvPr/>
         </p:nvSpPr>
@@ -20516,7 +22755,7 @@
       </p:sp>
       <p:sp>
         <p:nvSpPr>
-          <p:cNvPr name="TextBox 29" id="29"/>
+          <p:cNvPr name="TextBox 33" id="33"/>
           <p:cNvSpPr txBox="true"/>
           <p:nvPr/>
         </p:nvSpPr>
@@ -20557,7 +22796,7 @@
       </p:sp>
       <p:sp>
         <p:nvSpPr>
-          <p:cNvPr name="TextBox 30" id="30"/>
+          <p:cNvPr name="TextBox 34" id="34"/>
           <p:cNvSpPr txBox="true"/>
           <p:nvPr/>
         </p:nvSpPr>
@@ -20598,7 +22837,7 @@
       </p:sp>
       <p:sp>
         <p:nvSpPr>
-          <p:cNvPr name="TextBox 31" id="31"/>
+          <p:cNvPr name="TextBox 35" id="35"/>
           <p:cNvSpPr txBox="true"/>
           <p:nvPr/>
         </p:nvSpPr>
@@ -20631,7 +22870,7 @@
                 <a:ea typeface="DM Sans"/>
                 <a:cs typeface="DM Sans"/>
                 <a:sym typeface="DM Sans"/>
-                <a:hlinkClick r:id="rId4" tooltip="https://doi.org/10.1038/s44159-022-00089-1"/>
+                <a:hlinkClick r:id="rId9" tooltip="https://doi.org/10.1038/s44159-022-00089-1"/>
               </a:rPr>
               <a:t>Spacing and retrieval · 2022</a:t>
             </a:r>
@@ -20640,7 +22879,7 @@
       </p:sp>
       <p:sp>
         <p:nvSpPr>
-          <p:cNvPr name="AutoShape 32" id="32"/>
+          <p:cNvPr name="AutoShape 36" id="36"/>
           <p:cNvSpPr/>
           <p:nvPr/>
         </p:nvSpPr>
@@ -20767,9 +23006,174 @@
           </p:spPr>
         </p:sp>
       </p:grpSp>
-      <p:sp>
-        <p:nvSpPr>
-          <p:cNvPr name="TextBox 5" id="5"/>
+      <p:grpSp>
+        <p:nvGrpSpPr>
+          <p:cNvPr name="Group 5" id="5"/>
+          <p:cNvGrpSpPr/>
+          <p:nvPr/>
+        </p:nvGrpSpPr>
+        <p:grpSpPr>
+          <a:xfrm rot="0">
+            <a:off x="0" y="0"/>
+            <a:ext cx="12192000" cy="6858000"/>
+            <a:chOff x="0" y="0"/>
+            <a:chExt cx="16256000" cy="9144000"/>
+          </a:xfrm>
+        </p:grpSpPr>
+        <p:sp>
+          <p:nvSpPr>
+            <p:cNvPr name="Freeform 6" id="6"/>
+            <p:cNvSpPr/>
+            <p:nvPr/>
+          </p:nvSpPr>
+          <p:spPr>
+            <a:xfrm flipH="false" flipV="false" rot="0">
+              <a:off x="0" y="0"/>
+              <a:ext cx="16256000" cy="9144000"/>
+            </a:xfrm>
+            <a:custGeom>
+              <a:avLst/>
+              <a:gdLst/>
+              <a:ahLst/>
+              <a:cxnLst/>
+              <a:rect r="r" b="b" t="t" l="l"/>
+              <a:pathLst>
+                <a:path h="9144000" w="16256000">
+                  <a:moveTo>
+                    <a:pt x="0" y="0"/>
+                  </a:moveTo>
+                  <a:lnTo>
+                    <a:pt x="16256000" y="0"/>
+                  </a:lnTo>
+                  <a:lnTo>
+                    <a:pt x="16256000" y="9144000"/>
+                  </a:lnTo>
+                  <a:lnTo>
+                    <a:pt x="0" y="9144000"/>
+                  </a:lnTo>
+                  <a:lnTo>
+                    <a:pt x="0" y="0"/>
+                  </a:lnTo>
+                  <a:close/>
+                </a:path>
+              </a:pathLst>
+            </a:custGeom>
+            <a:blipFill>
+              <a:blip r:embed="rId4">
+                <a:extLst>
+                  <a:ext uri="{96DAC541-7B7A-43D3-8B79-37D633B846F1}">
+                    <asvg:svgBlip xmlns:asvg="http://schemas.microsoft.com/office/drawing/2016/SVG/main" r:embed="rId5"/>
+                  </a:ext>
+                </a:extLst>
+              </a:blip>
+              <a:stretch>
+                <a:fillRect l="0" t="0" r="0" b="0"/>
+              </a:stretch>
+            </a:blipFill>
+          </p:spPr>
+        </p:sp>
+        <p:sp>
+          <p:nvSpPr>
+            <p:cNvPr name="Freeform 7" id="7"/>
+            <p:cNvSpPr/>
+            <p:nvPr/>
+          </p:nvSpPr>
+          <p:spPr>
+            <a:xfrm flipH="false" flipV="false" rot="0">
+              <a:off x="11887200" y="0"/>
+              <a:ext cx="3556000" cy="803656"/>
+            </a:xfrm>
+            <a:custGeom>
+              <a:avLst/>
+              <a:gdLst/>
+              <a:ahLst/>
+              <a:cxnLst/>
+              <a:rect r="r" b="b" t="t" l="l"/>
+              <a:pathLst>
+                <a:path h="803656" w="3556000">
+                  <a:moveTo>
+                    <a:pt x="0" y="0"/>
+                  </a:moveTo>
+                  <a:lnTo>
+                    <a:pt x="3556000" y="0"/>
+                  </a:lnTo>
+                  <a:lnTo>
+                    <a:pt x="3556000" y="803656"/>
+                  </a:lnTo>
+                  <a:lnTo>
+                    <a:pt x="0" y="803656"/>
+                  </a:lnTo>
+                  <a:lnTo>
+                    <a:pt x="0" y="0"/>
+                  </a:lnTo>
+                  <a:close/>
+                </a:path>
+              </a:pathLst>
+            </a:custGeom>
+            <a:blipFill>
+              <a:blip r:embed="rId6"/>
+              <a:stretch>
+                <a:fillRect l="0" t="0" r="0" b="0"/>
+              </a:stretch>
+            </a:blipFill>
+          </p:spPr>
+        </p:sp>
+        <p:sp>
+          <p:nvSpPr>
+            <p:cNvPr name="Freeform 8" id="8"/>
+            <p:cNvSpPr/>
+            <p:nvPr/>
+          </p:nvSpPr>
+          <p:spPr>
+            <a:xfrm flipH="false" flipV="false" rot="0">
+              <a:off x="812800" y="127000"/>
+              <a:ext cx="2413000" cy="504536"/>
+            </a:xfrm>
+            <a:custGeom>
+              <a:avLst/>
+              <a:gdLst/>
+              <a:ahLst/>
+              <a:cxnLst/>
+              <a:rect r="r" b="b" t="t" l="l"/>
+              <a:pathLst>
+                <a:path h="504536" w="2413000">
+                  <a:moveTo>
+                    <a:pt x="0" y="0"/>
+                  </a:moveTo>
+                  <a:lnTo>
+                    <a:pt x="2413000" y="0"/>
+                  </a:lnTo>
+                  <a:lnTo>
+                    <a:pt x="2413000" y="504536"/>
+                  </a:lnTo>
+                  <a:lnTo>
+                    <a:pt x="0" y="504536"/>
+                  </a:lnTo>
+                  <a:lnTo>
+                    <a:pt x="0" y="0"/>
+                  </a:lnTo>
+                  <a:close/>
+                </a:path>
+              </a:pathLst>
+            </a:custGeom>
+            <a:blipFill>
+              <a:blip r:embed="rId7">
+                <a:extLst>
+                  <a:ext uri="{96DAC541-7B7A-43D3-8B79-37D633B846F1}">
+                    <asvg:svgBlip xmlns:asvg="http://schemas.microsoft.com/office/drawing/2016/SVG/main" r:embed="rId8"/>
+                  </a:ext>
+                </a:extLst>
+              </a:blip>
+              <a:stretch>
+                <a:fillRect l="0" t="0" r="0" b="0"/>
+              </a:stretch>
+            </a:blipFill>
+          </p:spPr>
+        </p:sp>
+      </p:grpSp>
+      <p:sp>
+        <p:nvSpPr>
+          <p:cNvPr name="TextBox 9" id="9"/>
           <p:cNvSpPr txBox="true"/>
           <p:nvPr/>
         </p:nvSpPr>
@@ -20810,7 +23214,7 @@
       </p:sp>
       <p:sp>
         <p:nvSpPr>
-          <p:cNvPr name="TextBox 6" id="6"/>
+          <p:cNvPr name="TextBox 10" id="10"/>
           <p:cNvSpPr txBox="true"/>
           <p:nvPr/>
         </p:nvSpPr>
@@ -20851,7 +23255,7 @@
       </p:sp>
       <p:sp>
         <p:nvSpPr>
-          <p:cNvPr name="TextBox 7" id="7"/>
+          <p:cNvPr name="TextBox 11" id="11"/>
           <p:cNvSpPr txBox="true"/>
           <p:nvPr/>
         </p:nvSpPr>
@@ -20892,7 +23296,7 @@
       </p:sp>
       <p:sp>
         <p:nvSpPr>
-          <p:cNvPr name="AutoShape 8" id="8"/>
+          <p:cNvPr name="AutoShape 12" id="12"/>
           <p:cNvSpPr/>
           <p:nvPr/>
         </p:nvSpPr>
@@ -20911,7 +23315,7 @@
       </p:sp>
       <p:grpSp>
         <p:nvGrpSpPr>
-          <p:cNvPr name="Group 9" id="9"/>
+          <p:cNvPr name="Group 13" id="13"/>
           <p:cNvGrpSpPr/>
           <p:nvPr/>
         </p:nvGrpSpPr>
@@ -20925,7 +23329,7 @@
         </p:grpSpPr>
         <p:sp>
           <p:nvSpPr>
-            <p:cNvPr name="Freeform 10" id="10"/>
+            <p:cNvPr name="Freeform 14" id="14"/>
             <p:cNvSpPr/>
             <p:nvPr/>
           </p:nvSpPr>
@@ -20977,7 +23381,7 @@
       </p:grpSp>
       <p:sp>
         <p:nvSpPr>
-          <p:cNvPr name="TextBox 11" id="11"/>
+          <p:cNvPr name="TextBox 15" id="15"/>
           <p:cNvSpPr txBox="true"/>
           <p:nvPr/>
         </p:nvSpPr>
@@ -21018,7 +23422,7 @@
       </p:sp>
       <p:sp>
         <p:nvSpPr>
-          <p:cNvPr name="TextBox 12" id="12"/>
+          <p:cNvPr name="TextBox 16" id="16"/>
           <p:cNvSpPr txBox="true"/>
           <p:nvPr/>
         </p:nvSpPr>
@@ -21059,7 +23463,7 @@
       </p:sp>
       <p:grpSp>
         <p:nvGrpSpPr>
-          <p:cNvPr name="Group 13" id="13"/>
+          <p:cNvPr name="Group 17" id="17"/>
           <p:cNvGrpSpPr/>
           <p:nvPr/>
         </p:nvGrpSpPr>
@@ -21073,7 +23477,7 @@
         </p:grpSpPr>
         <p:sp>
           <p:nvSpPr>
-            <p:cNvPr name="Freeform 14" id="14"/>
+            <p:cNvPr name="Freeform 18" id="18"/>
             <p:cNvSpPr/>
             <p:nvPr/>
           </p:nvSpPr>
@@ -21125,7 +23529,7 @@
       </p:grpSp>
       <p:sp>
         <p:nvSpPr>
-          <p:cNvPr name="TextBox 15" id="15"/>
+          <p:cNvPr name="TextBox 19" id="19"/>
           <p:cNvSpPr txBox="true"/>
           <p:nvPr/>
         </p:nvSpPr>
@@ -21166,7 +23570,7 @@
       </p:sp>
       <p:sp>
         <p:nvSpPr>
-          <p:cNvPr name="TextBox 16" id="16"/>
+          <p:cNvPr name="TextBox 20" id="20"/>
           <p:cNvSpPr txBox="true"/>
           <p:nvPr/>
         </p:nvSpPr>
@@ -21207,7 +23611,7 @@
       </p:sp>
       <p:grpSp>
         <p:nvGrpSpPr>
-          <p:cNvPr name="Group 17" id="17"/>
+          <p:cNvPr name="Group 21" id="21"/>
           <p:cNvGrpSpPr/>
           <p:nvPr/>
         </p:nvGrpSpPr>
@@ -21221,7 +23625,7 @@
         </p:grpSpPr>
         <p:sp>
           <p:nvSpPr>
-            <p:cNvPr name="Freeform 18" id="18"/>
+            <p:cNvPr name="Freeform 22" id="22"/>
             <p:cNvSpPr/>
             <p:nvPr/>
           </p:nvSpPr>
@@ -21273,7 +23677,7 @@
       </p:grpSp>
       <p:sp>
         <p:nvSpPr>
-          <p:cNvPr name="TextBox 19" id="19"/>
+          <p:cNvPr name="TextBox 23" id="23"/>
           <p:cNvSpPr txBox="true"/>
           <p:nvPr/>
         </p:nvSpPr>
@@ -21314,7 +23718,7 @@
       </p:sp>
       <p:sp>
         <p:nvSpPr>
-          <p:cNvPr name="TextBox 20" id="20"/>
+          <p:cNvPr name="TextBox 24" id="24"/>
           <p:cNvSpPr txBox="true"/>
           <p:nvPr/>
         </p:nvSpPr>
@@ -21355,7 +23759,7 @@
       </p:sp>
       <p:grpSp>
         <p:nvGrpSpPr>
-          <p:cNvPr name="Group 21" id="21"/>
+          <p:cNvPr name="Group 25" id="25"/>
           <p:cNvGrpSpPr/>
           <p:nvPr/>
         </p:nvGrpSpPr>
@@ -21369,7 +23773,7 @@
         </p:grpSpPr>
         <p:sp>
           <p:nvSpPr>
-            <p:cNvPr name="Freeform 22" id="22"/>
+            <p:cNvPr name="Freeform 26" id="26"/>
             <p:cNvSpPr/>
             <p:nvPr/>
           </p:nvSpPr>
@@ -21421,7 +23825,7 @@
       </p:grpSp>
       <p:sp>
         <p:nvSpPr>
-          <p:cNvPr name="TextBox 23" id="23"/>
+          <p:cNvPr name="TextBox 27" id="27"/>
           <p:cNvSpPr txBox="true"/>
           <p:nvPr/>
         </p:nvSpPr>
@@ -21462,7 +23866,7 @@
       </p:sp>
       <p:sp>
         <p:nvSpPr>
-          <p:cNvPr name="TextBox 24" id="24"/>
+          <p:cNvPr name="TextBox 28" id="28"/>
           <p:cNvSpPr txBox="true"/>
           <p:nvPr/>
         </p:nvSpPr>
@@ -21503,7 +23907,7 @@
       </p:sp>
       <p:grpSp>
         <p:nvGrpSpPr>
-          <p:cNvPr name="Group 25" id="25"/>
+          <p:cNvPr name="Group 29" id="29"/>
           <p:cNvGrpSpPr/>
           <p:nvPr/>
         </p:nvGrpSpPr>
@@ -21517,7 +23921,7 @@
         </p:grpSpPr>
         <p:sp>
           <p:nvSpPr>
-            <p:cNvPr name="Freeform 26" id="26"/>
+            <p:cNvPr name="Freeform 30" id="30"/>
             <p:cNvSpPr/>
             <p:nvPr/>
           </p:nvSpPr>
@@ -21569,7 +23973,7 @@
       </p:grpSp>
       <p:sp>
         <p:nvSpPr>
-          <p:cNvPr name="TextBox 27" id="27"/>
+          <p:cNvPr name="TextBox 31" id="31"/>
           <p:cNvSpPr txBox="true"/>
           <p:nvPr/>
         </p:nvSpPr>
@@ -21610,7 +24014,7 @@
       </p:sp>
       <p:sp>
         <p:nvSpPr>
-          <p:cNvPr name="TextBox 28" id="28"/>
+          <p:cNvPr name="TextBox 32" id="32"/>
           <p:cNvSpPr txBox="true"/>
           <p:nvPr/>
         </p:nvSpPr>
@@ -21651,7 +24055,7 @@
       </p:sp>
       <p:sp>
         <p:nvSpPr>
-          <p:cNvPr name="TextBox 29" id="29"/>
+          <p:cNvPr name="TextBox 33" id="33"/>
           <p:cNvSpPr txBox="true"/>
           <p:nvPr/>
         </p:nvSpPr>
@@ -21692,7 +24096,7 @@
       </p:sp>
       <p:sp>
         <p:nvSpPr>
-          <p:cNvPr name="TextBox 30" id="30"/>
+          <p:cNvPr name="TextBox 34" id="34"/>
           <p:cNvSpPr txBox="true"/>
           <p:nvPr/>
         </p:nvSpPr>
@@ -21733,7 +24137,7 @@
       </p:sp>
       <p:sp>
         <p:nvSpPr>
-          <p:cNvPr name="AutoShape 31" id="31"/>
+          <p:cNvPr name="AutoShape 35" id="35"/>
           <p:cNvSpPr/>
           <p:nvPr/>
         </p:nvSpPr>
